--- a/Arquitectura de Sistemas Computacionales/Clases/Clase 15 - Presentacion del proyecto y cierre/Presentacion.pptx
+++ b/Arquitectura de Sistemas Computacionales/Clases/Clase 15 - Presentacion del proyecto y cierre/Presentacion.pptx
@@ -3376,7 +3376,7 @@
                 </a:solidFill>
                 <a:latin typeface="Calibri"/>
               </a:rPr>
-              <a:t> · Teoría breve · Taller PI · Quiz/cierre.</a:t>
+              <a:t> · Teoría breve · Taller PI · cierre.</a:t>
             </a:r>
           </a:p>
           <a:p>
@@ -3946,7 +3946,7 @@
                 </a:solidFill>
                 <a:latin typeface="Calibri"/>
               </a:rPr>
-              <a:t> Quiz corto / revisión de evidencias.</a:t>
+              <a:t> Revisión de evidencias del PI.</a:t>
             </a:r>
           </a:p>
           <a:p>

--- a/Arquitectura de Sistemas Computacionales/Clases/Clase 15 - Presentacion del proyecto y cierre/Presentacion.pptx
+++ b/Arquitectura de Sistemas Computacionales/Clases/Clase 15 - Presentacion del proyecto y cierre/Presentacion.pptx
@@ -6050,7 +6050,7 @@
                 </a:solidFill>
                 <a:latin typeface="Calibri"/>
               </a:rPr>
-              <a:t>Subir evidencias al paquete CloudLite (Drive/repo) y a ExamLab domingo 23:59.</a:t>
+              <a:t>Subir evidencias al paquete CloudLite (Drive/repo) y a ExamLab (https://examlab.lovable.app/) domingo 23:59.</a:t>
             </a:r>
           </a:p>
         </p:txBody>

--- a/Arquitectura de Sistemas Computacionales/Clases/Clase 15 - Presentacion del proyecto y cierre/Presentacion.pptx
+++ b/Arquitectura de Sistemas Computacionales/Clases/Clase 15 - Presentacion del proyecto y cierre/Presentacion.pptx
@@ -5473,25 +5473,7 @@
                 </a:solidFill>
                 <a:latin typeface="Calibri"/>
               </a:rPr>
-              <a:t> Suban paquete final a </a:t>
-            </a:r>
-            <a:r>
-              <a:rPr sz="1600" b="1" i="0">
-                <a:solidFill>
-                  <a:srgbClr val="333333"/>
-                </a:solidFill>
-                <a:latin typeface="Calibri"/>
-              </a:rPr>
-              <a:t>ExamLab</a:t>
-            </a:r>
-            <a:r>
-              <a:rPr sz="1600" b="0" i="0">
-                <a:solidFill>
-                  <a:srgbClr val="333333"/>
-                </a:solidFill>
-                <a:latin typeface="Calibri"/>
-              </a:rPr>
-              <a:t> (módulo Proyectos): informe + evidencias.</a:t>
+              <a:t> Paso 1: armen el paquete final y llenen el indice de 8 filas con entregable, nombre de archivo, ruta dentro del paquete y estado, verificando que los 8 archivos abran desde una maquina distinta a la del autor y que ningun nombre de archivo tenga espacios ni tildes que rompan la descarga.</a:t>
             </a:r>
           </a:p>
           <a:p>
@@ -5525,7 +5507,7 @@
                 </a:solidFill>
                 <a:latin typeface="Calibri"/>
               </a:rPr>
-              <a:t> Graben o presenten pitch 5–8 min según instrucción del docente.</a:t>
+              <a:t> Paso 2: escriban en ExamLab la lamina unica de arquitectura en Mermaid con las 3 zonas, los 5 contenedores, el edge, la cadena de entrega y los sistemas externos, verificando al renderizar que sea legible en una sola pantalla sin desplazamiento y que use los mismos nombres canonicos del paquete, porque esta es la lamina que van a proyectar en la sustentacion.</a:t>
             </a:r>
           </a:p>
           <a:p>
@@ -5559,7 +5541,7 @@
                 </a:solidFill>
                 <a:latin typeface="Calibri"/>
               </a:rPr>
-              <a:t> Incluyan Q&amp;A escrito (3 preguntas que se harían a sí mismos + respuestas).</a:t>
+              <a:t> Paso 3: redacten el Q and A escrito con 3 preguntas duras que el jurado podria hacer, una de decision de arquitectura, una de seguridad y una de escala o rendimiento, cada una con respuesta de maximo 4 lineas que cite la evidencia del paquete, verificando que ninguna respuesta sea no lo alcanzamos a hacer sin nombrar la decision consciente que tomaron.</a:t>
             </a:r>
           </a:p>
           <a:p>
@@ -5593,7 +5575,41 @@
                 </a:solidFill>
                 <a:latin typeface="Calibri"/>
               </a:rPr>
-              <a:t> Reflexión final (½ página): qué trade-off fue el más difícil.</a:t>
+              <a:t> Paso 4: graben o presenten el pitch de 5 a 8 minutos segun la instruccion del docente y registren la tabla de tiempos reales por seccion con el integrante que hablo, verificando que el tiempo total quede entre 5 y 8 minutos y que el enlace del video, si lo graban, se abra sin pedir permisos.</a:t>
+            </a:r>
+          </a:p>
+          <a:p>
+            <a:pPr>
+              <a:spcAft>
+                <a:spcPts val="800"/>
+              </a:spcAft>
+            </a:pPr>
+            <a:r>
+              <a:rPr sz="1600" b="0" i="0">
+                <a:solidFill>
+                  <a:srgbClr val="333333"/>
+                </a:solidFill>
+                <a:latin typeface="Calibri"/>
+              </a:rPr>
+              <a:t>–   </a:t>
+            </a:r>
+            <a:r>
+              <a:rPr sz="1600" b="1" i="0">
+                <a:solidFill>
+                  <a:srgbClr val="333333"/>
+                </a:solidFill>
+                <a:latin typeface="Calibri"/>
+              </a:rPr>
+              <a:t>5.</a:t>
+            </a:r>
+            <a:r>
+              <a:rPr sz="1600" b="0" i="0">
+                <a:solidFill>
+                  <a:srgbClr val="333333"/>
+                </a:solidFill>
+                <a:latin typeface="Calibri"/>
+              </a:rPr>
+              <a:t> Paso 5: escriban la reflexion de media pagina sobre el trade-off mas difícil y suban el paquete final completo mas las 5 preguntas a ExamLab (modulo Proyectos) en la fecha acordada, verificando que el informe, los diagramas, la evidencia del lab, el ci.yml y la presentacion esten los cinco dentro del mismo paquete.</a:t>
             </a:r>
           </a:p>
         </p:txBody>

--- a/Arquitectura de Sistemas Computacionales/Clases/Clase 15 - Presentacion del proyecto y cierre/Presentacion.pptx
+++ b/Arquitectura de Sistemas Computacionales/Clases/Clase 15 - Presentacion del proyecto y cierre/Presentacion.pptx
@@ -3921,7 +3921,7 @@
                 </a:solidFill>
                 <a:latin typeface="Calibri"/>
               </a:rPr>
-              <a:t> Taller guiado PI (demo en vivo + trabajo de equipo).</a:t>
+              <a:t> Taller guiado PI (demo en vivo + avance individual).</a:t>
             </a:r>
           </a:p>
           <a:p>
@@ -4536,7 +4536,7 @@
                 </a:solidFill>
                 <a:latin typeface="Calibri"/>
               </a:rPr>
-              <a:t>–   Equipos 2–3 · todos deben poder explicar el artefacto.</a:t>
+              <a:t>–   Individual por defecto · el docente puede autorizar equipos de 2–3; la entrega en ExamLab siempre es individual.</a:t>
             </a:r>
           </a:p>
         </p:txBody>
@@ -4772,7 +4772,7 @@
                 </a:solidFill>
                 <a:latin typeface="Calibri"/>
               </a:rPr>
-              <a:t>–   Todos hablan. Penalización si solo un integrante presenta.</a:t>
+              <a:t>–   Cubres los 5 bloques del guion; en equipo autorizado hablan todos (penalización si solo uno presenta).</a:t>
             </a:r>
           </a:p>
         </p:txBody>
@@ -5575,7 +5575,7 @@
                 </a:solidFill>
                 <a:latin typeface="Calibri"/>
               </a:rPr>
-              <a:t> Paso 4: graben o presenten el pitch de 5 a 8 minutos segun la instruccion del docente y registren la tabla de tiempos reales por seccion con el integrante que hablo, verificando que el tiempo total quede entre 5 y 8 minutos y que el enlace del video, si lo graban, se abra sin pedir permisos.</a:t>
+              <a:t> Paso 4: graben o presenten el pitch de 5 a 8 minutos segun la instruccion del docente y registren la tabla de tiempos reales por seccion con quien hablo en cada una, verificando que el tiempo total quede entre 5 y 8 minutos y que el enlace del video, si lo graban, se abra sin pedir permisos.</a:t>
             </a:r>
           </a:p>
           <a:p>

--- a/Arquitectura de Sistemas Computacionales/Clases/Clase 15 - Presentacion del proyecto y cierre/Presentacion.pptx
+++ b/Arquitectura de Sistemas Computacionales/Clases/Clase 15 - Presentacion del proyecto y cierre/Presentacion.pptx
@@ -15,6 +15,7 @@
     <p:sldId id="263" r:id="rId14"/>
     <p:sldId id="264" r:id="rId15"/>
     <p:sldId id="265" r:id="rId16"/>
+    <p:sldId id="266" r:id="rId17"/>
   </p:sldIdLst>
   <p:sldSz cx="12191695" cy="6858000" type="screen4x3"/>
   <p:notesSz cx="6858000" cy="9144000"/>
@@ -3294,7 +3295,7 @@
                 </a:solidFill>
                 <a:latin typeface="Calibri"/>
               </a:rPr>
-              <a:t>Sustentación PI CloudLite (autónoma)</a:t>
+              <a:t>Sustentación en vivo del PI CloudLite · cierre del curso</a:t>
             </a:r>
           </a:p>
         </p:txBody>
@@ -3333,7 +3334,7 @@
                 </a:solidFill>
                 <a:latin typeface="Calibri"/>
               </a:rPr>
-              <a:t>Hoy avanzamos el PI en:</a:t>
+              <a:t>Hoy cerramos el PI:</a:t>
             </a:r>
             <a:r>
               <a:rPr sz="1500" b="0" i="0">
@@ -3342,7 +3343,7 @@
                 </a:solidFill>
                 <a:latin typeface="Calibri"/>
               </a:rPr>
-              <a:t> Sustentación / entrega final del PI CloudLite App</a:t>
+              <a:t> Sustentar en vivo el PI CloudLite App y entregar el paquete final</a:t>
             </a:r>
           </a:p>
           <a:p>
@@ -3376,7 +3377,25 @@
                 </a:solidFill>
                 <a:latin typeface="Calibri"/>
               </a:rPr>
-              <a:t> · Teoría breve · Taller PI · cierre.</a:t>
+              <a:t> · sesión </a:t>
+            </a:r>
+            <a:r>
+              <a:rPr sz="1500" b="1" i="0">
+                <a:solidFill>
+                  <a:srgbClr val="333333"/>
+                </a:solidFill>
+                <a:latin typeface="Calibri"/>
+              </a:rPr>
+              <a:t>síncrona</a:t>
+            </a:r>
+            <a:r>
+              <a:rPr sz="1500" b="0" i="0">
+                <a:solidFill>
+                  <a:srgbClr val="333333"/>
+                </a:solidFill>
+                <a:latin typeface="Calibri"/>
+              </a:rPr>
+              <a:t> de sustentaciones · turnos consecutivos.</a:t>
             </a:r>
           </a:p>
           <a:p>
@@ -3392,7 +3411,43 @@
                 </a:solidFill>
                 <a:latin typeface="Calibri"/>
               </a:rPr>
-              <a:t>Herramientas gratis + navegador · sin AWS/GCP/Oracle Cloud.</a:t>
+              <a:t>Paquete subido a ExamLab </a:t>
+            </a:r>
+            <a:r>
+              <a:rPr sz="1500" b="1" i="0">
+                <a:solidFill>
+                  <a:srgbClr val="333333"/>
+                </a:solidFill>
+                <a:latin typeface="Calibri"/>
+              </a:rPr>
+              <a:t>antes</a:t>
+            </a:r>
+            <a:r>
+              <a:rPr sz="1500" b="0" i="0">
+                <a:solidFill>
+                  <a:srgbClr val="333333"/>
+                </a:solidFill>
+                <a:latin typeface="Calibri"/>
+              </a:rPr>
+              <a:t> de tu turno · defensa </a:t>
+            </a:r>
+            <a:r>
+              <a:rPr sz="1500" b="1" i="0">
+                <a:solidFill>
+                  <a:srgbClr val="333333"/>
+                </a:solidFill>
+                <a:latin typeface="Calibri"/>
+              </a:rPr>
+              <a:t>en vivo</a:t>
+            </a:r>
+            <a:r>
+              <a:rPr sz="1500" b="0" i="0">
+                <a:solidFill>
+                  <a:srgbClr val="333333"/>
+                </a:solidFill>
+                <a:latin typeface="Calibri"/>
+              </a:rPr>
+              <a:t>, no video grabado.</a:t>
             </a:r>
           </a:p>
         </p:txBody>
@@ -3467,6 +3522,637 @@
         <p:spPr>
           <a:xfrm>
             <a:off x="0" y="0"/>
+            <a:ext cx="12191695" cy="960120"/>
+          </a:xfrm>
+          <a:prstGeom prst="rect">
+            <a:avLst/>
+          </a:prstGeom>
+          <a:solidFill>
+            <a:srgbClr val="095292"/>
+          </a:solidFill>
+          <a:ln>
+            <a:noFill/>
+          </a:ln>
+        </p:spPr>
+        <p:style>
+          <a:lnRef idx="1">
+            <a:schemeClr val="accent1"/>
+          </a:lnRef>
+          <a:fillRef idx="3">
+            <a:schemeClr val="accent1"/>
+          </a:fillRef>
+          <a:effectRef idx="2">
+            <a:schemeClr val="accent1"/>
+          </a:effectRef>
+          <a:fontRef idx="minor">
+            <a:schemeClr val="lt1"/>
+          </a:fontRef>
+        </p:style>
+        <p:txBody>
+          <a:bodyPr rtlCol="0" anchor="ctr"/>
+          <a:lstStyle/>
+          <a:p>
+            <a:pPr algn="ctr"/>
+          </a:p>
+        </p:txBody>
+      </p:sp>
+      <p:sp>
+        <p:nvSpPr>
+          <p:cNvPr id="3" name="Rectangle 2"/>
+          <p:cNvSpPr/>
+          <p:nvPr/>
+        </p:nvSpPr>
+        <p:spPr>
+          <a:xfrm>
+            <a:off x="0" y="960120"/>
+            <a:ext cx="12191695" cy="41148"/>
+          </a:xfrm>
+          <a:prstGeom prst="rect">
+            <a:avLst/>
+          </a:prstGeom>
+          <a:solidFill>
+            <a:srgbClr val="FFD000"/>
+          </a:solidFill>
+          <a:ln>
+            <a:noFill/>
+          </a:ln>
+        </p:spPr>
+        <p:style>
+          <a:lnRef idx="1">
+            <a:schemeClr val="accent1"/>
+          </a:lnRef>
+          <a:fillRef idx="3">
+            <a:schemeClr val="accent1"/>
+          </a:fillRef>
+          <a:effectRef idx="2">
+            <a:schemeClr val="accent1"/>
+          </a:effectRef>
+          <a:fontRef idx="minor">
+            <a:schemeClr val="lt1"/>
+          </a:fontRef>
+        </p:style>
+        <p:txBody>
+          <a:bodyPr rtlCol="0" anchor="ctr"/>
+          <a:lstStyle/>
+          <a:p>
+            <a:pPr algn="ctr"/>
+          </a:p>
+        </p:txBody>
+      </p:sp>
+      <p:sp>
+        <p:nvSpPr>
+          <p:cNvPr id="4" name="TextBox 3"/>
+          <p:cNvSpPr txBox="1"/>
+          <p:nvPr/>
+        </p:nvSpPr>
+        <p:spPr>
+          <a:xfrm>
+            <a:off x="457200" y="164592"/>
+            <a:ext cx="11277295" cy="502920"/>
+          </a:xfrm>
+          <a:prstGeom prst="rect">
+            <a:avLst/>
+          </a:prstGeom>
+          <a:noFill/>
+        </p:spPr>
+        <p:txBody>
+          <a:bodyPr wrap="square">
+            <a:spAutoFit/>
+          </a:bodyPr>
+          <a:lstStyle/>
+          <a:p>
+            <a:r>
+              <a:rPr sz="2600" b="1" i="0">
+                <a:solidFill>
+                  <a:srgbClr val="FFFFFF"/>
+                </a:solidFill>
+                <a:latin typeface="Calibri"/>
+              </a:rPr>
+              <a:t>Para continuar (PI)</a:t>
+            </a:r>
+          </a:p>
+        </p:txBody>
+      </p:sp>
+      <p:sp>
+        <p:nvSpPr>
+          <p:cNvPr id="5" name="Rounded Rectangle 4"/>
+          <p:cNvSpPr/>
+          <p:nvPr/>
+        </p:nvSpPr>
+        <p:spPr>
+          <a:xfrm>
+            <a:off x="457200" y="1261872"/>
+            <a:ext cx="11277295" cy="1051560"/>
+          </a:xfrm>
+          <a:prstGeom prst="roundRect">
+            <a:avLst>
+              <a:gd name="adj" fmla="val 12000"/>
+            </a:avLst>
+          </a:prstGeom>
+          <a:solidFill>
+            <a:srgbClr val="E8F4FA"/>
+          </a:solidFill>
+          <a:ln>
+            <a:noFill/>
+          </a:ln>
+        </p:spPr>
+        <p:style>
+          <a:lnRef idx="1">
+            <a:schemeClr val="accent1"/>
+          </a:lnRef>
+          <a:fillRef idx="3">
+            <a:schemeClr val="accent1"/>
+          </a:fillRef>
+          <a:effectRef idx="2">
+            <a:schemeClr val="accent1"/>
+          </a:effectRef>
+          <a:fontRef idx="minor">
+            <a:schemeClr val="lt1"/>
+          </a:fontRef>
+        </p:style>
+        <p:txBody>
+          <a:bodyPr rtlCol="0" anchor="ctr"/>
+          <a:lstStyle/>
+          <a:p>
+            <a:pPr algn="ctr"/>
+          </a:p>
+        </p:txBody>
+      </p:sp>
+      <p:sp>
+        <p:nvSpPr>
+          <p:cNvPr id="6" name="Rectangle 5"/>
+          <p:cNvSpPr/>
+          <p:nvPr/>
+        </p:nvSpPr>
+        <p:spPr>
+          <a:xfrm>
+            <a:off x="457200" y="1261872"/>
+            <a:ext cx="128016" cy="1051560"/>
+          </a:xfrm>
+          <a:prstGeom prst="rect">
+            <a:avLst/>
+          </a:prstGeom>
+          <a:solidFill>
+            <a:srgbClr val="269CCB"/>
+          </a:solidFill>
+          <a:ln>
+            <a:noFill/>
+          </a:ln>
+        </p:spPr>
+        <p:style>
+          <a:lnRef idx="1">
+            <a:schemeClr val="accent1"/>
+          </a:lnRef>
+          <a:fillRef idx="3">
+            <a:schemeClr val="accent1"/>
+          </a:fillRef>
+          <a:effectRef idx="2">
+            <a:schemeClr val="accent1"/>
+          </a:effectRef>
+          <a:fontRef idx="minor">
+            <a:schemeClr val="lt1"/>
+          </a:fontRef>
+        </p:style>
+        <p:txBody>
+          <a:bodyPr rtlCol="0" anchor="ctr"/>
+          <a:lstStyle/>
+          <a:p>
+            <a:pPr algn="ctr"/>
+          </a:p>
+        </p:txBody>
+      </p:sp>
+      <p:sp>
+        <p:nvSpPr>
+          <p:cNvPr id="7" name="TextBox 6"/>
+          <p:cNvSpPr txBox="1"/>
+          <p:nvPr/>
+        </p:nvSpPr>
+        <p:spPr>
+          <a:xfrm>
+            <a:off x="777240" y="1399031"/>
+            <a:ext cx="10774375" cy="822959"/>
+          </a:xfrm>
+          <a:prstGeom prst="rect">
+            <a:avLst/>
+          </a:prstGeom>
+          <a:noFill/>
+        </p:spPr>
+        <p:txBody>
+          <a:bodyPr wrap="square">
+            <a:spAutoFit/>
+          </a:bodyPr>
+          <a:lstStyle/>
+          <a:p>
+            <a:r>
+              <a:rPr sz="1200" b="1" i="0">
+                <a:solidFill>
+                  <a:srgbClr val="269CCB"/>
+                </a:solidFill>
+                <a:latin typeface="Calibri"/>
+              </a:rPr>
+              <a:t>Info</a:t>
+            </a:r>
+          </a:p>
+          <a:p>
+            <a:pPr>
+              <a:spcBef>
+                <a:spcPts val="400"/>
+              </a:spcBef>
+            </a:pPr>
+            <a:r>
+              <a:rPr sz="1400" b="0" i="0">
+                <a:solidFill>
+                  <a:srgbClr val="333333"/>
+                </a:solidFill>
+                <a:latin typeface="Calibri"/>
+              </a:rPr>
+              <a:t>Entregable: Paquete final en ExamLab (módulo Proyectos) + pitch de 5–8 min sustentado hoy en clase + Q&amp;A</a:t>
+            </a:r>
+          </a:p>
+        </p:txBody>
+      </p:sp>
+      <p:sp>
+        <p:nvSpPr>
+          <p:cNvPr id="8" name="Rounded Rectangle 7"/>
+          <p:cNvSpPr/>
+          <p:nvPr/>
+        </p:nvSpPr>
+        <p:spPr>
+          <a:xfrm>
+            <a:off x="457200" y="2478024"/>
+            <a:ext cx="11277295" cy="1051560"/>
+          </a:xfrm>
+          <a:prstGeom prst="roundRect">
+            <a:avLst>
+              <a:gd name="adj" fmla="val 12000"/>
+            </a:avLst>
+          </a:prstGeom>
+          <a:solidFill>
+            <a:srgbClr val="FFF8E1"/>
+          </a:solidFill>
+          <a:ln>
+            <a:noFill/>
+          </a:ln>
+        </p:spPr>
+        <p:style>
+          <a:lnRef idx="1">
+            <a:schemeClr val="accent1"/>
+          </a:lnRef>
+          <a:fillRef idx="3">
+            <a:schemeClr val="accent1"/>
+          </a:fillRef>
+          <a:effectRef idx="2">
+            <a:schemeClr val="accent1"/>
+          </a:effectRef>
+          <a:fontRef idx="minor">
+            <a:schemeClr val="lt1"/>
+          </a:fontRef>
+        </p:style>
+        <p:txBody>
+          <a:bodyPr rtlCol="0" anchor="ctr"/>
+          <a:lstStyle/>
+          <a:p>
+            <a:pPr algn="ctr"/>
+          </a:p>
+        </p:txBody>
+      </p:sp>
+      <p:sp>
+        <p:nvSpPr>
+          <p:cNvPr id="9" name="Rectangle 8"/>
+          <p:cNvSpPr/>
+          <p:nvPr/>
+        </p:nvSpPr>
+        <p:spPr>
+          <a:xfrm>
+            <a:off x="457200" y="2478024"/>
+            <a:ext cx="128016" cy="1051560"/>
+          </a:xfrm>
+          <a:prstGeom prst="rect">
+            <a:avLst/>
+          </a:prstGeom>
+          <a:solidFill>
+            <a:srgbClr val="FFD000"/>
+          </a:solidFill>
+          <a:ln>
+            <a:noFill/>
+          </a:ln>
+        </p:spPr>
+        <p:style>
+          <a:lnRef idx="1">
+            <a:schemeClr val="accent1"/>
+          </a:lnRef>
+          <a:fillRef idx="3">
+            <a:schemeClr val="accent1"/>
+          </a:fillRef>
+          <a:effectRef idx="2">
+            <a:schemeClr val="accent1"/>
+          </a:effectRef>
+          <a:fontRef idx="minor">
+            <a:schemeClr val="lt1"/>
+          </a:fontRef>
+        </p:style>
+        <p:txBody>
+          <a:bodyPr rtlCol="0" anchor="ctr"/>
+          <a:lstStyle/>
+          <a:p>
+            <a:pPr algn="ctr"/>
+          </a:p>
+        </p:txBody>
+      </p:sp>
+      <p:sp>
+        <p:nvSpPr>
+          <p:cNvPr id="10" name="TextBox 9"/>
+          <p:cNvSpPr txBox="1"/>
+          <p:nvPr/>
+        </p:nvSpPr>
+        <p:spPr>
+          <a:xfrm>
+            <a:off x="777240" y="2615184"/>
+            <a:ext cx="10774375" cy="822959"/>
+          </a:xfrm>
+          <a:prstGeom prst="rect">
+            <a:avLst/>
+          </a:prstGeom>
+          <a:noFill/>
+        </p:spPr>
+        <p:txBody>
+          <a:bodyPr wrap="square">
+            <a:spAutoFit/>
+          </a:bodyPr>
+          <a:lstStyle/>
+          <a:p>
+            <a:r>
+              <a:rPr sz="1200" b="1" i="0">
+                <a:solidFill>
+                  <a:srgbClr val="FFD000"/>
+                </a:solidFill>
+                <a:latin typeface="Calibri"/>
+              </a:rPr>
+              <a:t>Aclaración</a:t>
+            </a:r>
+          </a:p>
+          <a:p>
+            <a:pPr>
+              <a:spcBef>
+                <a:spcPts val="400"/>
+              </a:spcBef>
+            </a:pPr>
+            <a:r>
+              <a:rPr sz="1400" b="0" i="0">
+                <a:solidFill>
+                  <a:srgbClr val="333333"/>
+                </a:solidFill>
+                <a:latin typeface="Calibri"/>
+              </a:rPr>
+              <a:t>El paquete se sube a ExamLab (https://examlab.lovable.app/ · módulo Proyectos) </a:t>
+            </a:r>
+            <a:r>
+              <a:rPr sz="1400" b="1" i="0">
+                <a:solidFill>
+                  <a:srgbClr val="333333"/>
+                </a:solidFill>
+                <a:latin typeface="Calibri"/>
+              </a:rPr>
+              <a:t>antes</a:t>
+            </a:r>
+            <a:r>
+              <a:rPr sz="1400" b="0" i="0">
+                <a:solidFill>
+                  <a:srgbClr val="333333"/>
+                </a:solidFill>
+                <a:latin typeface="Calibri"/>
+              </a:rPr>
+              <a:t> del bloque de sustentaciones.</a:t>
+            </a:r>
+          </a:p>
+        </p:txBody>
+      </p:sp>
+      <p:sp>
+        <p:nvSpPr>
+          <p:cNvPr id="11" name="Rounded Rectangle 10"/>
+          <p:cNvSpPr/>
+          <p:nvPr/>
+        </p:nvSpPr>
+        <p:spPr>
+          <a:xfrm>
+            <a:off x="457200" y="3694176"/>
+            <a:ext cx="11277295" cy="1051560"/>
+          </a:xfrm>
+          <a:prstGeom prst="roundRect">
+            <a:avLst>
+              <a:gd name="adj" fmla="val 12000"/>
+            </a:avLst>
+          </a:prstGeom>
+          <a:solidFill>
+            <a:srgbClr val="FBE4E4"/>
+          </a:solidFill>
+          <a:ln>
+            <a:noFill/>
+          </a:ln>
+        </p:spPr>
+        <p:style>
+          <a:lnRef idx="1">
+            <a:schemeClr val="accent1"/>
+          </a:lnRef>
+          <a:fillRef idx="3">
+            <a:schemeClr val="accent1"/>
+          </a:fillRef>
+          <a:effectRef idx="2">
+            <a:schemeClr val="accent1"/>
+          </a:effectRef>
+          <a:fontRef idx="minor">
+            <a:schemeClr val="lt1"/>
+          </a:fontRef>
+        </p:style>
+        <p:txBody>
+          <a:bodyPr rtlCol="0" anchor="ctr"/>
+          <a:lstStyle/>
+          <a:p>
+            <a:pPr algn="ctr"/>
+          </a:p>
+        </p:txBody>
+      </p:sp>
+      <p:sp>
+        <p:nvSpPr>
+          <p:cNvPr id="12" name="Rectangle 11"/>
+          <p:cNvSpPr/>
+          <p:nvPr/>
+        </p:nvSpPr>
+        <p:spPr>
+          <a:xfrm>
+            <a:off x="457200" y="3694176"/>
+            <a:ext cx="128016" cy="1051560"/>
+          </a:xfrm>
+          <a:prstGeom prst="rect">
+            <a:avLst/>
+          </a:prstGeom>
+          <a:solidFill>
+            <a:srgbClr val="A02030"/>
+          </a:solidFill>
+          <a:ln>
+            <a:noFill/>
+          </a:ln>
+        </p:spPr>
+        <p:style>
+          <a:lnRef idx="1">
+            <a:schemeClr val="accent1"/>
+          </a:lnRef>
+          <a:fillRef idx="3">
+            <a:schemeClr val="accent1"/>
+          </a:fillRef>
+          <a:effectRef idx="2">
+            <a:schemeClr val="accent1"/>
+          </a:effectRef>
+          <a:fontRef idx="minor">
+            <a:schemeClr val="lt1"/>
+          </a:fontRef>
+        </p:style>
+        <p:txBody>
+          <a:bodyPr rtlCol="0" anchor="ctr"/>
+          <a:lstStyle/>
+          <a:p>
+            <a:pPr algn="ctr"/>
+          </a:p>
+        </p:txBody>
+      </p:sp>
+      <p:sp>
+        <p:nvSpPr>
+          <p:cNvPr id="13" name="TextBox 12"/>
+          <p:cNvSpPr txBox="1"/>
+          <p:nvPr/>
+        </p:nvSpPr>
+        <p:spPr>
+          <a:xfrm>
+            <a:off x="777240" y="3831336"/>
+            <a:ext cx="10774375" cy="822959"/>
+          </a:xfrm>
+          <a:prstGeom prst="rect">
+            <a:avLst/>
+          </a:prstGeom>
+          <a:noFill/>
+        </p:spPr>
+        <p:txBody>
+          <a:bodyPr wrap="square">
+            <a:spAutoFit/>
+          </a:bodyPr>
+          <a:lstStyle/>
+          <a:p>
+            <a:r>
+              <a:rPr sz="1200" b="1" i="0">
+                <a:solidFill>
+                  <a:srgbClr val="A02030"/>
+                </a:solidFill>
+                <a:latin typeface="Calibri"/>
+              </a:rPr>
+              <a:t>Atención</a:t>
+            </a:r>
+          </a:p>
+          <a:p>
+            <a:pPr>
+              <a:spcBef>
+                <a:spcPts val="400"/>
+              </a:spcBef>
+            </a:pPr>
+            <a:r>
+              <a:rPr sz="1400" b="0" i="0">
+                <a:solidFill>
+                  <a:srgbClr val="333333"/>
+                </a:solidFill>
+                <a:latin typeface="Calibri"/>
+              </a:rPr>
+              <a:t>La sustentación es </a:t>
+            </a:r>
+            <a:r>
+              <a:rPr sz="1400" b="1" i="0">
+                <a:solidFill>
+                  <a:srgbClr val="333333"/>
+                </a:solidFill>
+                <a:latin typeface="Calibri"/>
+              </a:rPr>
+              <a:t>en vivo</a:t>
+            </a:r>
+            <a:r>
+              <a:rPr sz="1400" b="0" i="0">
+                <a:solidFill>
+                  <a:srgbClr val="333333"/>
+                </a:solidFill>
+                <a:latin typeface="Calibri"/>
+              </a:rPr>
+              <a:t> y con Q&amp;A: no se acepta video grabado en su lugar.</a:t>
+            </a:r>
+          </a:p>
+        </p:txBody>
+      </p:sp>
+      <p:sp>
+        <p:nvSpPr>
+          <p:cNvPr id="14" name="TextBox 13"/>
+          <p:cNvSpPr txBox="1"/>
+          <p:nvPr/>
+        </p:nvSpPr>
+        <p:spPr>
+          <a:xfrm>
+            <a:off x="11185855" y="6473952"/>
+            <a:ext cx="640080" cy="274320"/>
+          </a:xfrm>
+          <a:prstGeom prst="rect">
+            <a:avLst/>
+          </a:prstGeom>
+          <a:noFill/>
+        </p:spPr>
+        <p:txBody>
+          <a:bodyPr wrap="square">
+            <a:spAutoFit/>
+          </a:bodyPr>
+          <a:lstStyle/>
+          <a:p>
+            <a:pPr algn="r"/>
+            <a:r>
+              <a:rPr sz="1100" b="0" i="0">
+                <a:solidFill>
+                  <a:srgbClr val="666666"/>
+                </a:solidFill>
+                <a:latin typeface="Calibri"/>
+              </a:rPr>
+              <a:t>10</a:t>
+            </a:r>
+          </a:p>
+        </p:txBody>
+      </p:sp>
+    </p:spTree>
+  </p:cSld>
+  <p:clrMapOvr>
+    <a:masterClrMapping/>
+  </p:clrMapOvr>
+</p:sld>
+</file>
+
+<file path=ppt/slides/slide11.xml><?xml version="1.0" encoding="utf-8"?>
+<p:sld xmlns:a="http://schemas.openxmlformats.org/drawingml/2006/main" xmlns:p="http://schemas.openxmlformats.org/presentationml/2006/main" xmlns:r="http://schemas.openxmlformats.org/officeDocument/2006/relationships">
+  <p:cSld>
+    <p:bg>
+      <p:bgPr>
+        <a:solidFill>
+          <a:srgbClr val="FFFFFF"/>
+        </a:solidFill>
+        <a:effectLst/>
+      </p:bgPr>
+    </p:bg>
+    <p:spTree>
+      <p:nvGrpSpPr>
+        <p:cNvPr id="1" name=""/>
+        <p:cNvGrpSpPr/>
+        <p:nvPr/>
+      </p:nvGrpSpPr>
+      <p:grpSpPr/>
+      <p:sp>
+        <p:nvSpPr>
+          <p:cNvPr id="2" name="Rectangle 1"/>
+          <p:cNvSpPr/>
+          <p:nvPr/>
+        </p:nvSpPr>
+        <p:spPr>
+          <a:xfrm>
+            <a:off x="0" y="0"/>
             <a:ext cx="12191695" cy="164592"/>
           </a:xfrm>
           <a:prstGeom prst="rect">
@@ -3553,7 +4239,7 @@
                 </a:solidFill>
                 <a:latin typeface="Calibri"/>
               </a:rPr>
-              <a:t>Clase 15 · PI en movimiento</a:t>
+              <a:t>Clase 15 · cierre del PI CloudLite</a:t>
             </a:r>
           </a:p>
         </p:txBody>
@@ -3592,7 +4278,7 @@
                 </a:solidFill>
                 <a:latin typeface="Calibri"/>
               </a:rPr>
-              <a:t>Sustentación / entrega final del PI CloudLite App</a:t>
+              <a:t>Sustentar en vivo el PI CloudLite App y entregar el paquete final</a:t>
             </a:r>
           </a:p>
           <a:p>
@@ -3608,7 +4294,7 @@
                 </a:solidFill>
                 <a:latin typeface="Calibri"/>
               </a:rPr>
-              <a:t>Evidencia: Paquete final + presentación 5–8 min (entrega en ExamLab · módulo Proyectos)</a:t>
+              <a:t>Evidencia: Paquete final en ExamLab (módulo Proyectos) + pitch de 5–8 min sustentado hoy en clase + Q&amp;A</a:t>
             </a:r>
           </a:p>
           <a:p>
@@ -3624,7 +4310,7 @@
                 </a:solidFill>
                 <a:latin typeface="Calibri"/>
               </a:rPr>
-              <a:t>Siguiente paso = siguiente hito del PI CloudLite</a:t>
+              <a:t>Conserva el repo (informe, diagramas, Dockerfile, ci.yml) como portafolio</a:t>
             </a:r>
           </a:p>
         </p:txBody>
@@ -3659,7 +4345,7 @@
                 </a:solidFill>
                 <a:latin typeface="Calibri"/>
               </a:rPr>
-              <a:t>Teoría al servicio del proyecto</a:t>
+              <a:t>Arquitectura = decisiones documentadas con sus consecuencias</a:t>
             </a:r>
           </a:p>
         </p:txBody>
@@ -3862,7 +4548,7 @@
                 </a:solidFill>
                 <a:latin typeface="Calibri"/>
               </a:rPr>
-              <a:t> Encuadre: hoy avanzamos el PI en… + entregable concreto.</a:t>
+              <a:t> Encuadre + sorteo del orden de turnos.</a:t>
             </a:r>
           </a:p>
           <a:p>
@@ -3878,7 +4564,7 @@
                 </a:solidFill>
                 <a:latin typeface="Calibri"/>
               </a:rPr>
-              <a:t>10–40</a:t>
+              <a:t>10–110</a:t>
             </a:r>
             <a:r>
               <a:rPr sz="1600" b="0" i="0">
@@ -3887,7 +4573,25 @@
                 </a:solidFill>
                 <a:latin typeface="Calibri"/>
               </a:rPr>
-              <a:t> Teoría Core breve (solo lo necesario para el taller PI).</a:t>
+              <a:t> Sustentaciones: </a:t>
+            </a:r>
+            <a:r>
+              <a:rPr sz="1600" b="1" i="0">
+                <a:solidFill>
+                  <a:srgbClr val="333333"/>
+                </a:solidFill>
+                <a:latin typeface="Calibri"/>
+              </a:rPr>
+              <a:t>6 min de pitch + 2–4 min de Q&amp;A</a:t>
+            </a:r>
+            <a:r>
+              <a:rPr sz="1600" b="0" i="0">
+                <a:solidFill>
+                  <a:srgbClr val="333333"/>
+                </a:solidFill>
+                <a:latin typeface="Calibri"/>
+              </a:rPr>
+              <a:t> por turno.</a:t>
             </a:r>
           </a:p>
           <a:p>
@@ -3897,31 +4601,22 @@
               </a:spcAft>
             </a:pPr>
             <a:r>
+              <a:rPr sz="1600" b="1" i="0">
+                <a:solidFill>
+                  <a:srgbClr val="333333"/>
+                </a:solidFill>
+                <a:latin typeface="Calibri"/>
+              </a:rPr>
+              <a:t>110–120</a:t>
+            </a:r>
+            <a:r>
               <a:rPr sz="1600" b="0" i="0">
                 <a:solidFill>
                   <a:srgbClr val="333333"/>
                 </a:solidFill>
                 <a:latin typeface="Calibri"/>
               </a:rPr>
-              <a:t>–   </a:t>
-            </a:r>
-            <a:r>
-              <a:rPr sz="1600" b="1" i="0">
-                <a:solidFill>
-                  <a:srgbClr val="333333"/>
-                </a:solidFill>
-                <a:latin typeface="Calibri"/>
-              </a:rPr>
-              <a:t>40–100</a:t>
-            </a:r>
-            <a:r>
-              <a:rPr sz="1600" b="0" i="0">
-                <a:solidFill>
-                  <a:srgbClr val="333333"/>
-                </a:solidFill>
-                <a:latin typeface="Calibri"/>
-              </a:rPr>
-              <a:t> Taller guiado PI (demo en vivo + avance individual).</a:t>
+              <a:t> Cierre del curso.</a:t>
             </a:r>
           </a:p>
           <a:p>
@@ -3931,13 +4626,22 @@
               </a:spcAft>
             </a:pPr>
             <a:r>
+              <a:rPr sz="1600" b="0" i="0">
+                <a:solidFill>
+                  <a:srgbClr val="333333"/>
+                </a:solidFill>
+                <a:latin typeface="Calibri"/>
+              </a:rPr>
+              <a:t>–   El paquete debe estar </a:t>
+            </a:r>
+            <a:r>
               <a:rPr sz="1600" b="1" i="0">
                 <a:solidFill>
                   <a:srgbClr val="333333"/>
                 </a:solidFill>
                 <a:latin typeface="Calibri"/>
               </a:rPr>
-              <a:t>100–115</a:t>
+              <a:t>subido a ExamLab antes</a:t>
             </a:r>
             <a:r>
               <a:rPr sz="1600" b="0" i="0">
@@ -3946,7 +4650,7 @@
                 </a:solidFill>
                 <a:latin typeface="Calibri"/>
               </a:rPr>
-              <a:t> Revisión de evidencias del PI.</a:t>
+              <a:t> de tu turno.</a:t>
             </a:r>
           </a:p>
           <a:p>
@@ -3956,13 +4660,22 @@
               </a:spcAft>
             </a:pPr>
             <a:r>
+              <a:rPr sz="1600" b="0" i="0">
+                <a:solidFill>
+                  <a:srgbClr val="333333"/>
+                </a:solidFill>
+                <a:latin typeface="Calibri"/>
+              </a:rPr>
+              <a:t>–   Sesión </a:t>
+            </a:r>
+            <a:r>
               <a:rPr sz="1600" b="1" i="0">
                 <a:solidFill>
                   <a:srgbClr val="333333"/>
                 </a:solidFill>
                 <a:latin typeface="Calibri"/>
               </a:rPr>
-              <a:t>115–120</a:t>
+              <a:t>síncrona</a:t>
             </a:r>
             <a:r>
               <a:rPr sz="1600" b="0" i="0">
@@ -3971,7 +4684,7 @@
                 </a:solidFill>
                 <a:latin typeface="Calibri"/>
               </a:rPr>
-              <a:t> Cierre: criterio de éxito + plazo domingo 23:59.</a:t>
+              <a:t>: la defensa no se reemplaza por video grabado.</a:t>
             </a:r>
           </a:p>
         </p:txBody>
@@ -4191,7 +4904,25 @@
                 </a:solidFill>
                 <a:latin typeface="Calibri"/>
               </a:rPr>
-              <a:t>–   Entregar y sustentar CloudLite App con evidencias completas.</a:t>
+              <a:t>–   Sustentar </a:t>
+            </a:r>
+            <a:r>
+              <a:rPr sz="1600" b="1" i="0">
+                <a:solidFill>
+                  <a:srgbClr val="333333"/>
+                </a:solidFill>
+                <a:latin typeface="Calibri"/>
+              </a:rPr>
+              <a:t>en vivo</a:t>
+            </a:r>
+            <a:r>
+              <a:rPr sz="1600" b="0" i="0">
+                <a:solidFill>
+                  <a:srgbClr val="333333"/>
+                </a:solidFill>
+                <a:latin typeface="Calibri"/>
+              </a:rPr>
+              <a:t> CloudLite App con evidencias completas.</a:t>
             </a:r>
           </a:p>
           <a:p>
@@ -4207,7 +4938,25 @@
                 </a:solidFill>
                 <a:latin typeface="Calibri"/>
               </a:rPr>
-              <a:t>–   Responder preguntas de arquitectura (ADRs, amenazas, escala).</a:t>
+              <a:t>–   Responder </a:t>
+            </a:r>
+            <a:r>
+              <a:rPr sz="1600" b="1" i="0">
+                <a:solidFill>
+                  <a:srgbClr val="333333"/>
+                </a:solidFill>
+                <a:latin typeface="Calibri"/>
+              </a:rPr>
+              <a:t>en vivo</a:t>
+            </a:r>
+            <a:r>
+              <a:rPr sz="1600" b="0" i="0">
+                <a:solidFill>
+                  <a:srgbClr val="333333"/>
+                </a:solidFill>
+                <a:latin typeface="Calibri"/>
+              </a:rPr>
+              <a:t> preguntas de arquitectura (ADRs, amenazas, escala).</a:t>
             </a:r>
           </a:p>
           <a:p>
@@ -4461,7 +5210,7 @@
                 </a:solidFill>
                 <a:latin typeface="Calibri"/>
               </a:rPr>
-              <a:t> Paquete final + presentación 5–8 min (entrega en ExamLab · módulo Proyectos)</a:t>
+              <a:t> Paquete final en ExamLab (módulo Proyectos) + pitch de 5–8 min sustentado hoy en clase + Q&amp;A</a:t>
             </a:r>
           </a:p>
           <a:p>
@@ -4502,7 +5251,7 @@
                 </a:solidFill>
                 <a:latin typeface="Calibri"/>
               </a:rPr>
-              <a:t>–   Todo lo que construyan hoy entra al </a:t>
+              <a:t>–   Hoy no se construye: se </a:t>
             </a:r>
             <a:r>
               <a:rPr sz="1600" b="1" i="0">
@@ -4511,7 +5260,7 @@
                 </a:solidFill>
                 <a:latin typeface="Calibri"/>
               </a:rPr>
-              <a:t>informe/repo del PI</a:t>
+              <a:t>defiende</a:t>
             </a:r>
             <a:r>
               <a:rPr sz="1600" b="0" i="0">
@@ -4520,7 +5269,7 @@
                 </a:solidFill>
                 <a:latin typeface="Calibri"/>
               </a:rPr>
-              <a:t> (no es lab suelto).</a:t>
+              <a:t> lo que ya está en el paquete del PI.</a:t>
             </a:r>
           </a:p>
           <a:p>
@@ -4717,7 +5466,7 @@
                 </a:solidFill>
                 <a:latin typeface="Calibri"/>
               </a:rPr>
-              <a:t>Rúbrica de sustentación (recordatorio)</a:t>
+              <a:t>Cómo se ordena la sesión de hoy</a:t>
             </a:r>
           </a:p>
         </p:txBody>
@@ -4756,7 +5505,25 @@
                 </a:solidFill>
                 <a:latin typeface="Calibri"/>
               </a:rPr>
-              <a:t>–   Claridad del problema · calidad de diagramas · demo lab/CI · respuestas.</a:t>
+              <a:t>–   Sustentación </a:t>
+            </a:r>
+            <a:r>
+              <a:rPr sz="1600" b="1" i="0">
+                <a:solidFill>
+                  <a:srgbClr val="333333"/>
+                </a:solidFill>
+                <a:latin typeface="Calibri"/>
+              </a:rPr>
+              <a:t>en vivo</a:t>
+            </a:r>
+            <a:r>
+              <a:rPr sz="1600" b="0" i="0">
+                <a:solidFill>
+                  <a:srgbClr val="333333"/>
+                </a:solidFill>
+                <a:latin typeface="Calibri"/>
+              </a:rPr>
+              <a:t>, en este bloque: no se reemplaza por video grabado.</a:t>
             </a:r>
           </a:p>
           <a:p>
@@ -4772,7 +5539,75 @@
                 </a:solidFill>
                 <a:latin typeface="Calibri"/>
               </a:rPr>
-              <a:t>–   Cubres los 5 bloques del guion; en equipo autorizado hablan todos (penalización si solo uno presenta).</a:t>
+              <a:t>–   Turnos de </a:t>
+            </a:r>
+            <a:r>
+              <a:rPr sz="1600" b="1" i="0">
+                <a:solidFill>
+                  <a:srgbClr val="333333"/>
+                </a:solidFill>
+                <a:latin typeface="Calibri"/>
+              </a:rPr>
+              <a:t>6 min de pitch + 2–4 min de Q&amp;A</a:t>
+            </a:r>
+            <a:r>
+              <a:rPr sz="1600" b="0" i="0">
+                <a:solidFill>
+                  <a:srgbClr val="333333"/>
+                </a:solidFill>
+                <a:latin typeface="Calibri"/>
+              </a:rPr>
+              <a:t>; el orden se sortea al empezar.</a:t>
+            </a:r>
+          </a:p>
+          <a:p>
+            <a:pPr>
+              <a:spcAft>
+                <a:spcPts val="800"/>
+              </a:spcAft>
+            </a:pPr>
+            <a:r>
+              <a:rPr sz="1600" b="0" i="0">
+                <a:solidFill>
+                  <a:srgbClr val="333333"/>
+                </a:solidFill>
+                <a:latin typeface="Calibri"/>
+              </a:rPr>
+              <a:t>–   Ten el paquete ya subido a ExamLab </a:t>
+            </a:r>
+            <a:r>
+              <a:rPr sz="1600" b="1" i="0">
+                <a:solidFill>
+                  <a:srgbClr val="333333"/>
+                </a:solidFill>
+                <a:latin typeface="Calibri"/>
+              </a:rPr>
+              <a:t>antes</a:t>
+            </a:r>
+            <a:r>
+              <a:rPr sz="1600" b="0" i="0">
+                <a:solidFill>
+                  <a:srgbClr val="333333"/>
+                </a:solidFill>
+                <a:latin typeface="Calibri"/>
+              </a:rPr>
+              <a:t> de tu turno (no se sube presentando).</a:t>
+            </a:r>
+          </a:p>
+          <a:p>
+            <a:pPr>
+              <a:spcAft>
+                <a:spcPts val="800"/>
+              </a:spcAft>
+            </a:pPr>
+            <a:r>
+              <a:rPr sz="1600" b="0" i="0">
+                <a:solidFill>
+                  <a:srgbClr val="333333"/>
+                </a:solidFill>
+                <a:latin typeface="Calibri"/>
+              </a:rPr>
+              <a:t>–   Mientras otros presentan, escuchas: el cierre del curso se hace con todo el grupo.</a:t>
             </a:r>
           </a:p>
         </p:txBody>
@@ -4953,7 +5788,7 @@
                 </a:solidFill>
                 <a:latin typeface="Calibri"/>
               </a:rPr>
-              <a:t>Checklist final</a:t>
+              <a:t>Rúbrica de sustentación (recordatorio)</a:t>
             </a:r>
           </a:p>
         </p:txBody>
@@ -4992,7 +5827,7 @@
                 </a:solidFill>
                 <a:latin typeface="Calibri"/>
               </a:rPr>
-              <a:t>–   Informe completo · 3 diagramas · Dockerfile+captura · Actions · pitch.</a:t>
+              <a:t>–   Claridad del problema · calidad de diagramas · demo lab/CI · respuestas.</a:t>
             </a:r>
           </a:p>
           <a:p>
@@ -5008,7 +5843,7 @@
                 </a:solidFill>
                 <a:latin typeface="Calibri"/>
               </a:rPr>
-              <a:t>–   Sin cuentas cloud de pago · sin instalar hipervisores como requisito.</a:t>
+              <a:t>–   Cubres los 5 bloques del guion; en equipo autorizado hablan todos (penalización si solo uno presenta).</a:t>
             </a:r>
           </a:p>
         </p:txBody>
@@ -5189,7 +6024,7 @@
                 </a:solidFill>
                 <a:latin typeface="Calibri"/>
               </a:rPr>
-              <a:t>Cierre del curso</a:t>
+              <a:t>Checklist final</a:t>
             </a:r>
           </a:p>
         </p:txBody>
@@ -5228,7 +6063,7 @@
                 </a:solidFill>
                 <a:latin typeface="Calibri"/>
               </a:rPr>
-              <a:t>–   RAA1–3 aplicados al PI. Conserven el repo como portafolio.</a:t>
+              <a:t>–   Informe completo · 3 diagramas · Dockerfile+captura · Actions · pitch.</a:t>
             </a:r>
           </a:p>
           <a:p>
@@ -5244,7 +6079,7 @@
                 </a:solidFill>
                 <a:latin typeface="Calibri"/>
               </a:rPr>
-              <a:t>–   Gracias — arquitectura es trade-offs documentados, no logos de proveedores.</a:t>
+              <a:t>–   Sin cuentas cloud de pago · sin instalar hipervisores como requisito.</a:t>
             </a:r>
           </a:p>
         </p:txBody>
@@ -5425,7 +6260,7 @@
                 </a:solidFill>
                 <a:latin typeface="Calibri"/>
               </a:rPr>
-              <a:t>Taller PI (paso a paso)</a:t>
+              <a:t>Cierre del curso</a:t>
             </a:r>
           </a:p>
         </p:txBody>
@@ -5458,22 +6293,13 @@
               </a:spcAft>
             </a:pPr>
             <a:r>
-              <a:rPr sz="1600" b="1" i="0">
-                <a:solidFill>
-                  <a:srgbClr val="333333"/>
-                </a:solidFill>
-                <a:latin typeface="Calibri"/>
-              </a:rPr>
-              <a:t>1.</a:t>
-            </a:r>
-            <a:r>
               <a:rPr sz="1600" b="0" i="0">
                 <a:solidFill>
                   <a:srgbClr val="333333"/>
                 </a:solidFill>
                 <a:latin typeface="Calibri"/>
               </a:rPr>
-              <a:t> Paso 1: armen el paquete final y llenen el indice de 8 filas con entregable, nombre de archivo, ruta dentro del paquete y estado, verificando que los 8 archivos abran desde una maquina distinta a la del autor y que ningun nombre de archivo tenga espacios ni tildes que rompan la descarga.</a:t>
+              <a:t>–   RAA1–3 aplicados al PI. Conserven el repo como portafolio.</a:t>
             </a:r>
           </a:p>
           <a:p>
@@ -5489,127 +6315,7 @@
                 </a:solidFill>
                 <a:latin typeface="Calibri"/>
               </a:rPr>
-              <a:t>–   </a:t>
-            </a:r>
-            <a:r>
-              <a:rPr sz="1600" b="1" i="0">
-                <a:solidFill>
-                  <a:srgbClr val="333333"/>
-                </a:solidFill>
-                <a:latin typeface="Calibri"/>
-              </a:rPr>
-              <a:t>2.</a:t>
-            </a:r>
-            <a:r>
-              <a:rPr sz="1600" b="0" i="0">
-                <a:solidFill>
-                  <a:srgbClr val="333333"/>
-                </a:solidFill>
-                <a:latin typeface="Calibri"/>
-              </a:rPr>
-              <a:t> Paso 2: escriban en ExamLab la lamina unica de arquitectura en Mermaid con las 3 zonas, los 5 contenedores, el edge, la cadena de entrega y los sistemas externos, verificando al renderizar que sea legible en una sola pantalla sin desplazamiento y que use los mismos nombres canonicos del paquete, porque esta es la lamina que van a proyectar en la sustentacion.</a:t>
-            </a:r>
-          </a:p>
-          <a:p>
-            <a:pPr>
-              <a:spcAft>
-                <a:spcPts val="800"/>
-              </a:spcAft>
-            </a:pPr>
-            <a:r>
-              <a:rPr sz="1600" b="0" i="0">
-                <a:solidFill>
-                  <a:srgbClr val="333333"/>
-                </a:solidFill>
-                <a:latin typeface="Calibri"/>
-              </a:rPr>
-              <a:t>–   </a:t>
-            </a:r>
-            <a:r>
-              <a:rPr sz="1600" b="1" i="0">
-                <a:solidFill>
-                  <a:srgbClr val="333333"/>
-                </a:solidFill>
-                <a:latin typeface="Calibri"/>
-              </a:rPr>
-              <a:t>3.</a:t>
-            </a:r>
-            <a:r>
-              <a:rPr sz="1600" b="0" i="0">
-                <a:solidFill>
-                  <a:srgbClr val="333333"/>
-                </a:solidFill>
-                <a:latin typeface="Calibri"/>
-              </a:rPr>
-              <a:t> Paso 3: redacten el Q and A escrito con 3 preguntas duras que el jurado podria hacer, una de decision de arquitectura, una de seguridad y una de escala o rendimiento, cada una con respuesta de maximo 4 lineas que cite la evidencia del paquete, verificando que ninguna respuesta sea no lo alcanzamos a hacer sin nombrar la decision consciente que tomaron.</a:t>
-            </a:r>
-          </a:p>
-          <a:p>
-            <a:pPr>
-              <a:spcAft>
-                <a:spcPts val="800"/>
-              </a:spcAft>
-            </a:pPr>
-            <a:r>
-              <a:rPr sz="1600" b="0" i="0">
-                <a:solidFill>
-                  <a:srgbClr val="333333"/>
-                </a:solidFill>
-                <a:latin typeface="Calibri"/>
-              </a:rPr>
-              <a:t>–   </a:t>
-            </a:r>
-            <a:r>
-              <a:rPr sz="1600" b="1" i="0">
-                <a:solidFill>
-                  <a:srgbClr val="333333"/>
-                </a:solidFill>
-                <a:latin typeface="Calibri"/>
-              </a:rPr>
-              <a:t>4.</a:t>
-            </a:r>
-            <a:r>
-              <a:rPr sz="1600" b="0" i="0">
-                <a:solidFill>
-                  <a:srgbClr val="333333"/>
-                </a:solidFill>
-                <a:latin typeface="Calibri"/>
-              </a:rPr>
-              <a:t> Paso 4: graben o presenten el pitch de 5 a 8 minutos segun la instruccion del docente y registren la tabla de tiempos reales por seccion con quien hablo en cada una, verificando que el tiempo total quede entre 5 y 8 minutos y que el enlace del video, si lo graban, se abra sin pedir permisos.</a:t>
-            </a:r>
-          </a:p>
-          <a:p>
-            <a:pPr>
-              <a:spcAft>
-                <a:spcPts val="800"/>
-              </a:spcAft>
-            </a:pPr>
-            <a:r>
-              <a:rPr sz="1600" b="0" i="0">
-                <a:solidFill>
-                  <a:srgbClr val="333333"/>
-                </a:solidFill>
-                <a:latin typeface="Calibri"/>
-              </a:rPr>
-              <a:t>–   </a:t>
-            </a:r>
-            <a:r>
-              <a:rPr sz="1600" b="1" i="0">
-                <a:solidFill>
-                  <a:srgbClr val="333333"/>
-                </a:solidFill>
-                <a:latin typeface="Calibri"/>
-              </a:rPr>
-              <a:t>5.</a:t>
-            </a:r>
-            <a:r>
-              <a:rPr sz="1600" b="0" i="0">
-                <a:solidFill>
-                  <a:srgbClr val="333333"/>
-                </a:solidFill>
-                <a:latin typeface="Calibri"/>
-              </a:rPr>
-              <a:t> Paso 5: escriban la reflexion de media pagina sobre el trade-off mas difícil y suban el paquete final completo mas las 5 preguntas a ExamLab (modulo Proyectos) en la fecha acordada, verificando que el informe, los diagramas, la evidencia del lab, el ci.yml y la presentacion esten los cinco dentro del mismo paquete.</a:t>
+              <a:t>–   Gracias — arquitectura es trade-offs documentados, no logos de proveedores.</a:t>
             </a:r>
           </a:p>
         </p:txBody>
@@ -5790,109 +6496,21 @@
                 </a:solidFill>
                 <a:latin typeface="Calibri"/>
               </a:rPr>
-              <a:t>Para continuar (PI)</a:t>
-            </a:r>
-          </a:p>
-        </p:txBody>
-      </p:sp>
-      <p:sp>
-        <p:nvSpPr>
-          <p:cNvPr id="5" name="Rounded Rectangle 4"/>
-          <p:cNvSpPr/>
-          <p:nvPr/>
-        </p:nvSpPr>
-        <p:spPr>
-          <a:xfrm>
-            <a:off x="457200" y="1261872"/>
-            <a:ext cx="11277295" cy="1051560"/>
-          </a:xfrm>
-          <a:prstGeom prst="roundRect">
-            <a:avLst>
-              <a:gd name="adj" fmla="val 12000"/>
-            </a:avLst>
-          </a:prstGeom>
-          <a:solidFill>
-            <a:srgbClr val="E8F4FA"/>
-          </a:solidFill>
-          <a:ln>
-            <a:noFill/>
-          </a:ln>
-        </p:spPr>
-        <p:style>
-          <a:lnRef idx="1">
-            <a:schemeClr val="accent1"/>
-          </a:lnRef>
-          <a:fillRef idx="3">
-            <a:schemeClr val="accent1"/>
-          </a:fillRef>
-          <a:effectRef idx="2">
-            <a:schemeClr val="accent1"/>
-          </a:effectRef>
-          <a:fontRef idx="minor">
-            <a:schemeClr val="lt1"/>
-          </a:fontRef>
-        </p:style>
-        <p:txBody>
-          <a:bodyPr rtlCol="0" anchor="ctr"/>
-          <a:lstStyle/>
-          <a:p>
-            <a:pPr algn="ctr"/>
-          </a:p>
-        </p:txBody>
-      </p:sp>
-      <p:sp>
-        <p:nvSpPr>
-          <p:cNvPr id="6" name="Rectangle 5"/>
-          <p:cNvSpPr/>
-          <p:nvPr/>
-        </p:nvSpPr>
-        <p:spPr>
-          <a:xfrm>
-            <a:off x="457200" y="1261872"/>
-            <a:ext cx="128016" cy="1051560"/>
-          </a:xfrm>
-          <a:prstGeom prst="rect">
-            <a:avLst/>
-          </a:prstGeom>
-          <a:solidFill>
-            <a:srgbClr val="269CCB"/>
-          </a:solidFill>
-          <a:ln>
-            <a:noFill/>
-          </a:ln>
-        </p:spPr>
-        <p:style>
-          <a:lnRef idx="1">
-            <a:schemeClr val="accent1"/>
-          </a:lnRef>
-          <a:fillRef idx="3">
-            <a:schemeClr val="accent1"/>
-          </a:fillRef>
-          <a:effectRef idx="2">
-            <a:schemeClr val="accent1"/>
-          </a:effectRef>
-          <a:fontRef idx="minor">
-            <a:schemeClr val="lt1"/>
-          </a:fontRef>
-        </p:style>
-        <p:txBody>
-          <a:bodyPr rtlCol="0" anchor="ctr"/>
-          <a:lstStyle/>
-          <a:p>
-            <a:pPr algn="ctr"/>
-          </a:p>
-        </p:txBody>
-      </p:sp>
-      <p:sp>
-        <p:nvSpPr>
-          <p:cNvPr id="7" name="TextBox 6"/>
+              <a:t>Sustentación (paso a paso)</a:t>
+            </a:r>
+          </a:p>
+        </p:txBody>
+      </p:sp>
+      <p:sp>
+        <p:nvSpPr>
+          <p:cNvPr id="5" name="TextBox 4"/>
           <p:cNvSpPr txBox="1"/>
           <p:nvPr/>
         </p:nvSpPr>
         <p:spPr>
           <a:xfrm>
-            <a:off x="777240" y="1399031"/>
-            <a:ext cx="10774375" cy="822959"/>
+            <a:off x="457200" y="1170432"/>
+            <a:ext cx="11277295" cy="5230368"/>
           </a:xfrm>
           <a:prstGeom prst="rect">
             <a:avLst/>
@@ -5905,313 +6523,171 @@
           </a:bodyPr>
           <a:lstStyle/>
           <a:p>
-            <a:r>
-              <a:rPr sz="1200" b="1" i="0">
-                <a:solidFill>
-                  <a:srgbClr val="269CCB"/>
-                </a:solidFill>
-                <a:latin typeface="Calibri"/>
-              </a:rPr>
-              <a:t>Info</a:t>
-            </a:r>
-          </a:p>
-          <a:p>
             <a:pPr>
-              <a:spcBef>
-                <a:spcPts val="400"/>
-              </a:spcBef>
+              <a:spcAft>
+                <a:spcPts val="800"/>
+              </a:spcAft>
             </a:pPr>
             <a:r>
-              <a:rPr sz="1400" b="0" i="0">
-                <a:solidFill>
-                  <a:srgbClr val="333333"/>
-                </a:solidFill>
-                <a:latin typeface="Calibri"/>
-              </a:rPr>
-              <a:t>Entregable: Paquete final + presentación 5–8 min (entrega en ExamLab · módulo Proyectos)</a:t>
-            </a:r>
-          </a:p>
-        </p:txBody>
-      </p:sp>
-      <p:sp>
-        <p:nvSpPr>
-          <p:cNvPr id="8" name="Rounded Rectangle 7"/>
-          <p:cNvSpPr/>
-          <p:nvPr/>
-        </p:nvSpPr>
-        <p:spPr>
-          <a:xfrm>
-            <a:off x="457200" y="2478024"/>
-            <a:ext cx="11277295" cy="1051560"/>
-          </a:xfrm>
-          <a:prstGeom prst="roundRect">
-            <a:avLst>
-              <a:gd name="adj" fmla="val 12000"/>
-            </a:avLst>
-          </a:prstGeom>
-          <a:solidFill>
-            <a:srgbClr val="FFF8E1"/>
-          </a:solidFill>
-          <a:ln>
-            <a:noFill/>
-          </a:ln>
-        </p:spPr>
-        <p:style>
-          <a:lnRef idx="1">
-            <a:schemeClr val="accent1"/>
-          </a:lnRef>
-          <a:fillRef idx="3">
-            <a:schemeClr val="accent1"/>
-          </a:fillRef>
-          <a:effectRef idx="2">
-            <a:schemeClr val="accent1"/>
-          </a:effectRef>
-          <a:fontRef idx="minor">
-            <a:schemeClr val="lt1"/>
-          </a:fontRef>
-        </p:style>
-        <p:txBody>
-          <a:bodyPr rtlCol="0" anchor="ctr"/>
-          <a:lstStyle/>
-          <a:p>
-            <a:pPr algn="ctr"/>
-          </a:p>
-        </p:txBody>
-      </p:sp>
-      <p:sp>
-        <p:nvSpPr>
-          <p:cNvPr id="9" name="Rectangle 8"/>
-          <p:cNvSpPr/>
-          <p:nvPr/>
-        </p:nvSpPr>
-        <p:spPr>
-          <a:xfrm>
-            <a:off x="457200" y="2478024"/>
-            <a:ext cx="128016" cy="1051560"/>
-          </a:xfrm>
-          <a:prstGeom prst="rect">
-            <a:avLst/>
-          </a:prstGeom>
-          <a:solidFill>
-            <a:srgbClr val="FFD000"/>
-          </a:solidFill>
-          <a:ln>
-            <a:noFill/>
-          </a:ln>
-        </p:spPr>
-        <p:style>
-          <a:lnRef idx="1">
-            <a:schemeClr val="accent1"/>
-          </a:lnRef>
-          <a:fillRef idx="3">
-            <a:schemeClr val="accent1"/>
-          </a:fillRef>
-          <a:effectRef idx="2">
-            <a:schemeClr val="accent1"/>
-          </a:effectRef>
-          <a:fontRef idx="minor">
-            <a:schemeClr val="lt1"/>
-          </a:fontRef>
-        </p:style>
-        <p:txBody>
-          <a:bodyPr rtlCol="0" anchor="ctr"/>
-          <a:lstStyle/>
-          <a:p>
-            <a:pPr algn="ctr"/>
-          </a:p>
-        </p:txBody>
-      </p:sp>
-      <p:sp>
-        <p:nvSpPr>
-          <p:cNvPr id="10" name="TextBox 9"/>
-          <p:cNvSpPr txBox="1"/>
-          <p:nvPr/>
-        </p:nvSpPr>
-        <p:spPr>
-          <a:xfrm>
-            <a:off x="777240" y="2615184"/>
-            <a:ext cx="10774375" cy="822959"/>
-          </a:xfrm>
-          <a:prstGeom prst="rect">
-            <a:avLst/>
-          </a:prstGeom>
-          <a:noFill/>
-        </p:spPr>
-        <p:txBody>
-          <a:bodyPr wrap="square">
-            <a:spAutoFit/>
-          </a:bodyPr>
-          <a:lstStyle/>
-          <a:p>
-            <a:r>
-              <a:rPr sz="1200" b="1" i="0">
-                <a:solidFill>
-                  <a:srgbClr val="FFD000"/>
-                </a:solidFill>
-                <a:latin typeface="Calibri"/>
-              </a:rPr>
-              <a:t>Aclaración</a:t>
+              <a:rPr sz="1600" b="1" i="0">
+                <a:solidFill>
+                  <a:srgbClr val="333333"/>
+                </a:solidFill>
+                <a:latin typeface="Calibri"/>
+              </a:rPr>
+              <a:t>1.</a:t>
+            </a:r>
+            <a:r>
+              <a:rPr sz="1600" b="0" i="0">
+                <a:solidFill>
+                  <a:srgbClr val="333333"/>
+                </a:solidFill>
+                <a:latin typeface="Calibri"/>
+              </a:rPr>
+              <a:t> Paso 1: armen el paquete final y llenen el indice de 8 filas con entregable, nombre de archivo, ruta dentro del paquete y estado, verificando que los 8 archivos abran desde una maquina distinta a la del autor y que ningun nombre de archivo tenga espacios ni tildes que rompan la descarga.</a:t>
             </a:r>
           </a:p>
           <a:p>
             <a:pPr>
-              <a:spcBef>
-                <a:spcPts val="400"/>
-              </a:spcBef>
+              <a:spcAft>
+                <a:spcPts val="800"/>
+              </a:spcAft>
             </a:pPr>
             <a:r>
-              <a:rPr sz="1400" b="0" i="0">
-                <a:solidFill>
-                  <a:srgbClr val="333333"/>
-                </a:solidFill>
-                <a:latin typeface="Calibri"/>
-              </a:rPr>
-              <a:t>Subir evidencias al paquete CloudLite (Drive/repo) y a ExamLab (https://examlab.lovable.app/) domingo 23:59.</a:t>
-            </a:r>
-          </a:p>
-        </p:txBody>
-      </p:sp>
-      <p:sp>
-        <p:nvSpPr>
-          <p:cNvPr id="11" name="Rounded Rectangle 10"/>
-          <p:cNvSpPr/>
-          <p:nvPr/>
-        </p:nvSpPr>
-        <p:spPr>
-          <a:xfrm>
-            <a:off x="457200" y="3694176"/>
-            <a:ext cx="11277295" cy="1051560"/>
-          </a:xfrm>
-          <a:prstGeom prst="roundRect">
-            <a:avLst>
-              <a:gd name="adj" fmla="val 12000"/>
-            </a:avLst>
-          </a:prstGeom>
-          <a:solidFill>
-            <a:srgbClr val="FBE4E4"/>
-          </a:solidFill>
-          <a:ln>
-            <a:noFill/>
-          </a:ln>
-        </p:spPr>
-        <p:style>
-          <a:lnRef idx="1">
-            <a:schemeClr val="accent1"/>
-          </a:lnRef>
-          <a:fillRef idx="3">
-            <a:schemeClr val="accent1"/>
-          </a:fillRef>
-          <a:effectRef idx="2">
-            <a:schemeClr val="accent1"/>
-          </a:effectRef>
-          <a:fontRef idx="minor">
-            <a:schemeClr val="lt1"/>
-          </a:fontRef>
-        </p:style>
-        <p:txBody>
-          <a:bodyPr rtlCol="0" anchor="ctr"/>
-          <a:lstStyle/>
-          <a:p>
-            <a:pPr algn="ctr"/>
-          </a:p>
-        </p:txBody>
-      </p:sp>
-      <p:sp>
-        <p:nvSpPr>
-          <p:cNvPr id="12" name="Rectangle 11"/>
-          <p:cNvSpPr/>
-          <p:nvPr/>
-        </p:nvSpPr>
-        <p:spPr>
-          <a:xfrm>
-            <a:off x="457200" y="3694176"/>
-            <a:ext cx="128016" cy="1051560"/>
-          </a:xfrm>
-          <a:prstGeom prst="rect">
-            <a:avLst/>
-          </a:prstGeom>
-          <a:solidFill>
-            <a:srgbClr val="A02030"/>
-          </a:solidFill>
-          <a:ln>
-            <a:noFill/>
-          </a:ln>
-        </p:spPr>
-        <p:style>
-          <a:lnRef idx="1">
-            <a:schemeClr val="accent1"/>
-          </a:lnRef>
-          <a:fillRef idx="3">
-            <a:schemeClr val="accent1"/>
-          </a:fillRef>
-          <a:effectRef idx="2">
-            <a:schemeClr val="accent1"/>
-          </a:effectRef>
-          <a:fontRef idx="minor">
-            <a:schemeClr val="lt1"/>
-          </a:fontRef>
-        </p:style>
-        <p:txBody>
-          <a:bodyPr rtlCol="0" anchor="ctr"/>
-          <a:lstStyle/>
-          <a:p>
-            <a:pPr algn="ctr"/>
-          </a:p>
-        </p:txBody>
-      </p:sp>
-      <p:sp>
-        <p:nvSpPr>
-          <p:cNvPr id="13" name="TextBox 12"/>
-          <p:cNvSpPr txBox="1"/>
-          <p:nvPr/>
-        </p:nvSpPr>
-        <p:spPr>
-          <a:xfrm>
-            <a:off x="777240" y="3831336"/>
-            <a:ext cx="10774375" cy="822959"/>
-          </a:xfrm>
-          <a:prstGeom prst="rect">
-            <a:avLst/>
-          </a:prstGeom>
-          <a:noFill/>
-        </p:spPr>
-        <p:txBody>
-          <a:bodyPr wrap="square">
-            <a:spAutoFit/>
-          </a:bodyPr>
-          <a:lstStyle/>
-          <a:p>
-            <a:r>
-              <a:rPr sz="1200" b="1" i="0">
-                <a:solidFill>
-                  <a:srgbClr val="A02030"/>
-                </a:solidFill>
-                <a:latin typeface="Calibri"/>
-              </a:rPr>
-              <a:t>Atención</a:t>
+              <a:rPr sz="1600" b="0" i="0">
+                <a:solidFill>
+                  <a:srgbClr val="333333"/>
+                </a:solidFill>
+                <a:latin typeface="Calibri"/>
+              </a:rPr>
+              <a:t>–   </a:t>
+            </a:r>
+            <a:r>
+              <a:rPr sz="1600" b="1" i="0">
+                <a:solidFill>
+                  <a:srgbClr val="333333"/>
+                </a:solidFill>
+                <a:latin typeface="Calibri"/>
+              </a:rPr>
+              <a:t>2.</a:t>
+            </a:r>
+            <a:r>
+              <a:rPr sz="1600" b="0" i="0">
+                <a:solidFill>
+                  <a:srgbClr val="333333"/>
+                </a:solidFill>
+                <a:latin typeface="Calibri"/>
+              </a:rPr>
+              <a:t> Paso 2: escriban en ExamLab la lamina unica de arquitectura en Mermaid con las 3 zonas, los 5 contenedores, el edge, la cadena de entrega y los sistemas externos, verificando al renderizar que sea legible en una sola pantalla sin desplazamiento y que use los mismos nombres canonicos del paquete, porque esta es la lamina que van a proyectar en la sustentacion.</a:t>
             </a:r>
           </a:p>
           <a:p>
             <a:pPr>
-              <a:spcBef>
-                <a:spcPts val="400"/>
-              </a:spcBef>
+              <a:spcAft>
+                <a:spcPts val="800"/>
+              </a:spcAft>
             </a:pPr>
             <a:r>
-              <a:rPr sz="1400" b="0" i="0">
-                <a:solidFill>
-                  <a:srgbClr val="333333"/>
-                </a:solidFill>
-                <a:latin typeface="Calibri"/>
-              </a:rPr>
-              <a:t>Sin cloud de pago ni instalaciones obligatorias de hipervisores/Docker Desktop.</a:t>
-            </a:r>
-          </a:p>
-        </p:txBody>
-      </p:sp>
-      <p:sp>
-        <p:nvSpPr>
-          <p:cNvPr id="14" name="TextBox 13"/>
+              <a:rPr sz="1600" b="0" i="0">
+                <a:solidFill>
+                  <a:srgbClr val="333333"/>
+                </a:solidFill>
+                <a:latin typeface="Calibri"/>
+              </a:rPr>
+              <a:t>–   </a:t>
+            </a:r>
+            <a:r>
+              <a:rPr sz="1600" b="1" i="0">
+                <a:solidFill>
+                  <a:srgbClr val="333333"/>
+                </a:solidFill>
+                <a:latin typeface="Calibri"/>
+              </a:rPr>
+              <a:t>3.</a:t>
+            </a:r>
+            <a:r>
+              <a:rPr sz="1600" b="0" i="0">
+                <a:solidFill>
+                  <a:srgbClr val="333333"/>
+                </a:solidFill>
+                <a:latin typeface="Calibri"/>
+              </a:rPr>
+              <a:t> Paso 3: redacten el Q and A escrito con 3 preguntas duras que el jurado podria hacer, una de decision de arquitectura, una de seguridad y una de escala o rendimiento, cada una con respuesta de maximo 4 lineas que cite la evidencia del paquete, verificando que ninguna respuesta sea no lo alcanzamos a hacer sin nombrar la decision consciente que tomaron.</a:t>
+            </a:r>
+          </a:p>
+          <a:p>
+            <a:pPr>
+              <a:spcAft>
+                <a:spcPts val="800"/>
+              </a:spcAft>
+            </a:pPr>
+            <a:r>
+              <a:rPr sz="1600" b="0" i="0">
+                <a:solidFill>
+                  <a:srgbClr val="333333"/>
+                </a:solidFill>
+                <a:latin typeface="Calibri"/>
+              </a:rPr>
+              <a:t>–   </a:t>
+            </a:r>
+            <a:r>
+              <a:rPr sz="1600" b="1" i="0">
+                <a:solidFill>
+                  <a:srgbClr val="333333"/>
+                </a:solidFill>
+                <a:latin typeface="Calibri"/>
+              </a:rPr>
+              <a:t>4.</a:t>
+            </a:r>
+            <a:r>
+              <a:rPr sz="1600" b="0" i="0">
+                <a:solidFill>
+                  <a:srgbClr val="333333"/>
+                </a:solidFill>
+                <a:latin typeface="Calibri"/>
+              </a:rPr>
+              <a:t> Paso 4: ensayen el pitch con cronometro ANTES de la sesion y registren la tabla de tiempos reales por seccion con quien hablo en cada una, verificando que el tiempo total quede entre 5 y 8 minutos; la sustentacion se hace EN VIVO en la sesion de clase, con preguntas del docente al cierre, no con un video grabado.</a:t>
+            </a:r>
+          </a:p>
+          <a:p>
+            <a:pPr>
+              <a:spcAft>
+                <a:spcPts val="800"/>
+              </a:spcAft>
+            </a:pPr>
+            <a:r>
+              <a:rPr sz="1600" b="0" i="0">
+                <a:solidFill>
+                  <a:srgbClr val="333333"/>
+                </a:solidFill>
+                <a:latin typeface="Calibri"/>
+              </a:rPr>
+              <a:t>–   </a:t>
+            </a:r>
+            <a:r>
+              <a:rPr sz="1600" b="1" i="0">
+                <a:solidFill>
+                  <a:srgbClr val="333333"/>
+                </a:solidFill>
+                <a:latin typeface="Calibri"/>
+              </a:rPr>
+              <a:t>5.</a:t>
+            </a:r>
+            <a:r>
+              <a:rPr sz="1600" b="0" i="0">
+                <a:solidFill>
+                  <a:srgbClr val="333333"/>
+                </a:solidFill>
+                <a:latin typeface="Calibri"/>
+              </a:rPr>
+              <a:t> Paso 5: escriban la reflexion de media pagina sobre el trade-off mas difícil y suban el paquete final completo mas las 5 preguntas a ExamLab (modulo Proyectos) ANTES de su turno de sustentacion, verificando que el informe, los diagramas, la evidencia del lab, el ci.yml y la presentacion esten los cinco dentro del mismo paquete.</a:t>
+            </a:r>
+          </a:p>
+        </p:txBody>
+      </p:sp>
+      <p:sp>
+        <p:nvSpPr>
+          <p:cNvPr id="6" name="TextBox 5"/>
           <p:cNvSpPr txBox="1"/>
           <p:nvPr/>
         </p:nvSpPr>

--- a/Arquitectura de Sistemas Computacionales/Clases/Clase 15 - Presentacion del proyecto y cierre/Presentacion.pptx
+++ b/Arquitectura de Sistemas Computacionales/Clases/Clase 15 - Presentacion del proyecto y cierre/Presentacion.pptx
@@ -3904,7 +3904,7 @@
                 </a:solidFill>
                 <a:latin typeface="Calibri"/>
               </a:rPr>
-              <a:t>El paquete se sube a ExamLab (https://examlab.lovable.app/ · módulo Proyectos) </a:t>
+              <a:t>El paquete se sube a ExamLab (https://uniaj.examlab.workers.dev/ · módulo Proyectos) </a:t>
             </a:r>
             <a:r>
               <a:rPr sz="1400" b="1" i="0">

--- a/Arquitectura de Sistemas Computacionales/Clases/Clase 15 - Presentacion del proyecto y cierre/Presentacion.pptx
+++ b/Arquitectura de Sistemas Computacionales/Clases/Clase 15 - Presentacion del proyecto y cierre/Presentacion.pptx
@@ -16,6 +16,8 @@
     <p:sldId id="264" r:id="rId15"/>
     <p:sldId id="265" r:id="rId16"/>
     <p:sldId id="266" r:id="rId17"/>
+    <p:sldId id="267" r:id="rId18"/>
+    <p:sldId id="268" r:id="rId19"/>
   </p:sldIdLst>
   <p:sldSz cx="12191695" cy="6858000" type="screen4x3"/>
   <p:notesSz cx="6858000" cy="9144000"/>
@@ -3522,7 +3524,7 @@
         <p:spPr>
           <a:xfrm>
             <a:off x="0" y="0"/>
-            <a:ext cx="12191695" cy="960120"/>
+            <a:ext cx="12191695" cy="1170432"/>
           </a:xfrm>
           <a:prstGeom prst="rect">
             <a:avLst/>
@@ -3564,7 +3566,7 @@
         </p:nvSpPr>
         <p:spPr>
           <a:xfrm>
-            <a:off x="0" y="960120"/>
+            <a:off x="0" y="1170432"/>
             <a:ext cx="12191695" cy="41148"/>
           </a:xfrm>
           <a:prstGeom prst="rect">
@@ -3608,7 +3610,7 @@
         <p:spPr>
           <a:xfrm>
             <a:off x="457200" y="164592"/>
-            <a:ext cx="11277295" cy="502920"/>
+            <a:ext cx="11277295" cy="384048"/>
           </a:xfrm>
           <a:prstGeom prst="rect">
             <a:avLst/>
@@ -3628,20 +3630,225 @@
                 </a:solidFill>
                 <a:latin typeface="Calibri"/>
               </a:rPr>
-              <a:t>Para continuar (PI)</a:t>
-            </a:r>
-          </a:p>
-        </p:txBody>
-      </p:sp>
-      <p:sp>
-        <p:nvSpPr>
-          <p:cNvPr id="5" name="Rounded Rectangle 4"/>
+              <a:t>Del boceto a ExamLab (diagrama)</a:t>
+            </a:r>
+          </a:p>
+        </p:txBody>
+      </p:sp>
+      <p:sp>
+        <p:nvSpPr>
+          <p:cNvPr id="5" name="TextBox 4"/>
+          <p:cNvSpPr txBox="1"/>
+          <p:nvPr/>
+        </p:nvSpPr>
+        <p:spPr>
+          <a:xfrm>
+            <a:off x="457200" y="566928"/>
+            <a:ext cx="11277295" cy="411480"/>
+          </a:xfrm>
+          <a:prstGeom prst="rect">
+            <a:avLst/>
+          </a:prstGeom>
+          <a:noFill/>
+        </p:spPr>
+        <p:txBody>
+          <a:bodyPr wrap="square">
+            <a:spAutoFit/>
+          </a:bodyPr>
+          <a:lstStyle/>
+          <a:p>
+            <a:r>
+              <a:rPr sz="1400" b="0" i="0">
+                <a:solidFill>
+                  <a:srgbClr val="B8D8EE"/>
+                </a:solidFill>
+                <a:latin typeface="Calibri"/>
+              </a:rPr>
+              <a:t>El diagrama se entrega como código Mermaid dentro de ExamLab, no como imagen</a:t>
+            </a:r>
+          </a:p>
+        </p:txBody>
+      </p:sp>
+      <p:sp>
+        <p:nvSpPr>
+          <p:cNvPr id="6" name="Rounded Rectangle 5"/>
           <p:cNvSpPr/>
           <p:nvPr/>
         </p:nvSpPr>
         <p:spPr>
           <a:xfrm>
-            <a:off x="457200" y="1261872"/>
+            <a:off x="457200" y="1659636"/>
+            <a:ext cx="11277295" cy="1051560"/>
+          </a:xfrm>
+          <a:prstGeom prst="roundRect">
+            <a:avLst>
+              <a:gd name="adj" fmla="val 12000"/>
+            </a:avLst>
+          </a:prstGeom>
+          <a:solidFill>
+            <a:srgbClr val="F2F2F2"/>
+          </a:solidFill>
+          <a:ln>
+            <a:noFill/>
+          </a:ln>
+        </p:spPr>
+        <p:style>
+          <a:lnRef idx="1">
+            <a:schemeClr val="accent1"/>
+          </a:lnRef>
+          <a:fillRef idx="3">
+            <a:schemeClr val="accent1"/>
+          </a:fillRef>
+          <a:effectRef idx="2">
+            <a:schemeClr val="accent1"/>
+          </a:effectRef>
+          <a:fontRef idx="minor">
+            <a:schemeClr val="lt1"/>
+          </a:fontRef>
+        </p:style>
+        <p:txBody>
+          <a:bodyPr rtlCol="0" anchor="ctr"/>
+          <a:lstStyle/>
+          <a:p>
+            <a:pPr algn="ctr"/>
+          </a:p>
+        </p:txBody>
+      </p:sp>
+      <p:sp>
+        <p:nvSpPr>
+          <p:cNvPr id="7" name="Rounded Rectangle 6"/>
+          <p:cNvSpPr/>
+          <p:nvPr/>
+        </p:nvSpPr>
+        <p:spPr>
+          <a:xfrm>
+            <a:off x="594360" y="1965960"/>
+            <a:ext cx="438912" cy="438912"/>
+          </a:xfrm>
+          <a:prstGeom prst="roundRect">
+            <a:avLst>
+              <a:gd name="adj" fmla="val 12000"/>
+            </a:avLst>
+          </a:prstGeom>
+          <a:solidFill>
+            <a:srgbClr val="095292"/>
+          </a:solidFill>
+          <a:ln>
+            <a:noFill/>
+          </a:ln>
+        </p:spPr>
+        <p:style>
+          <a:lnRef idx="1">
+            <a:schemeClr val="accent1"/>
+          </a:lnRef>
+          <a:fillRef idx="3">
+            <a:schemeClr val="accent1"/>
+          </a:fillRef>
+          <a:effectRef idx="2">
+            <a:schemeClr val="accent1"/>
+          </a:effectRef>
+          <a:fontRef idx="minor">
+            <a:schemeClr val="lt1"/>
+          </a:fontRef>
+        </p:style>
+        <p:txBody>
+          <a:bodyPr rtlCol="0" anchor="ctr"/>
+          <a:lstStyle/>
+          <a:p>
+            <a:pPr algn="ctr"/>
+          </a:p>
+        </p:txBody>
+      </p:sp>
+      <p:sp>
+        <p:nvSpPr>
+          <p:cNvPr id="8" name="TextBox 7"/>
+          <p:cNvSpPr txBox="1"/>
+          <p:nvPr/>
+        </p:nvSpPr>
+        <p:spPr>
+          <a:xfrm>
+            <a:off x="594360" y="1965960"/>
+            <a:ext cx="438912" cy="438912"/>
+          </a:xfrm>
+          <a:prstGeom prst="rect">
+            <a:avLst/>
+          </a:prstGeom>
+          <a:noFill/>
+        </p:spPr>
+        <p:txBody>
+          <a:bodyPr wrap="square" anchor="ctr"/>
+          <a:lstStyle/>
+          <a:p>
+            <a:pPr algn="ctr"/>
+            <a:r>
+              <a:rPr sz="1600" b="1" i="0">
+                <a:solidFill>
+                  <a:srgbClr val="FFFFFF"/>
+                </a:solidFill>
+                <a:latin typeface="Calibri"/>
+              </a:rPr>
+              <a:t>1</a:t>
+            </a:r>
+          </a:p>
+        </p:txBody>
+      </p:sp>
+      <p:sp>
+        <p:nvSpPr>
+          <p:cNvPr id="9" name="TextBox 8"/>
+          <p:cNvSpPr txBox="1"/>
+          <p:nvPr/>
+        </p:nvSpPr>
+        <p:spPr>
+          <a:xfrm>
+            <a:off x="1188720" y="1751076"/>
+            <a:ext cx="10271455" cy="886968"/>
+          </a:xfrm>
+          <a:prstGeom prst="rect">
+            <a:avLst/>
+          </a:prstGeom>
+          <a:noFill/>
+        </p:spPr>
+        <p:txBody>
+          <a:bodyPr wrap="square" anchor="ctr"/>
+          <a:lstStyle/>
+          <a:p>
+            <a:r>
+              <a:rPr sz="1500" b="1" i="0">
+                <a:solidFill>
+                  <a:srgbClr val="095292"/>
+                </a:solidFill>
+                <a:latin typeface="Calibri"/>
+              </a:rPr>
+              <a:t>Disena visual</a:t>
+            </a:r>
+          </a:p>
+          <a:p>
+            <a:pPr>
+              <a:spcBef>
+                <a:spcPts val="200"/>
+              </a:spcBef>
+            </a:pPr>
+            <a:r>
+              <a:rPr sz="1300" b="0" i="0">
+                <a:solidFill>
+                  <a:srgbClr val="333333"/>
+                </a:solidFill>
+                <a:latin typeface="Calibri"/>
+              </a:rPr>
+              <a:t>Dibuja el diagrama como quieras en Excalidraw o draw.io: es mas rapido arrastrar cajas que escribir codigo, y ahi es donde piensas el modelo.</a:t>
+            </a:r>
+          </a:p>
+        </p:txBody>
+      </p:sp>
+      <p:sp>
+        <p:nvSpPr>
+          <p:cNvPr id="10" name="Rounded Rectangle 9"/>
+          <p:cNvSpPr/>
+          <p:nvPr/>
+        </p:nvSpPr>
+        <p:spPr>
+          <a:xfrm>
+            <a:off x="457200" y="2802636"/>
             <a:ext cx="11277295" cy="1051560"/>
           </a:xfrm>
           <a:prstGeom prst="roundRect">
@@ -3680,20 +3887,22 @@
       </p:sp>
       <p:sp>
         <p:nvSpPr>
-          <p:cNvPr id="6" name="Rectangle 5"/>
+          <p:cNvPr id="11" name="Rounded Rectangle 10"/>
           <p:cNvSpPr/>
           <p:nvPr/>
         </p:nvSpPr>
         <p:spPr>
           <a:xfrm>
-            <a:off x="457200" y="1261872"/>
-            <a:ext cx="128016" cy="1051560"/>
-          </a:xfrm>
-          <a:prstGeom prst="rect">
-            <a:avLst/>
+            <a:off x="594360" y="3108960"/>
+            <a:ext cx="438912" cy="438912"/>
+          </a:xfrm>
+          <a:prstGeom prst="roundRect">
+            <a:avLst>
+              <a:gd name="adj" fmla="val 12000"/>
+            </a:avLst>
           </a:prstGeom>
           <a:solidFill>
-            <a:srgbClr val="269CCB"/>
+            <a:srgbClr val="095292"/>
           </a:solidFill>
           <a:ln>
             <a:noFill/>
@@ -3723,14 +3932,14 @@
       </p:sp>
       <p:sp>
         <p:nvSpPr>
-          <p:cNvPr id="7" name="TextBox 6"/>
+          <p:cNvPr id="12" name="TextBox 11"/>
           <p:cNvSpPr txBox="1"/>
           <p:nvPr/>
         </p:nvSpPr>
         <p:spPr>
           <a:xfrm>
-            <a:off x="777240" y="1399031"/>
-            <a:ext cx="10774375" cy="822959"/>
+            <a:off x="594360" y="3108960"/>
+            <a:ext cx="438912" cy="438912"/>
           </a:xfrm>
           <a:prstGeom prst="rect">
             <a:avLst/>
@@ -3738,48 +3947,79 @@
           <a:noFill/>
         </p:spPr>
         <p:txBody>
-          <a:bodyPr wrap="square">
-            <a:spAutoFit/>
-          </a:bodyPr>
-          <a:lstStyle/>
-          <a:p>
-            <a:r>
-              <a:rPr sz="1200" b="1" i="0">
-                <a:solidFill>
-                  <a:srgbClr val="269CCB"/>
-                </a:solidFill>
-                <a:latin typeface="Calibri"/>
-              </a:rPr>
-              <a:t>Info</a:t>
+          <a:bodyPr wrap="square" anchor="ctr"/>
+          <a:lstStyle/>
+          <a:p>
+            <a:pPr algn="ctr"/>
+            <a:r>
+              <a:rPr sz="1600" b="1" i="0">
+                <a:solidFill>
+                  <a:srgbClr val="FFFFFF"/>
+                </a:solidFill>
+                <a:latin typeface="Calibri"/>
+              </a:rPr>
+              <a:t>2</a:t>
+            </a:r>
+          </a:p>
+        </p:txBody>
+      </p:sp>
+      <p:sp>
+        <p:nvSpPr>
+          <p:cNvPr id="13" name="TextBox 12"/>
+          <p:cNvSpPr txBox="1"/>
+          <p:nvPr/>
+        </p:nvSpPr>
+        <p:spPr>
+          <a:xfrm>
+            <a:off x="1188720" y="2894076"/>
+            <a:ext cx="10271455" cy="886968"/>
+          </a:xfrm>
+          <a:prstGeom prst="rect">
+            <a:avLst/>
+          </a:prstGeom>
+          <a:noFill/>
+        </p:spPr>
+        <p:txBody>
+          <a:bodyPr wrap="square" anchor="ctr"/>
+          <a:lstStyle/>
+          <a:p>
+            <a:r>
+              <a:rPr sz="1500" b="1" i="0">
+                <a:solidFill>
+                  <a:srgbClr val="095292"/>
+                </a:solidFill>
+                <a:latin typeface="Calibri"/>
+              </a:rPr>
+              <a:t>Traduce con IA</a:t>
             </a:r>
           </a:p>
           <a:p>
             <a:pPr>
               <a:spcBef>
-                <a:spcPts val="400"/>
+                <a:spcPts val="200"/>
               </a:spcBef>
             </a:pPr>
             <a:r>
-              <a:rPr sz="1400" b="0" i="0">
+              <a:rPr sz="1300" b="0" i="0">
                 <a:solidFill>
                   <a:srgbClr val="333333"/>
                 </a:solidFill>
                 <a:latin typeface="Calibri"/>
               </a:rPr>
-              <a:t>Entregable: Paquete final en ExamLab (módulo Proyectos) + pitch de 5–8 min sustentado hoy en clase + Q&amp;A</a:t>
-            </a:r>
-          </a:p>
-        </p:txBody>
-      </p:sp>
-      <p:sp>
-        <p:nvSpPr>
-          <p:cNvPr id="8" name="Rounded Rectangle 7"/>
+              <a:t>Copia o describe tu boceto a una IA y pidele el codigo Mermaid: «convierte este diagrama a Mermaid usando flowchart». Revisa el resultado: la IA acierta la sintaxis, no tu modelo.</a:t>
+            </a:r>
+          </a:p>
+        </p:txBody>
+      </p:sp>
+      <p:sp>
+        <p:nvSpPr>
+          <p:cNvPr id="14" name="Rounded Rectangle 13"/>
           <p:cNvSpPr/>
           <p:nvPr/>
         </p:nvSpPr>
         <p:spPr>
           <a:xfrm>
-            <a:off x="457200" y="2478024"/>
+            <a:off x="457200" y="3945636"/>
             <a:ext cx="11277295" cy="1051560"/>
           </a:xfrm>
           <a:prstGeom prst="roundRect">
@@ -3788,7 +4028,7 @@
             </a:avLst>
           </a:prstGeom>
           <a:solidFill>
-            <a:srgbClr val="FFF8E1"/>
+            <a:srgbClr val="F2F2F2"/>
           </a:solidFill>
           <a:ln>
             <a:noFill/>
@@ -3818,20 +4058,22 @@
       </p:sp>
       <p:sp>
         <p:nvSpPr>
-          <p:cNvPr id="9" name="Rectangle 8"/>
+          <p:cNvPr id="15" name="Rounded Rectangle 14"/>
           <p:cNvSpPr/>
           <p:nvPr/>
         </p:nvSpPr>
         <p:spPr>
           <a:xfrm>
-            <a:off x="457200" y="2478024"/>
-            <a:ext cx="128016" cy="1051560"/>
-          </a:xfrm>
-          <a:prstGeom prst="rect">
-            <a:avLst/>
+            <a:off x="594360" y="4251960"/>
+            <a:ext cx="438912" cy="438912"/>
+          </a:xfrm>
+          <a:prstGeom prst="roundRect">
+            <a:avLst>
+              <a:gd name="adj" fmla="val 12000"/>
+            </a:avLst>
           </a:prstGeom>
           <a:solidFill>
-            <a:srgbClr val="FFD000"/>
+            <a:srgbClr val="095292"/>
           </a:solidFill>
           <a:ln>
             <a:noFill/>
@@ -3861,14 +4103,14 @@
       </p:sp>
       <p:sp>
         <p:nvSpPr>
-          <p:cNvPr id="10" name="TextBox 9"/>
+          <p:cNvPr id="16" name="TextBox 15"/>
           <p:cNvSpPr txBox="1"/>
           <p:nvPr/>
         </p:nvSpPr>
         <p:spPr>
           <a:xfrm>
-            <a:off x="777240" y="2615184"/>
-            <a:ext cx="10774375" cy="822959"/>
+            <a:off x="594360" y="4251960"/>
+            <a:ext cx="438912" cy="438912"/>
           </a:xfrm>
           <a:prstGeom prst="rect">
             <a:avLst/>
@@ -3876,66 +4118,79 @@
           <a:noFill/>
         </p:spPr>
         <p:txBody>
-          <a:bodyPr wrap="square">
-            <a:spAutoFit/>
-          </a:bodyPr>
-          <a:lstStyle/>
-          <a:p>
-            <a:r>
-              <a:rPr sz="1200" b="1" i="0">
-                <a:solidFill>
-                  <a:srgbClr val="FFD000"/>
-                </a:solidFill>
-                <a:latin typeface="Calibri"/>
-              </a:rPr>
-              <a:t>Aclaración</a:t>
+          <a:bodyPr wrap="square" anchor="ctr"/>
+          <a:lstStyle/>
+          <a:p>
+            <a:pPr algn="ctr"/>
+            <a:r>
+              <a:rPr sz="1600" b="1" i="0">
+                <a:solidFill>
+                  <a:srgbClr val="FFFFFF"/>
+                </a:solidFill>
+                <a:latin typeface="Calibri"/>
+              </a:rPr>
+              <a:t>3</a:t>
+            </a:r>
+          </a:p>
+        </p:txBody>
+      </p:sp>
+      <p:sp>
+        <p:nvSpPr>
+          <p:cNvPr id="17" name="TextBox 16"/>
+          <p:cNvSpPr txBox="1"/>
+          <p:nvPr/>
+        </p:nvSpPr>
+        <p:spPr>
+          <a:xfrm>
+            <a:off x="1188720" y="4037076"/>
+            <a:ext cx="10271455" cy="886968"/>
+          </a:xfrm>
+          <a:prstGeom prst="rect">
+            <a:avLst/>
+          </a:prstGeom>
+          <a:noFill/>
+        </p:spPr>
+        <p:txBody>
+          <a:bodyPr wrap="square" anchor="ctr"/>
+          <a:lstStyle/>
+          <a:p>
+            <a:r>
+              <a:rPr sz="1500" b="1" i="0">
+                <a:solidFill>
+                  <a:srgbClr val="095292"/>
+                </a:solidFill>
+                <a:latin typeface="Calibri"/>
+              </a:rPr>
+              <a:t>Pega y renderiza en ExamLab</a:t>
             </a:r>
           </a:p>
           <a:p>
             <a:pPr>
               <a:spcBef>
-                <a:spcPts val="400"/>
+                <a:spcPts val="200"/>
               </a:spcBef>
             </a:pPr>
             <a:r>
-              <a:rPr sz="1400" b="0" i="0">
+              <a:rPr sz="1300" b="0" i="0">
                 <a:solidFill>
                   <a:srgbClr val="333333"/>
                 </a:solidFill>
                 <a:latin typeface="Calibri"/>
               </a:rPr>
-              <a:t>El paquete se sube a ExamLab (https://uniaj.examlab.workers.dev/ · módulo Proyectos) </a:t>
-            </a:r>
-            <a:r>
-              <a:rPr sz="1400" b="1" i="0">
-                <a:solidFill>
-                  <a:srgbClr val="333333"/>
-                </a:solidFill>
-                <a:latin typeface="Calibri"/>
-              </a:rPr>
-              <a:t>antes</a:t>
-            </a:r>
-            <a:r>
-              <a:rPr sz="1400" b="0" i="0">
-                <a:solidFill>
-                  <a:srgbClr val="333333"/>
-                </a:solidFill>
-                <a:latin typeface="Calibri"/>
-              </a:rPr>
-              <a:t> del bloque de sustentaciones.</a:t>
-            </a:r>
-          </a:p>
-        </p:txBody>
-      </p:sp>
-      <p:sp>
-        <p:nvSpPr>
-          <p:cNvPr id="11" name="Rounded Rectangle 10"/>
+              <a:t>Pega ese codigo en la caja de texto de la pregunta y mira como lo dibuja la plataforma. Si no renderiza, corrige ahi mismo: lo que se califica es el diagrama renderizado dentro de ExamLab.</a:t>
+            </a:r>
+          </a:p>
+        </p:txBody>
+      </p:sp>
+      <p:sp>
+        <p:nvSpPr>
+          <p:cNvPr id="18" name="Rounded Rectangle 17"/>
           <p:cNvSpPr/>
           <p:nvPr/>
         </p:nvSpPr>
         <p:spPr>
           <a:xfrm>
-            <a:off x="457200" y="3694176"/>
+            <a:off x="457200" y="5088636"/>
             <a:ext cx="11277295" cy="1051560"/>
           </a:xfrm>
           <a:prstGeom prst="roundRect">
@@ -3944,7 +4199,7 @@
             </a:avLst>
           </a:prstGeom>
           <a:solidFill>
-            <a:srgbClr val="FBE4E4"/>
+            <a:srgbClr val="E8F4FA"/>
           </a:solidFill>
           <a:ln>
             <a:noFill/>
@@ -3974,20 +4229,22 @@
       </p:sp>
       <p:sp>
         <p:nvSpPr>
-          <p:cNvPr id="12" name="Rectangle 11"/>
+          <p:cNvPr id="19" name="Rounded Rectangle 18"/>
           <p:cNvSpPr/>
           <p:nvPr/>
         </p:nvSpPr>
         <p:spPr>
           <a:xfrm>
-            <a:off x="457200" y="3694176"/>
-            <a:ext cx="128016" cy="1051560"/>
-          </a:xfrm>
-          <a:prstGeom prst="rect">
-            <a:avLst/>
+            <a:off x="594360" y="5394960"/>
+            <a:ext cx="438912" cy="438912"/>
+          </a:xfrm>
+          <a:prstGeom prst="roundRect">
+            <a:avLst>
+              <a:gd name="adj" fmla="val 12000"/>
+            </a:avLst>
           </a:prstGeom>
           <a:solidFill>
-            <a:srgbClr val="A02030"/>
+            <a:srgbClr val="095292"/>
           </a:solidFill>
           <a:ln>
             <a:noFill/>
@@ -4017,14 +4274,14 @@
       </p:sp>
       <p:sp>
         <p:nvSpPr>
-          <p:cNvPr id="13" name="TextBox 12"/>
+          <p:cNvPr id="20" name="TextBox 19"/>
           <p:cNvSpPr txBox="1"/>
           <p:nvPr/>
         </p:nvSpPr>
         <p:spPr>
           <a:xfrm>
-            <a:off x="777240" y="3831336"/>
-            <a:ext cx="10774375" cy="822959"/>
+            <a:off x="594360" y="5394960"/>
+            <a:ext cx="438912" cy="438912"/>
           </a:xfrm>
           <a:prstGeom prst="rect">
             <a:avLst/>
@@ -4032,60 +4289,73 @@
           <a:noFill/>
         </p:spPr>
         <p:txBody>
-          <a:bodyPr wrap="square">
-            <a:spAutoFit/>
-          </a:bodyPr>
-          <a:lstStyle/>
-          <a:p>
-            <a:r>
-              <a:rPr sz="1200" b="1" i="0">
-                <a:solidFill>
-                  <a:srgbClr val="A02030"/>
-                </a:solidFill>
-                <a:latin typeface="Calibri"/>
-              </a:rPr>
-              <a:t>Atención</a:t>
+          <a:bodyPr wrap="square" anchor="ctr"/>
+          <a:lstStyle/>
+          <a:p>
+            <a:pPr algn="ctr"/>
+            <a:r>
+              <a:rPr sz="1600" b="1" i="0">
+                <a:solidFill>
+                  <a:srgbClr val="FFFFFF"/>
+                </a:solidFill>
+                <a:latin typeface="Calibri"/>
+              </a:rPr>
+              <a:t>4</a:t>
+            </a:r>
+          </a:p>
+        </p:txBody>
+      </p:sp>
+      <p:sp>
+        <p:nvSpPr>
+          <p:cNvPr id="21" name="TextBox 20"/>
+          <p:cNvSpPr txBox="1"/>
+          <p:nvPr/>
+        </p:nvSpPr>
+        <p:spPr>
+          <a:xfrm>
+            <a:off x="1188720" y="5180076"/>
+            <a:ext cx="10271455" cy="886968"/>
+          </a:xfrm>
+          <a:prstGeom prst="rect">
+            <a:avLst/>
+          </a:prstGeom>
+          <a:noFill/>
+        </p:spPr>
+        <p:txBody>
+          <a:bodyPr wrap="square" anchor="ctr"/>
+          <a:lstStyle/>
+          <a:p>
+            <a:r>
+              <a:rPr sz="1500" b="1" i="0">
+                <a:solidFill>
+                  <a:srgbClr val="095292"/>
+                </a:solidFill>
+                <a:latin typeface="Calibri"/>
+              </a:rPr>
+              <a:t>Guarda el PNG para tu PI</a:t>
             </a:r>
           </a:p>
           <a:p>
             <a:pPr>
               <a:spcBef>
-                <a:spcPts val="400"/>
+                <a:spcPts val="200"/>
               </a:spcBef>
             </a:pPr>
             <a:r>
-              <a:rPr sz="1400" b="0" i="0">
+              <a:rPr sz="1300" b="0" i="0">
                 <a:solidFill>
                   <a:srgbClr val="333333"/>
                 </a:solidFill>
                 <a:latin typeface="Calibri"/>
               </a:rPr>
-              <a:t>La sustentación es </a:t>
-            </a:r>
-            <a:r>
-              <a:rPr sz="1400" b="1" i="0">
-                <a:solidFill>
-                  <a:srgbClr val="333333"/>
-                </a:solidFill>
-                <a:latin typeface="Calibri"/>
-              </a:rPr>
-              <a:t>en vivo</a:t>
-            </a:r>
-            <a:r>
-              <a:rPr sz="1400" b="0" i="0">
-                <a:solidFill>
-                  <a:srgbClr val="333333"/>
-                </a:solidFill>
-                <a:latin typeface="Calibri"/>
-              </a:rPr>
-              <a:t> y con Q&amp;A: no se acepta video grabado en su lugar.</a:t>
-            </a:r>
-          </a:p>
-        </p:txBody>
-      </p:sp>
-      <p:sp>
-        <p:nvSpPr>
-          <p:cNvPr id="14" name="TextBox 13"/>
+              <a:t>Exporta tambien la imagen a la carpeta de tu Proyecto Integrador. Esa copia es para tu informe; no reemplaza la respuesta en la plataforma.</a:t>
+            </a:r>
+          </a:p>
+        </p:txBody>
+      </p:sp>
+      <p:sp>
+        <p:nvSpPr>
+          <p:cNvPr id="22" name="TextBox 21"/>
           <p:cNvSpPr txBox="1"/>
           <p:nvPr/>
         </p:nvSpPr>
@@ -4153,6 +4423,1002 @@
         <p:spPr>
           <a:xfrm>
             <a:off x="0" y="0"/>
+            <a:ext cx="12191695" cy="960120"/>
+          </a:xfrm>
+          <a:prstGeom prst="rect">
+            <a:avLst/>
+          </a:prstGeom>
+          <a:solidFill>
+            <a:srgbClr val="095292"/>
+          </a:solidFill>
+          <a:ln>
+            <a:noFill/>
+          </a:ln>
+        </p:spPr>
+        <p:style>
+          <a:lnRef idx="1">
+            <a:schemeClr val="accent1"/>
+          </a:lnRef>
+          <a:fillRef idx="3">
+            <a:schemeClr val="accent1"/>
+          </a:fillRef>
+          <a:effectRef idx="2">
+            <a:schemeClr val="accent1"/>
+          </a:effectRef>
+          <a:fontRef idx="minor">
+            <a:schemeClr val="lt1"/>
+          </a:fontRef>
+        </p:style>
+        <p:txBody>
+          <a:bodyPr rtlCol="0" anchor="ctr"/>
+          <a:lstStyle/>
+          <a:p>
+            <a:pPr algn="ctr"/>
+          </a:p>
+        </p:txBody>
+      </p:sp>
+      <p:sp>
+        <p:nvSpPr>
+          <p:cNvPr id="3" name="Rectangle 2"/>
+          <p:cNvSpPr/>
+          <p:nvPr/>
+        </p:nvSpPr>
+        <p:spPr>
+          <a:xfrm>
+            <a:off x="0" y="960120"/>
+            <a:ext cx="12191695" cy="41148"/>
+          </a:xfrm>
+          <a:prstGeom prst="rect">
+            <a:avLst/>
+          </a:prstGeom>
+          <a:solidFill>
+            <a:srgbClr val="FFD000"/>
+          </a:solidFill>
+          <a:ln>
+            <a:noFill/>
+          </a:ln>
+        </p:spPr>
+        <p:style>
+          <a:lnRef idx="1">
+            <a:schemeClr val="accent1"/>
+          </a:lnRef>
+          <a:fillRef idx="3">
+            <a:schemeClr val="accent1"/>
+          </a:fillRef>
+          <a:effectRef idx="2">
+            <a:schemeClr val="accent1"/>
+          </a:effectRef>
+          <a:fontRef idx="minor">
+            <a:schemeClr val="lt1"/>
+          </a:fontRef>
+        </p:style>
+        <p:txBody>
+          <a:bodyPr rtlCol="0" anchor="ctr"/>
+          <a:lstStyle/>
+          <a:p>
+            <a:pPr algn="ctr"/>
+          </a:p>
+        </p:txBody>
+      </p:sp>
+      <p:sp>
+        <p:nvSpPr>
+          <p:cNvPr id="4" name="TextBox 3"/>
+          <p:cNvSpPr txBox="1"/>
+          <p:nvPr/>
+        </p:nvSpPr>
+        <p:spPr>
+          <a:xfrm>
+            <a:off x="457200" y="164592"/>
+            <a:ext cx="11277295" cy="502920"/>
+          </a:xfrm>
+          <a:prstGeom prst="rect">
+            <a:avLst/>
+          </a:prstGeom>
+          <a:noFill/>
+        </p:spPr>
+        <p:txBody>
+          <a:bodyPr wrap="square">
+            <a:spAutoFit/>
+          </a:bodyPr>
+          <a:lstStyle/>
+          <a:p>
+            <a:r>
+              <a:rPr sz="2600" b="1" i="0">
+                <a:solidFill>
+                  <a:srgbClr val="FFFFFF"/>
+                </a:solidFill>
+                <a:latin typeface="Calibri"/>
+              </a:rPr>
+              <a:t>Sustentación (paso a paso)</a:t>
+            </a:r>
+          </a:p>
+        </p:txBody>
+      </p:sp>
+      <p:sp>
+        <p:nvSpPr>
+          <p:cNvPr id="5" name="TextBox 4"/>
+          <p:cNvSpPr txBox="1"/>
+          <p:nvPr/>
+        </p:nvSpPr>
+        <p:spPr>
+          <a:xfrm>
+            <a:off x="457200" y="1170432"/>
+            <a:ext cx="11277295" cy="5230368"/>
+          </a:xfrm>
+          <a:prstGeom prst="rect">
+            <a:avLst/>
+          </a:prstGeom>
+          <a:noFill/>
+        </p:spPr>
+        <p:txBody>
+          <a:bodyPr wrap="square">
+            <a:spAutoFit/>
+          </a:bodyPr>
+          <a:lstStyle/>
+          <a:p>
+            <a:pPr>
+              <a:spcAft>
+                <a:spcPts val="800"/>
+              </a:spcAft>
+            </a:pPr>
+            <a:r>
+              <a:rPr sz="1600" b="1" i="0">
+                <a:solidFill>
+                  <a:srgbClr val="333333"/>
+                </a:solidFill>
+                <a:latin typeface="Calibri"/>
+              </a:rPr>
+              <a:t>1.</a:t>
+            </a:r>
+            <a:r>
+              <a:rPr sz="1600" b="0" i="0">
+                <a:solidFill>
+                  <a:srgbClr val="333333"/>
+                </a:solidFill>
+                <a:latin typeface="Calibri"/>
+              </a:rPr>
+              <a:t> Paso 1: armen el paquete final y llenen el indice de 8 filas con entregable, nombre de archivo, ruta dentro del paquete y estado, verificando que los 8 archivos abran desde una maquina distinta a la del autor y que ningun nombre de archivo tenga espacios ni tildes que rompan la descarga.</a:t>
+            </a:r>
+          </a:p>
+          <a:p>
+            <a:pPr>
+              <a:spcAft>
+                <a:spcPts val="800"/>
+              </a:spcAft>
+            </a:pPr>
+            <a:r>
+              <a:rPr sz="1600" b="0" i="0">
+                <a:solidFill>
+                  <a:srgbClr val="333333"/>
+                </a:solidFill>
+                <a:latin typeface="Calibri"/>
+              </a:rPr>
+              <a:t>–   </a:t>
+            </a:r>
+            <a:r>
+              <a:rPr sz="1600" b="1" i="0">
+                <a:solidFill>
+                  <a:srgbClr val="333333"/>
+                </a:solidFill>
+                <a:latin typeface="Calibri"/>
+              </a:rPr>
+              <a:t>2.</a:t>
+            </a:r>
+            <a:r>
+              <a:rPr sz="1600" b="0" i="0">
+                <a:solidFill>
+                  <a:srgbClr val="333333"/>
+                </a:solidFill>
+                <a:latin typeface="Calibri"/>
+              </a:rPr>
+              <a:t> Paso 2: escriban en ExamLab la lamina unica de arquitectura en Mermaid con las 3 zonas, los 5 contenedores, el edge, la cadena de entrega y los sistemas externos, verificando al renderizar que sea legible en una sola pantalla sin desplazamiento y que use los mismos nombres canonicos del paquete, porque esta es la lamina que van a proyectar en la sustentacion.</a:t>
+            </a:r>
+          </a:p>
+          <a:p>
+            <a:pPr>
+              <a:spcAft>
+                <a:spcPts val="800"/>
+              </a:spcAft>
+            </a:pPr>
+            <a:r>
+              <a:rPr sz="1600" b="0" i="0">
+                <a:solidFill>
+                  <a:srgbClr val="333333"/>
+                </a:solidFill>
+                <a:latin typeface="Calibri"/>
+              </a:rPr>
+              <a:t>–   </a:t>
+            </a:r>
+            <a:r>
+              <a:rPr sz="1600" b="1" i="0">
+                <a:solidFill>
+                  <a:srgbClr val="333333"/>
+                </a:solidFill>
+                <a:latin typeface="Calibri"/>
+              </a:rPr>
+              <a:t>3.</a:t>
+            </a:r>
+            <a:r>
+              <a:rPr sz="1600" b="0" i="0">
+                <a:solidFill>
+                  <a:srgbClr val="333333"/>
+                </a:solidFill>
+                <a:latin typeface="Calibri"/>
+              </a:rPr>
+              <a:t> Paso 3: redacten el Q and A escrito con 3 preguntas duras que el jurado podria hacer, una de decision de arquitectura, una de seguridad y una de escala o rendimiento, cada una con respuesta de maximo 4 lineas que cite la evidencia del paquete, verificando que ninguna respuesta sea no lo alcanzamos a hacer sin nombrar la decision consciente que tomaron.</a:t>
+            </a:r>
+          </a:p>
+          <a:p>
+            <a:pPr>
+              <a:spcAft>
+                <a:spcPts val="800"/>
+              </a:spcAft>
+            </a:pPr>
+            <a:r>
+              <a:rPr sz="1600" b="0" i="0">
+                <a:solidFill>
+                  <a:srgbClr val="333333"/>
+                </a:solidFill>
+                <a:latin typeface="Calibri"/>
+              </a:rPr>
+              <a:t>–   </a:t>
+            </a:r>
+            <a:r>
+              <a:rPr sz="1600" b="1" i="0">
+                <a:solidFill>
+                  <a:srgbClr val="333333"/>
+                </a:solidFill>
+                <a:latin typeface="Calibri"/>
+              </a:rPr>
+              <a:t>4.</a:t>
+            </a:r>
+            <a:r>
+              <a:rPr sz="1600" b="0" i="0">
+                <a:solidFill>
+                  <a:srgbClr val="333333"/>
+                </a:solidFill>
+                <a:latin typeface="Calibri"/>
+              </a:rPr>
+              <a:t> Paso 4: ensayen el pitch con cronometro ANTES de la sesion y registren la tabla de tiempos reales por seccion con quien hablo en cada una, verificando que el tiempo total quede entre 5 y 8 minutos; la sustentacion se hace EN VIVO en la sesion de clase, con preguntas del docente al cierre, no con un video grabado.</a:t>
+            </a:r>
+          </a:p>
+          <a:p>
+            <a:pPr>
+              <a:spcAft>
+                <a:spcPts val="800"/>
+              </a:spcAft>
+            </a:pPr>
+            <a:r>
+              <a:rPr sz="1600" b="0" i="0">
+                <a:solidFill>
+                  <a:srgbClr val="333333"/>
+                </a:solidFill>
+                <a:latin typeface="Calibri"/>
+              </a:rPr>
+              <a:t>–   </a:t>
+            </a:r>
+            <a:r>
+              <a:rPr sz="1600" b="1" i="0">
+                <a:solidFill>
+                  <a:srgbClr val="333333"/>
+                </a:solidFill>
+                <a:latin typeface="Calibri"/>
+              </a:rPr>
+              <a:t>5.</a:t>
+            </a:r>
+            <a:r>
+              <a:rPr sz="1600" b="0" i="0">
+                <a:solidFill>
+                  <a:srgbClr val="333333"/>
+                </a:solidFill>
+                <a:latin typeface="Calibri"/>
+              </a:rPr>
+              <a:t> Paso 5: escriban la reflexion de media pagina sobre el trade-off mas difícil y suban el paquete final completo mas las 5 preguntas a ExamLab (modulo Proyectos) ANTES de su turno de sustentacion, verificando que el informe, los diagramas, la evidencia del lab, el ci.yml y la presentacion esten los cinco dentro del mismo paquete.</a:t>
+            </a:r>
+          </a:p>
+        </p:txBody>
+      </p:sp>
+      <p:sp>
+        <p:nvSpPr>
+          <p:cNvPr id="6" name="TextBox 5"/>
+          <p:cNvSpPr txBox="1"/>
+          <p:nvPr/>
+        </p:nvSpPr>
+        <p:spPr>
+          <a:xfrm>
+            <a:off x="11185855" y="6473952"/>
+            <a:ext cx="640080" cy="274320"/>
+          </a:xfrm>
+          <a:prstGeom prst="rect">
+            <a:avLst/>
+          </a:prstGeom>
+          <a:noFill/>
+        </p:spPr>
+        <p:txBody>
+          <a:bodyPr wrap="square">
+            <a:spAutoFit/>
+          </a:bodyPr>
+          <a:lstStyle/>
+          <a:p>
+            <a:pPr algn="r"/>
+            <a:r>
+              <a:rPr sz="1100" b="0" i="0">
+                <a:solidFill>
+                  <a:srgbClr val="666666"/>
+                </a:solidFill>
+                <a:latin typeface="Calibri"/>
+              </a:rPr>
+              <a:t>11</a:t>
+            </a:r>
+          </a:p>
+        </p:txBody>
+      </p:sp>
+    </p:spTree>
+  </p:cSld>
+  <p:clrMapOvr>
+    <a:masterClrMapping/>
+  </p:clrMapOvr>
+</p:sld>
+</file>
+
+<file path=ppt/slides/slide12.xml><?xml version="1.0" encoding="utf-8"?>
+<p:sld xmlns:a="http://schemas.openxmlformats.org/drawingml/2006/main" xmlns:p="http://schemas.openxmlformats.org/presentationml/2006/main" xmlns:r="http://schemas.openxmlformats.org/officeDocument/2006/relationships">
+  <p:cSld>
+    <p:bg>
+      <p:bgPr>
+        <a:solidFill>
+          <a:srgbClr val="FFFFFF"/>
+        </a:solidFill>
+        <a:effectLst/>
+      </p:bgPr>
+    </p:bg>
+    <p:spTree>
+      <p:nvGrpSpPr>
+        <p:cNvPr id="1" name=""/>
+        <p:cNvGrpSpPr/>
+        <p:nvPr/>
+      </p:nvGrpSpPr>
+      <p:grpSpPr/>
+      <p:sp>
+        <p:nvSpPr>
+          <p:cNvPr id="2" name="Rectangle 1"/>
+          <p:cNvSpPr/>
+          <p:nvPr/>
+        </p:nvSpPr>
+        <p:spPr>
+          <a:xfrm>
+            <a:off x="0" y="0"/>
+            <a:ext cx="12191695" cy="960120"/>
+          </a:xfrm>
+          <a:prstGeom prst="rect">
+            <a:avLst/>
+          </a:prstGeom>
+          <a:solidFill>
+            <a:srgbClr val="095292"/>
+          </a:solidFill>
+          <a:ln>
+            <a:noFill/>
+          </a:ln>
+        </p:spPr>
+        <p:style>
+          <a:lnRef idx="1">
+            <a:schemeClr val="accent1"/>
+          </a:lnRef>
+          <a:fillRef idx="3">
+            <a:schemeClr val="accent1"/>
+          </a:fillRef>
+          <a:effectRef idx="2">
+            <a:schemeClr val="accent1"/>
+          </a:effectRef>
+          <a:fontRef idx="minor">
+            <a:schemeClr val="lt1"/>
+          </a:fontRef>
+        </p:style>
+        <p:txBody>
+          <a:bodyPr rtlCol="0" anchor="ctr"/>
+          <a:lstStyle/>
+          <a:p>
+            <a:pPr algn="ctr"/>
+          </a:p>
+        </p:txBody>
+      </p:sp>
+      <p:sp>
+        <p:nvSpPr>
+          <p:cNvPr id="3" name="Rectangle 2"/>
+          <p:cNvSpPr/>
+          <p:nvPr/>
+        </p:nvSpPr>
+        <p:spPr>
+          <a:xfrm>
+            <a:off x="0" y="960120"/>
+            <a:ext cx="12191695" cy="41148"/>
+          </a:xfrm>
+          <a:prstGeom prst="rect">
+            <a:avLst/>
+          </a:prstGeom>
+          <a:solidFill>
+            <a:srgbClr val="FFD000"/>
+          </a:solidFill>
+          <a:ln>
+            <a:noFill/>
+          </a:ln>
+        </p:spPr>
+        <p:style>
+          <a:lnRef idx="1">
+            <a:schemeClr val="accent1"/>
+          </a:lnRef>
+          <a:fillRef idx="3">
+            <a:schemeClr val="accent1"/>
+          </a:fillRef>
+          <a:effectRef idx="2">
+            <a:schemeClr val="accent1"/>
+          </a:effectRef>
+          <a:fontRef idx="minor">
+            <a:schemeClr val="lt1"/>
+          </a:fontRef>
+        </p:style>
+        <p:txBody>
+          <a:bodyPr rtlCol="0" anchor="ctr"/>
+          <a:lstStyle/>
+          <a:p>
+            <a:pPr algn="ctr"/>
+          </a:p>
+        </p:txBody>
+      </p:sp>
+      <p:sp>
+        <p:nvSpPr>
+          <p:cNvPr id="4" name="TextBox 3"/>
+          <p:cNvSpPr txBox="1"/>
+          <p:nvPr/>
+        </p:nvSpPr>
+        <p:spPr>
+          <a:xfrm>
+            <a:off x="457200" y="164592"/>
+            <a:ext cx="11277295" cy="502920"/>
+          </a:xfrm>
+          <a:prstGeom prst="rect">
+            <a:avLst/>
+          </a:prstGeom>
+          <a:noFill/>
+        </p:spPr>
+        <p:txBody>
+          <a:bodyPr wrap="square">
+            <a:spAutoFit/>
+          </a:bodyPr>
+          <a:lstStyle/>
+          <a:p>
+            <a:r>
+              <a:rPr sz="2600" b="1" i="0">
+                <a:solidFill>
+                  <a:srgbClr val="FFFFFF"/>
+                </a:solidFill>
+                <a:latin typeface="Calibri"/>
+              </a:rPr>
+              <a:t>Para continuar (PI)</a:t>
+            </a:r>
+          </a:p>
+        </p:txBody>
+      </p:sp>
+      <p:sp>
+        <p:nvSpPr>
+          <p:cNvPr id="5" name="Rounded Rectangle 4"/>
+          <p:cNvSpPr/>
+          <p:nvPr/>
+        </p:nvSpPr>
+        <p:spPr>
+          <a:xfrm>
+            <a:off x="457200" y="1261872"/>
+            <a:ext cx="11277295" cy="1051560"/>
+          </a:xfrm>
+          <a:prstGeom prst="roundRect">
+            <a:avLst>
+              <a:gd name="adj" fmla="val 12000"/>
+            </a:avLst>
+          </a:prstGeom>
+          <a:solidFill>
+            <a:srgbClr val="E8F4FA"/>
+          </a:solidFill>
+          <a:ln>
+            <a:noFill/>
+          </a:ln>
+        </p:spPr>
+        <p:style>
+          <a:lnRef idx="1">
+            <a:schemeClr val="accent1"/>
+          </a:lnRef>
+          <a:fillRef idx="3">
+            <a:schemeClr val="accent1"/>
+          </a:fillRef>
+          <a:effectRef idx="2">
+            <a:schemeClr val="accent1"/>
+          </a:effectRef>
+          <a:fontRef idx="minor">
+            <a:schemeClr val="lt1"/>
+          </a:fontRef>
+        </p:style>
+        <p:txBody>
+          <a:bodyPr rtlCol="0" anchor="ctr"/>
+          <a:lstStyle/>
+          <a:p>
+            <a:pPr algn="ctr"/>
+          </a:p>
+        </p:txBody>
+      </p:sp>
+      <p:sp>
+        <p:nvSpPr>
+          <p:cNvPr id="6" name="Rectangle 5"/>
+          <p:cNvSpPr/>
+          <p:nvPr/>
+        </p:nvSpPr>
+        <p:spPr>
+          <a:xfrm>
+            <a:off x="457200" y="1261872"/>
+            <a:ext cx="128016" cy="1051560"/>
+          </a:xfrm>
+          <a:prstGeom prst="rect">
+            <a:avLst/>
+          </a:prstGeom>
+          <a:solidFill>
+            <a:srgbClr val="269CCB"/>
+          </a:solidFill>
+          <a:ln>
+            <a:noFill/>
+          </a:ln>
+        </p:spPr>
+        <p:style>
+          <a:lnRef idx="1">
+            <a:schemeClr val="accent1"/>
+          </a:lnRef>
+          <a:fillRef idx="3">
+            <a:schemeClr val="accent1"/>
+          </a:fillRef>
+          <a:effectRef idx="2">
+            <a:schemeClr val="accent1"/>
+          </a:effectRef>
+          <a:fontRef idx="minor">
+            <a:schemeClr val="lt1"/>
+          </a:fontRef>
+        </p:style>
+        <p:txBody>
+          <a:bodyPr rtlCol="0" anchor="ctr"/>
+          <a:lstStyle/>
+          <a:p>
+            <a:pPr algn="ctr"/>
+          </a:p>
+        </p:txBody>
+      </p:sp>
+      <p:sp>
+        <p:nvSpPr>
+          <p:cNvPr id="7" name="TextBox 6"/>
+          <p:cNvSpPr txBox="1"/>
+          <p:nvPr/>
+        </p:nvSpPr>
+        <p:spPr>
+          <a:xfrm>
+            <a:off x="777240" y="1399031"/>
+            <a:ext cx="10774375" cy="822959"/>
+          </a:xfrm>
+          <a:prstGeom prst="rect">
+            <a:avLst/>
+          </a:prstGeom>
+          <a:noFill/>
+        </p:spPr>
+        <p:txBody>
+          <a:bodyPr wrap="square">
+            <a:spAutoFit/>
+          </a:bodyPr>
+          <a:lstStyle/>
+          <a:p>
+            <a:r>
+              <a:rPr sz="1200" b="1" i="0">
+                <a:solidFill>
+                  <a:srgbClr val="269CCB"/>
+                </a:solidFill>
+                <a:latin typeface="Calibri"/>
+              </a:rPr>
+              <a:t>Info</a:t>
+            </a:r>
+          </a:p>
+          <a:p>
+            <a:pPr>
+              <a:spcBef>
+                <a:spcPts val="400"/>
+              </a:spcBef>
+            </a:pPr>
+            <a:r>
+              <a:rPr sz="1400" b="0" i="0">
+                <a:solidFill>
+                  <a:srgbClr val="333333"/>
+                </a:solidFill>
+                <a:latin typeface="Calibri"/>
+              </a:rPr>
+              <a:t>Entregable: Paquete final en ExamLab (módulo Proyectos) + pitch de 5–8 min sustentado hoy en clase + Q&amp;A</a:t>
+            </a:r>
+          </a:p>
+        </p:txBody>
+      </p:sp>
+      <p:sp>
+        <p:nvSpPr>
+          <p:cNvPr id="8" name="Rounded Rectangle 7"/>
+          <p:cNvSpPr/>
+          <p:nvPr/>
+        </p:nvSpPr>
+        <p:spPr>
+          <a:xfrm>
+            <a:off x="457200" y="2478024"/>
+            <a:ext cx="11277295" cy="1051560"/>
+          </a:xfrm>
+          <a:prstGeom prst="roundRect">
+            <a:avLst>
+              <a:gd name="adj" fmla="val 12000"/>
+            </a:avLst>
+          </a:prstGeom>
+          <a:solidFill>
+            <a:srgbClr val="FFF8E1"/>
+          </a:solidFill>
+          <a:ln>
+            <a:noFill/>
+          </a:ln>
+        </p:spPr>
+        <p:style>
+          <a:lnRef idx="1">
+            <a:schemeClr val="accent1"/>
+          </a:lnRef>
+          <a:fillRef idx="3">
+            <a:schemeClr val="accent1"/>
+          </a:fillRef>
+          <a:effectRef idx="2">
+            <a:schemeClr val="accent1"/>
+          </a:effectRef>
+          <a:fontRef idx="minor">
+            <a:schemeClr val="lt1"/>
+          </a:fontRef>
+        </p:style>
+        <p:txBody>
+          <a:bodyPr rtlCol="0" anchor="ctr"/>
+          <a:lstStyle/>
+          <a:p>
+            <a:pPr algn="ctr"/>
+          </a:p>
+        </p:txBody>
+      </p:sp>
+      <p:sp>
+        <p:nvSpPr>
+          <p:cNvPr id="9" name="Rectangle 8"/>
+          <p:cNvSpPr/>
+          <p:nvPr/>
+        </p:nvSpPr>
+        <p:spPr>
+          <a:xfrm>
+            <a:off x="457200" y="2478024"/>
+            <a:ext cx="128016" cy="1051560"/>
+          </a:xfrm>
+          <a:prstGeom prst="rect">
+            <a:avLst/>
+          </a:prstGeom>
+          <a:solidFill>
+            <a:srgbClr val="FFD000"/>
+          </a:solidFill>
+          <a:ln>
+            <a:noFill/>
+          </a:ln>
+        </p:spPr>
+        <p:style>
+          <a:lnRef idx="1">
+            <a:schemeClr val="accent1"/>
+          </a:lnRef>
+          <a:fillRef idx="3">
+            <a:schemeClr val="accent1"/>
+          </a:fillRef>
+          <a:effectRef idx="2">
+            <a:schemeClr val="accent1"/>
+          </a:effectRef>
+          <a:fontRef idx="minor">
+            <a:schemeClr val="lt1"/>
+          </a:fontRef>
+        </p:style>
+        <p:txBody>
+          <a:bodyPr rtlCol="0" anchor="ctr"/>
+          <a:lstStyle/>
+          <a:p>
+            <a:pPr algn="ctr"/>
+          </a:p>
+        </p:txBody>
+      </p:sp>
+      <p:sp>
+        <p:nvSpPr>
+          <p:cNvPr id="10" name="TextBox 9"/>
+          <p:cNvSpPr txBox="1"/>
+          <p:nvPr/>
+        </p:nvSpPr>
+        <p:spPr>
+          <a:xfrm>
+            <a:off x="777240" y="2615184"/>
+            <a:ext cx="10774375" cy="822959"/>
+          </a:xfrm>
+          <a:prstGeom prst="rect">
+            <a:avLst/>
+          </a:prstGeom>
+          <a:noFill/>
+        </p:spPr>
+        <p:txBody>
+          <a:bodyPr wrap="square">
+            <a:spAutoFit/>
+          </a:bodyPr>
+          <a:lstStyle/>
+          <a:p>
+            <a:r>
+              <a:rPr sz="1200" b="1" i="0">
+                <a:solidFill>
+                  <a:srgbClr val="FFD000"/>
+                </a:solidFill>
+                <a:latin typeface="Calibri"/>
+              </a:rPr>
+              <a:t>Aclaración</a:t>
+            </a:r>
+          </a:p>
+          <a:p>
+            <a:pPr>
+              <a:spcBef>
+                <a:spcPts val="400"/>
+              </a:spcBef>
+            </a:pPr>
+            <a:r>
+              <a:rPr sz="1400" b="0" i="0">
+                <a:solidFill>
+                  <a:srgbClr val="333333"/>
+                </a:solidFill>
+                <a:latin typeface="Calibri"/>
+              </a:rPr>
+              <a:t>El paquete se sube a ExamLab (https://uniaj.examlab.workers.dev/ · módulo Proyectos) </a:t>
+            </a:r>
+            <a:r>
+              <a:rPr sz="1400" b="1" i="0">
+                <a:solidFill>
+                  <a:srgbClr val="333333"/>
+                </a:solidFill>
+                <a:latin typeface="Calibri"/>
+              </a:rPr>
+              <a:t>antes</a:t>
+            </a:r>
+            <a:r>
+              <a:rPr sz="1400" b="0" i="0">
+                <a:solidFill>
+                  <a:srgbClr val="333333"/>
+                </a:solidFill>
+                <a:latin typeface="Calibri"/>
+              </a:rPr>
+              <a:t> del bloque de sustentaciones.</a:t>
+            </a:r>
+          </a:p>
+        </p:txBody>
+      </p:sp>
+      <p:sp>
+        <p:nvSpPr>
+          <p:cNvPr id="11" name="Rounded Rectangle 10"/>
+          <p:cNvSpPr/>
+          <p:nvPr/>
+        </p:nvSpPr>
+        <p:spPr>
+          <a:xfrm>
+            <a:off x="457200" y="3694176"/>
+            <a:ext cx="11277295" cy="1051560"/>
+          </a:xfrm>
+          <a:prstGeom prst="roundRect">
+            <a:avLst>
+              <a:gd name="adj" fmla="val 12000"/>
+            </a:avLst>
+          </a:prstGeom>
+          <a:solidFill>
+            <a:srgbClr val="FBE4E4"/>
+          </a:solidFill>
+          <a:ln>
+            <a:noFill/>
+          </a:ln>
+        </p:spPr>
+        <p:style>
+          <a:lnRef idx="1">
+            <a:schemeClr val="accent1"/>
+          </a:lnRef>
+          <a:fillRef idx="3">
+            <a:schemeClr val="accent1"/>
+          </a:fillRef>
+          <a:effectRef idx="2">
+            <a:schemeClr val="accent1"/>
+          </a:effectRef>
+          <a:fontRef idx="minor">
+            <a:schemeClr val="lt1"/>
+          </a:fontRef>
+        </p:style>
+        <p:txBody>
+          <a:bodyPr rtlCol="0" anchor="ctr"/>
+          <a:lstStyle/>
+          <a:p>
+            <a:pPr algn="ctr"/>
+          </a:p>
+        </p:txBody>
+      </p:sp>
+      <p:sp>
+        <p:nvSpPr>
+          <p:cNvPr id="12" name="Rectangle 11"/>
+          <p:cNvSpPr/>
+          <p:nvPr/>
+        </p:nvSpPr>
+        <p:spPr>
+          <a:xfrm>
+            <a:off x="457200" y="3694176"/>
+            <a:ext cx="128016" cy="1051560"/>
+          </a:xfrm>
+          <a:prstGeom prst="rect">
+            <a:avLst/>
+          </a:prstGeom>
+          <a:solidFill>
+            <a:srgbClr val="A02030"/>
+          </a:solidFill>
+          <a:ln>
+            <a:noFill/>
+          </a:ln>
+        </p:spPr>
+        <p:style>
+          <a:lnRef idx="1">
+            <a:schemeClr val="accent1"/>
+          </a:lnRef>
+          <a:fillRef idx="3">
+            <a:schemeClr val="accent1"/>
+          </a:fillRef>
+          <a:effectRef idx="2">
+            <a:schemeClr val="accent1"/>
+          </a:effectRef>
+          <a:fontRef idx="minor">
+            <a:schemeClr val="lt1"/>
+          </a:fontRef>
+        </p:style>
+        <p:txBody>
+          <a:bodyPr rtlCol="0" anchor="ctr"/>
+          <a:lstStyle/>
+          <a:p>
+            <a:pPr algn="ctr"/>
+          </a:p>
+        </p:txBody>
+      </p:sp>
+      <p:sp>
+        <p:nvSpPr>
+          <p:cNvPr id="13" name="TextBox 12"/>
+          <p:cNvSpPr txBox="1"/>
+          <p:nvPr/>
+        </p:nvSpPr>
+        <p:spPr>
+          <a:xfrm>
+            <a:off x="777240" y="3831336"/>
+            <a:ext cx="10774375" cy="822959"/>
+          </a:xfrm>
+          <a:prstGeom prst="rect">
+            <a:avLst/>
+          </a:prstGeom>
+          <a:noFill/>
+        </p:spPr>
+        <p:txBody>
+          <a:bodyPr wrap="square">
+            <a:spAutoFit/>
+          </a:bodyPr>
+          <a:lstStyle/>
+          <a:p>
+            <a:r>
+              <a:rPr sz="1200" b="1" i="0">
+                <a:solidFill>
+                  <a:srgbClr val="A02030"/>
+                </a:solidFill>
+                <a:latin typeface="Calibri"/>
+              </a:rPr>
+              <a:t>Atención</a:t>
+            </a:r>
+          </a:p>
+          <a:p>
+            <a:pPr>
+              <a:spcBef>
+                <a:spcPts val="400"/>
+              </a:spcBef>
+            </a:pPr>
+            <a:r>
+              <a:rPr sz="1400" b="0" i="0">
+                <a:solidFill>
+                  <a:srgbClr val="333333"/>
+                </a:solidFill>
+                <a:latin typeface="Calibri"/>
+              </a:rPr>
+              <a:t>La sustentación es </a:t>
+            </a:r>
+            <a:r>
+              <a:rPr sz="1400" b="1" i="0">
+                <a:solidFill>
+                  <a:srgbClr val="333333"/>
+                </a:solidFill>
+                <a:latin typeface="Calibri"/>
+              </a:rPr>
+              <a:t>en vivo</a:t>
+            </a:r>
+            <a:r>
+              <a:rPr sz="1400" b="0" i="0">
+                <a:solidFill>
+                  <a:srgbClr val="333333"/>
+                </a:solidFill>
+                <a:latin typeface="Calibri"/>
+              </a:rPr>
+              <a:t> y con Q&amp;A: no se acepta video grabado en su lugar.</a:t>
+            </a:r>
+          </a:p>
+        </p:txBody>
+      </p:sp>
+      <p:sp>
+        <p:nvSpPr>
+          <p:cNvPr id="14" name="TextBox 13"/>
+          <p:cNvSpPr txBox="1"/>
+          <p:nvPr/>
+        </p:nvSpPr>
+        <p:spPr>
+          <a:xfrm>
+            <a:off x="11185855" y="6473952"/>
+            <a:ext cx="640080" cy="274320"/>
+          </a:xfrm>
+          <a:prstGeom prst="rect">
+            <a:avLst/>
+          </a:prstGeom>
+          <a:noFill/>
+        </p:spPr>
+        <p:txBody>
+          <a:bodyPr wrap="square">
+            <a:spAutoFit/>
+          </a:bodyPr>
+          <a:lstStyle/>
+          <a:p>
+            <a:pPr algn="r"/>
+            <a:r>
+              <a:rPr sz="1100" b="0" i="0">
+                <a:solidFill>
+                  <a:srgbClr val="666666"/>
+                </a:solidFill>
+                <a:latin typeface="Calibri"/>
+              </a:rPr>
+              <a:t>12</a:t>
+            </a:r>
+          </a:p>
+        </p:txBody>
+      </p:sp>
+    </p:spTree>
+  </p:cSld>
+  <p:clrMapOvr>
+    <a:masterClrMapping/>
+  </p:clrMapOvr>
+</p:sld>
+</file>
+
+<file path=ppt/slides/slide13.xml><?xml version="1.0" encoding="utf-8"?>
+<p:sld xmlns:a="http://schemas.openxmlformats.org/drawingml/2006/main" xmlns:p="http://schemas.openxmlformats.org/presentationml/2006/main" xmlns:r="http://schemas.openxmlformats.org/officeDocument/2006/relationships">
+  <p:cSld>
+    <p:bg>
+      <p:bgPr>
+        <a:solidFill>
+          <a:srgbClr val="FFFFFF"/>
+        </a:solidFill>
+        <a:effectLst/>
+      </p:bgPr>
+    </p:bg>
+    <p:spTree>
+      <p:nvGrpSpPr>
+        <p:cNvPr id="1" name=""/>
+        <p:cNvGrpSpPr/>
+        <p:nvPr/>
+      </p:nvGrpSpPr>
+      <p:grpSpPr/>
+      <p:sp>
+        <p:nvSpPr>
+          <p:cNvPr id="2" name="Rectangle 1"/>
+          <p:cNvSpPr/>
+          <p:nvPr/>
+        </p:nvSpPr>
+        <p:spPr>
+          <a:xfrm>
+            <a:off x="0" y="0"/>
             <a:ext cx="12191695" cy="164592"/>
           </a:xfrm>
           <a:prstGeom prst="rect">
@@ -6390,7 +7656,7 @@
         <p:spPr>
           <a:xfrm>
             <a:off x="0" y="0"/>
-            <a:ext cx="12191695" cy="960120"/>
+            <a:ext cx="12191695" cy="1170432"/>
           </a:xfrm>
           <a:prstGeom prst="rect">
             <a:avLst/>
@@ -6432,7 +7698,7 @@
         </p:nvSpPr>
         <p:spPr>
           <a:xfrm>
-            <a:off x="0" y="960120"/>
+            <a:off x="0" y="1170432"/>
             <a:ext cx="12191695" cy="41148"/>
           </a:xfrm>
           <a:prstGeom prst="rect">
@@ -6476,7 +7742,7 @@
         <p:spPr>
           <a:xfrm>
             <a:off x="457200" y="164592"/>
-            <a:ext cx="11277295" cy="502920"/>
+            <a:ext cx="11277295" cy="384048"/>
           </a:xfrm>
           <a:prstGeom prst="rect">
             <a:avLst/>
@@ -6496,7 +7762,7 @@
                 </a:solidFill>
                 <a:latin typeface="Calibri"/>
               </a:rPr>
-              <a:t>Sustentación (paso a paso)</a:t>
+              <a:t>Herramientas de hoy</a:t>
             </a:r>
           </a:p>
         </p:txBody>
@@ -6509,8 +7775,8 @@
         </p:nvSpPr>
         <p:spPr>
           <a:xfrm>
-            <a:off x="457200" y="1170432"/>
-            <a:ext cx="11277295" cy="5230368"/>
+            <a:off x="457200" y="566928"/>
+            <a:ext cx="11277295" cy="411480"/>
           </a:xfrm>
           <a:prstGeom prst="rect">
             <a:avLst/>
@@ -6523,171 +7789,837 @@
           </a:bodyPr>
           <a:lstStyle/>
           <a:p>
-            <a:pPr>
-              <a:spcAft>
-                <a:spcPts val="800"/>
-              </a:spcAft>
+            <a:r>
+              <a:rPr sz="1400" b="0" i="0">
+                <a:solidFill>
+                  <a:srgbClr val="B8D8EE"/>
+                </a:solidFill>
+                <a:latin typeface="Calibri"/>
+              </a:rPr>
+              <a:t>Gratis · navegador o free tier · sin cuenta de pago</a:t>
+            </a:r>
+          </a:p>
+        </p:txBody>
+      </p:sp>
+      <p:sp>
+        <p:nvSpPr>
+          <p:cNvPr id="6" name="Rounded Rectangle 5"/>
+          <p:cNvSpPr/>
+          <p:nvPr/>
+        </p:nvSpPr>
+        <p:spPr>
+          <a:xfrm>
+            <a:off x="457200" y="1591056"/>
+            <a:ext cx="3624986" cy="2299716"/>
+          </a:xfrm>
+          <a:prstGeom prst="roundRect">
+            <a:avLst>
+              <a:gd name="adj" fmla="val 12000"/>
+            </a:avLst>
+          </a:prstGeom>
+          <a:solidFill>
+            <a:srgbClr val="F2F2F2"/>
+          </a:solidFill>
+          <a:ln>
+            <a:noFill/>
+          </a:ln>
+        </p:spPr>
+        <p:style>
+          <a:lnRef idx="1">
+            <a:schemeClr val="accent1"/>
+          </a:lnRef>
+          <a:fillRef idx="3">
+            <a:schemeClr val="accent1"/>
+          </a:fillRef>
+          <a:effectRef idx="2">
+            <a:schemeClr val="accent1"/>
+          </a:effectRef>
+          <a:fontRef idx="minor">
+            <a:schemeClr val="lt1"/>
+          </a:fontRef>
+        </p:style>
+        <p:txBody>
+          <a:bodyPr rtlCol="0" anchor="ctr"/>
+          <a:lstStyle/>
+          <a:p>
+            <a:pPr algn="ctr"/>
+          </a:p>
+        </p:txBody>
+      </p:sp>
+      <p:sp>
+        <p:nvSpPr>
+          <p:cNvPr id="7" name="Rectangle 6"/>
+          <p:cNvSpPr/>
+          <p:nvPr/>
+        </p:nvSpPr>
+        <p:spPr>
+          <a:xfrm>
+            <a:off x="457200" y="1591056"/>
+            <a:ext cx="3624986" cy="64008"/>
+          </a:xfrm>
+          <a:prstGeom prst="rect">
+            <a:avLst/>
+          </a:prstGeom>
+          <a:solidFill>
+            <a:srgbClr val="095292"/>
+          </a:solidFill>
+          <a:ln>
+            <a:noFill/>
+          </a:ln>
+        </p:spPr>
+        <p:style>
+          <a:lnRef idx="1">
+            <a:schemeClr val="accent1"/>
+          </a:lnRef>
+          <a:fillRef idx="3">
+            <a:schemeClr val="accent1"/>
+          </a:fillRef>
+          <a:effectRef idx="2">
+            <a:schemeClr val="accent1"/>
+          </a:effectRef>
+          <a:fontRef idx="minor">
+            <a:schemeClr val="lt1"/>
+          </a:fontRef>
+        </p:style>
+        <p:txBody>
+          <a:bodyPr rtlCol="0" anchor="ctr"/>
+          <a:lstStyle/>
+          <a:p>
+            <a:pPr algn="ctr"/>
+          </a:p>
+        </p:txBody>
+      </p:sp>
+      <p:sp>
+        <p:nvSpPr>
+          <p:cNvPr id="8" name="Rectangle 7"/>
+          <p:cNvSpPr/>
+          <p:nvPr/>
+        </p:nvSpPr>
+        <p:spPr>
+          <a:xfrm>
+            <a:off x="457200" y="1655064"/>
+            <a:ext cx="3624986" cy="27432"/>
+          </a:xfrm>
+          <a:prstGeom prst="rect">
+            <a:avLst/>
+          </a:prstGeom>
+          <a:solidFill>
+            <a:srgbClr val="FFD000"/>
+          </a:solidFill>
+          <a:ln>
+            <a:noFill/>
+          </a:ln>
+        </p:spPr>
+        <p:style>
+          <a:lnRef idx="1">
+            <a:schemeClr val="accent1"/>
+          </a:lnRef>
+          <a:fillRef idx="3">
+            <a:schemeClr val="accent1"/>
+          </a:fillRef>
+          <a:effectRef idx="2">
+            <a:schemeClr val="accent1"/>
+          </a:effectRef>
+          <a:fontRef idx="minor">
+            <a:schemeClr val="lt1"/>
+          </a:fontRef>
+        </p:style>
+        <p:txBody>
+          <a:bodyPr rtlCol="0" anchor="ctr"/>
+          <a:lstStyle/>
+          <a:p>
+            <a:pPr algn="ctr"/>
+          </a:p>
+        </p:txBody>
+      </p:sp>
+      <p:pic>
+        <p:nvPicPr>
+          <p:cNvPr id="9" name="Picture 8" descr="google_docs.png"/>
+          <p:cNvPicPr>
+            <a:picLocks noChangeAspect="1"/>
+          </p:cNvPicPr>
+          <p:nvPr/>
+        </p:nvPicPr>
+        <p:blipFill>
+          <a:blip r:embed="rId2"/>
+          <a:stretch>
+            <a:fillRect/>
+          </a:stretch>
+        </p:blipFill>
+        <p:spPr>
+          <a:xfrm>
+            <a:off x="1659331" y="1847087"/>
+            <a:ext cx="1220724" cy="1220724"/>
+          </a:xfrm>
+          <a:prstGeom prst="rect">
+            <a:avLst/>
+          </a:prstGeom>
+        </p:spPr>
+      </p:pic>
+      <p:sp>
+        <p:nvSpPr>
+          <p:cNvPr id="10" name="TextBox 9"/>
+          <p:cNvSpPr txBox="1"/>
+          <p:nvPr/>
+        </p:nvSpPr>
+        <p:spPr>
+          <a:xfrm>
+            <a:off x="530352" y="3159251"/>
+            <a:ext cx="3478682" cy="621792"/>
+          </a:xfrm>
+          <a:prstGeom prst="rect">
+            <a:avLst/>
+          </a:prstGeom>
+          <a:noFill/>
+        </p:spPr>
+        <p:txBody>
+          <a:bodyPr wrap="square" anchor="t"/>
+          <a:lstStyle/>
+          <a:p>
+            <a:pPr algn="ctr"/>
+            <a:r>
+              <a:rPr sz="1300" b="1" i="0">
+                <a:solidFill>
+                  <a:srgbClr val="095292"/>
+                </a:solidFill>
+                <a:latin typeface="Calibri"/>
+              </a:rPr>
+              <a:t>Google Docs</a:t>
+            </a:r>
+          </a:p>
+          <a:p>
+            <a:pPr algn="ctr">
+              <a:spcBef>
+                <a:spcPts val="200"/>
+              </a:spcBef>
             </a:pPr>
             <a:r>
-              <a:rPr sz="1600" b="1" i="0">
-                <a:solidFill>
-                  <a:srgbClr val="333333"/>
-                </a:solidFill>
-                <a:latin typeface="Calibri"/>
-              </a:rPr>
-              <a:t>1.</a:t>
-            </a:r>
-            <a:r>
-              <a:rPr sz="1600" b="0" i="0">
-                <a:solidFill>
-                  <a:srgbClr val="333333"/>
-                </a:solidFill>
-                <a:latin typeface="Calibri"/>
-              </a:rPr>
-              <a:t> Paso 1: armen el paquete final y llenen el indice de 8 filas con entregable, nombre de archivo, ruta dentro del paquete y estado, verificando que los 8 archivos abran desde una maquina distinta a la del autor y que ningun nombre de archivo tenga espacios ni tildes que rompan la descarga.</a:t>
-            </a:r>
-          </a:p>
-          <a:p>
-            <a:pPr>
-              <a:spcAft>
-                <a:spcPts val="800"/>
-              </a:spcAft>
+              <a:rPr sz="1000" b="0" i="0">
+                <a:solidFill>
+                  <a:srgbClr val="666666"/>
+                </a:solidFill>
+                <a:latin typeface="Calibri"/>
+              </a:rPr>
+              <a:t>Pitch y portafolio</a:t>
+            </a:r>
+          </a:p>
+        </p:txBody>
+      </p:sp>
+      <p:sp>
+        <p:nvSpPr>
+          <p:cNvPr id="11" name="Rounded Rectangle 10"/>
+          <p:cNvSpPr/>
+          <p:nvPr/>
+        </p:nvSpPr>
+        <p:spPr>
+          <a:xfrm>
+            <a:off x="4283354" y="1591056"/>
+            <a:ext cx="3624986" cy="2299716"/>
+          </a:xfrm>
+          <a:prstGeom prst="roundRect">
+            <a:avLst>
+              <a:gd name="adj" fmla="val 12000"/>
+            </a:avLst>
+          </a:prstGeom>
+          <a:solidFill>
+            <a:srgbClr val="F2F2F2"/>
+          </a:solidFill>
+          <a:ln>
+            <a:noFill/>
+          </a:ln>
+        </p:spPr>
+        <p:style>
+          <a:lnRef idx="1">
+            <a:schemeClr val="accent1"/>
+          </a:lnRef>
+          <a:fillRef idx="3">
+            <a:schemeClr val="accent1"/>
+          </a:fillRef>
+          <a:effectRef idx="2">
+            <a:schemeClr val="accent1"/>
+          </a:effectRef>
+          <a:fontRef idx="minor">
+            <a:schemeClr val="lt1"/>
+          </a:fontRef>
+        </p:style>
+        <p:txBody>
+          <a:bodyPr rtlCol="0" anchor="ctr"/>
+          <a:lstStyle/>
+          <a:p>
+            <a:pPr algn="ctr"/>
+          </a:p>
+        </p:txBody>
+      </p:sp>
+      <p:sp>
+        <p:nvSpPr>
+          <p:cNvPr id="12" name="Rectangle 11"/>
+          <p:cNvSpPr/>
+          <p:nvPr/>
+        </p:nvSpPr>
+        <p:spPr>
+          <a:xfrm>
+            <a:off x="4283354" y="1591056"/>
+            <a:ext cx="3624986" cy="64008"/>
+          </a:xfrm>
+          <a:prstGeom prst="rect">
+            <a:avLst/>
+          </a:prstGeom>
+          <a:solidFill>
+            <a:srgbClr val="095292"/>
+          </a:solidFill>
+          <a:ln>
+            <a:noFill/>
+          </a:ln>
+        </p:spPr>
+        <p:style>
+          <a:lnRef idx="1">
+            <a:schemeClr val="accent1"/>
+          </a:lnRef>
+          <a:fillRef idx="3">
+            <a:schemeClr val="accent1"/>
+          </a:fillRef>
+          <a:effectRef idx="2">
+            <a:schemeClr val="accent1"/>
+          </a:effectRef>
+          <a:fontRef idx="minor">
+            <a:schemeClr val="lt1"/>
+          </a:fontRef>
+        </p:style>
+        <p:txBody>
+          <a:bodyPr rtlCol="0" anchor="ctr"/>
+          <a:lstStyle/>
+          <a:p>
+            <a:pPr algn="ctr"/>
+          </a:p>
+        </p:txBody>
+      </p:sp>
+      <p:sp>
+        <p:nvSpPr>
+          <p:cNvPr id="13" name="Rectangle 12"/>
+          <p:cNvSpPr/>
+          <p:nvPr/>
+        </p:nvSpPr>
+        <p:spPr>
+          <a:xfrm>
+            <a:off x="4283354" y="1655064"/>
+            <a:ext cx="3624986" cy="27432"/>
+          </a:xfrm>
+          <a:prstGeom prst="rect">
+            <a:avLst/>
+          </a:prstGeom>
+          <a:solidFill>
+            <a:srgbClr val="FFD000"/>
+          </a:solidFill>
+          <a:ln>
+            <a:noFill/>
+          </a:ln>
+        </p:spPr>
+        <p:style>
+          <a:lnRef idx="1">
+            <a:schemeClr val="accent1"/>
+          </a:lnRef>
+          <a:fillRef idx="3">
+            <a:schemeClr val="accent1"/>
+          </a:fillRef>
+          <a:effectRef idx="2">
+            <a:schemeClr val="accent1"/>
+          </a:effectRef>
+          <a:fontRef idx="minor">
+            <a:schemeClr val="lt1"/>
+          </a:fontRef>
+        </p:style>
+        <p:txBody>
+          <a:bodyPr rtlCol="0" anchor="ctr"/>
+          <a:lstStyle/>
+          <a:p>
+            <a:pPr algn="ctr"/>
+          </a:p>
+        </p:txBody>
+      </p:sp>
+      <p:pic>
+        <p:nvPicPr>
+          <p:cNvPr id="14" name="Picture 13" descr="drawio.png"/>
+          <p:cNvPicPr>
+            <a:picLocks noChangeAspect="1"/>
+          </p:cNvPicPr>
+          <p:nvPr/>
+        </p:nvPicPr>
+        <p:blipFill>
+          <a:blip r:embed="rId3"/>
+          <a:stretch>
+            <a:fillRect/>
+          </a:stretch>
+        </p:blipFill>
+        <p:spPr>
+          <a:xfrm>
+            <a:off x="5485485" y="1847087"/>
+            <a:ext cx="1220724" cy="1220724"/>
+          </a:xfrm>
+          <a:prstGeom prst="rect">
+            <a:avLst/>
+          </a:prstGeom>
+        </p:spPr>
+      </p:pic>
+      <p:sp>
+        <p:nvSpPr>
+          <p:cNvPr id="15" name="TextBox 14"/>
+          <p:cNvSpPr txBox="1"/>
+          <p:nvPr/>
+        </p:nvSpPr>
+        <p:spPr>
+          <a:xfrm>
+            <a:off x="4356506" y="3159251"/>
+            <a:ext cx="3478682" cy="621792"/>
+          </a:xfrm>
+          <a:prstGeom prst="rect">
+            <a:avLst/>
+          </a:prstGeom>
+          <a:noFill/>
+        </p:spPr>
+        <p:txBody>
+          <a:bodyPr wrap="square" anchor="t"/>
+          <a:lstStyle/>
+          <a:p>
+            <a:pPr algn="ctr"/>
+            <a:r>
+              <a:rPr sz="1300" b="1" i="0">
+                <a:solidFill>
+                  <a:srgbClr val="095292"/>
+                </a:solidFill>
+                <a:latin typeface="Calibri"/>
+              </a:rPr>
+              <a:t>draw.io</a:t>
+            </a:r>
+          </a:p>
+          <a:p>
+            <a:pPr algn="ctr">
+              <a:spcBef>
+                <a:spcPts val="200"/>
+              </a:spcBef>
             </a:pPr>
             <a:r>
-              <a:rPr sz="1600" b="0" i="0">
-                <a:solidFill>
-                  <a:srgbClr val="333333"/>
-                </a:solidFill>
-                <a:latin typeface="Calibri"/>
-              </a:rPr>
-              <a:t>–   </a:t>
-            </a:r>
-            <a:r>
-              <a:rPr sz="1600" b="1" i="0">
-                <a:solidFill>
-                  <a:srgbClr val="333333"/>
-                </a:solidFill>
-                <a:latin typeface="Calibri"/>
-              </a:rPr>
-              <a:t>2.</a:t>
-            </a:r>
-            <a:r>
-              <a:rPr sz="1600" b="0" i="0">
-                <a:solidFill>
-                  <a:srgbClr val="333333"/>
-                </a:solidFill>
-                <a:latin typeface="Calibri"/>
-              </a:rPr>
-              <a:t> Paso 2: escriban en ExamLab la lamina unica de arquitectura en Mermaid con las 3 zonas, los 5 contenedores, el edge, la cadena de entrega y los sistemas externos, verificando al renderizar que sea legible en una sola pantalla sin desplazamiento y que use los mismos nombres canonicos del paquete, porque esta es la lamina que van a proyectar en la sustentacion.</a:t>
-            </a:r>
-          </a:p>
-          <a:p>
-            <a:pPr>
-              <a:spcAft>
-                <a:spcPts val="800"/>
-              </a:spcAft>
+              <a:rPr sz="1000" b="0" i="0">
+                <a:solidFill>
+                  <a:srgbClr val="666666"/>
+                </a:solidFill>
+                <a:latin typeface="Calibri"/>
+              </a:rPr>
+              <a:t>Diagramas del paquete</a:t>
+            </a:r>
+          </a:p>
+        </p:txBody>
+      </p:sp>
+      <p:sp>
+        <p:nvSpPr>
+          <p:cNvPr id="16" name="Rounded Rectangle 15"/>
+          <p:cNvSpPr/>
+          <p:nvPr/>
+        </p:nvSpPr>
+        <p:spPr>
+          <a:xfrm>
+            <a:off x="8109508" y="1591056"/>
+            <a:ext cx="3624986" cy="2299716"/>
+          </a:xfrm>
+          <a:prstGeom prst="roundRect">
+            <a:avLst>
+              <a:gd name="adj" fmla="val 12000"/>
+            </a:avLst>
+          </a:prstGeom>
+          <a:solidFill>
+            <a:srgbClr val="F2F2F2"/>
+          </a:solidFill>
+          <a:ln>
+            <a:noFill/>
+          </a:ln>
+        </p:spPr>
+        <p:style>
+          <a:lnRef idx="1">
+            <a:schemeClr val="accent1"/>
+          </a:lnRef>
+          <a:fillRef idx="3">
+            <a:schemeClr val="accent1"/>
+          </a:fillRef>
+          <a:effectRef idx="2">
+            <a:schemeClr val="accent1"/>
+          </a:effectRef>
+          <a:fontRef idx="minor">
+            <a:schemeClr val="lt1"/>
+          </a:fontRef>
+        </p:style>
+        <p:txBody>
+          <a:bodyPr rtlCol="0" anchor="ctr"/>
+          <a:lstStyle/>
+          <a:p>
+            <a:pPr algn="ctr"/>
+          </a:p>
+        </p:txBody>
+      </p:sp>
+      <p:sp>
+        <p:nvSpPr>
+          <p:cNvPr id="17" name="Rectangle 16"/>
+          <p:cNvSpPr/>
+          <p:nvPr/>
+        </p:nvSpPr>
+        <p:spPr>
+          <a:xfrm>
+            <a:off x="8109508" y="1591056"/>
+            <a:ext cx="3624986" cy="64008"/>
+          </a:xfrm>
+          <a:prstGeom prst="rect">
+            <a:avLst/>
+          </a:prstGeom>
+          <a:solidFill>
+            <a:srgbClr val="095292"/>
+          </a:solidFill>
+          <a:ln>
+            <a:noFill/>
+          </a:ln>
+        </p:spPr>
+        <p:style>
+          <a:lnRef idx="1">
+            <a:schemeClr val="accent1"/>
+          </a:lnRef>
+          <a:fillRef idx="3">
+            <a:schemeClr val="accent1"/>
+          </a:fillRef>
+          <a:effectRef idx="2">
+            <a:schemeClr val="accent1"/>
+          </a:effectRef>
+          <a:fontRef idx="minor">
+            <a:schemeClr val="lt1"/>
+          </a:fontRef>
+        </p:style>
+        <p:txBody>
+          <a:bodyPr rtlCol="0" anchor="ctr"/>
+          <a:lstStyle/>
+          <a:p>
+            <a:pPr algn="ctr"/>
+          </a:p>
+        </p:txBody>
+      </p:sp>
+      <p:sp>
+        <p:nvSpPr>
+          <p:cNvPr id="18" name="Rectangle 17"/>
+          <p:cNvSpPr/>
+          <p:nvPr/>
+        </p:nvSpPr>
+        <p:spPr>
+          <a:xfrm>
+            <a:off x="8109508" y="1655064"/>
+            <a:ext cx="3624986" cy="27432"/>
+          </a:xfrm>
+          <a:prstGeom prst="rect">
+            <a:avLst/>
+          </a:prstGeom>
+          <a:solidFill>
+            <a:srgbClr val="FFD000"/>
+          </a:solidFill>
+          <a:ln>
+            <a:noFill/>
+          </a:ln>
+        </p:spPr>
+        <p:style>
+          <a:lnRef idx="1">
+            <a:schemeClr val="accent1"/>
+          </a:lnRef>
+          <a:fillRef idx="3">
+            <a:schemeClr val="accent1"/>
+          </a:fillRef>
+          <a:effectRef idx="2">
+            <a:schemeClr val="accent1"/>
+          </a:effectRef>
+          <a:fontRef idx="minor">
+            <a:schemeClr val="lt1"/>
+          </a:fontRef>
+        </p:style>
+        <p:txBody>
+          <a:bodyPr rtlCol="0" anchor="ctr"/>
+          <a:lstStyle/>
+          <a:p>
+            <a:pPr algn="ctr"/>
+          </a:p>
+        </p:txBody>
+      </p:sp>
+      <p:pic>
+        <p:nvPicPr>
+          <p:cNvPr id="19" name="Picture 18" descr="mermaid.png"/>
+          <p:cNvPicPr>
+            <a:picLocks noChangeAspect="1"/>
+          </p:cNvPicPr>
+          <p:nvPr/>
+        </p:nvPicPr>
+        <p:blipFill>
+          <a:blip r:embed="rId4"/>
+          <a:stretch>
+            <a:fillRect/>
+          </a:stretch>
+        </p:blipFill>
+        <p:spPr>
+          <a:xfrm>
+            <a:off x="9311640" y="1847087"/>
+            <a:ext cx="1220724" cy="1220724"/>
+          </a:xfrm>
+          <a:prstGeom prst="rect">
+            <a:avLst/>
+          </a:prstGeom>
+        </p:spPr>
+      </p:pic>
+      <p:sp>
+        <p:nvSpPr>
+          <p:cNvPr id="20" name="TextBox 19"/>
+          <p:cNvSpPr txBox="1"/>
+          <p:nvPr/>
+        </p:nvSpPr>
+        <p:spPr>
+          <a:xfrm>
+            <a:off x="8182660" y="3159251"/>
+            <a:ext cx="3478682" cy="621792"/>
+          </a:xfrm>
+          <a:prstGeom prst="rect">
+            <a:avLst/>
+          </a:prstGeom>
+          <a:noFill/>
+        </p:spPr>
+        <p:txBody>
+          <a:bodyPr wrap="square" anchor="t"/>
+          <a:lstStyle/>
+          <a:p>
+            <a:pPr algn="ctr"/>
+            <a:r>
+              <a:rPr sz="1300" b="1" i="0">
+                <a:solidFill>
+                  <a:srgbClr val="095292"/>
+                </a:solidFill>
+                <a:latin typeface="Calibri"/>
+              </a:rPr>
+              <a:t>Mermaid</a:t>
+            </a:r>
+          </a:p>
+          <a:p>
+            <a:pPr algn="ctr">
+              <a:spcBef>
+                <a:spcPts val="200"/>
+              </a:spcBef>
             </a:pPr>
             <a:r>
-              <a:rPr sz="1600" b="0" i="0">
-                <a:solidFill>
-                  <a:srgbClr val="333333"/>
-                </a:solidFill>
-                <a:latin typeface="Calibri"/>
-              </a:rPr>
-              <a:t>–   </a:t>
-            </a:r>
-            <a:r>
-              <a:rPr sz="1600" b="1" i="0">
-                <a:solidFill>
-                  <a:srgbClr val="333333"/>
-                </a:solidFill>
-                <a:latin typeface="Calibri"/>
-              </a:rPr>
-              <a:t>3.</a:t>
-            </a:r>
-            <a:r>
-              <a:rPr sz="1600" b="0" i="0">
-                <a:solidFill>
-                  <a:srgbClr val="333333"/>
-                </a:solidFill>
-                <a:latin typeface="Calibri"/>
-              </a:rPr>
-              <a:t> Paso 3: redacten el Q and A escrito con 3 preguntas duras que el jurado podria hacer, una de decision de arquitectura, una de seguridad y una de escala o rendimiento, cada una con respuesta de maximo 4 lineas que cite la evidencia del paquete, verificando que ninguna respuesta sea no lo alcanzamos a hacer sin nombrar la decision consciente que tomaron.</a:t>
-            </a:r>
-          </a:p>
-          <a:p>
-            <a:pPr>
-              <a:spcAft>
-                <a:spcPts val="800"/>
-              </a:spcAft>
+              <a:rPr sz="1000" b="0" i="0">
+                <a:solidFill>
+                  <a:srgbClr val="666666"/>
+                </a:solidFill>
+                <a:latin typeface="Calibri"/>
+              </a:rPr>
+              <a:t>Codigo del diagrama</a:t>
+            </a:r>
+          </a:p>
+        </p:txBody>
+      </p:sp>
+      <p:sp>
+        <p:nvSpPr>
+          <p:cNvPr id="21" name="Rounded Rectangle 20"/>
+          <p:cNvSpPr/>
+          <p:nvPr/>
+        </p:nvSpPr>
+        <p:spPr>
+          <a:xfrm>
+            <a:off x="4283354" y="4055364"/>
+            <a:ext cx="3624986" cy="2299716"/>
+          </a:xfrm>
+          <a:prstGeom prst="roundRect">
+            <a:avLst>
+              <a:gd name="adj" fmla="val 12000"/>
+            </a:avLst>
+          </a:prstGeom>
+          <a:solidFill>
+            <a:srgbClr val="F2F2F2"/>
+          </a:solidFill>
+          <a:ln>
+            <a:noFill/>
+          </a:ln>
+        </p:spPr>
+        <p:style>
+          <a:lnRef idx="1">
+            <a:schemeClr val="accent1"/>
+          </a:lnRef>
+          <a:fillRef idx="3">
+            <a:schemeClr val="accent1"/>
+          </a:fillRef>
+          <a:effectRef idx="2">
+            <a:schemeClr val="accent1"/>
+          </a:effectRef>
+          <a:fontRef idx="minor">
+            <a:schemeClr val="lt1"/>
+          </a:fontRef>
+        </p:style>
+        <p:txBody>
+          <a:bodyPr rtlCol="0" anchor="ctr"/>
+          <a:lstStyle/>
+          <a:p>
+            <a:pPr algn="ctr"/>
+          </a:p>
+        </p:txBody>
+      </p:sp>
+      <p:sp>
+        <p:nvSpPr>
+          <p:cNvPr id="22" name="Rectangle 21"/>
+          <p:cNvSpPr/>
+          <p:nvPr/>
+        </p:nvSpPr>
+        <p:spPr>
+          <a:xfrm>
+            <a:off x="4283354" y="4055364"/>
+            <a:ext cx="3624986" cy="64008"/>
+          </a:xfrm>
+          <a:prstGeom prst="rect">
+            <a:avLst/>
+          </a:prstGeom>
+          <a:solidFill>
+            <a:srgbClr val="095292"/>
+          </a:solidFill>
+          <a:ln>
+            <a:noFill/>
+          </a:ln>
+        </p:spPr>
+        <p:style>
+          <a:lnRef idx="1">
+            <a:schemeClr val="accent1"/>
+          </a:lnRef>
+          <a:fillRef idx="3">
+            <a:schemeClr val="accent1"/>
+          </a:fillRef>
+          <a:effectRef idx="2">
+            <a:schemeClr val="accent1"/>
+          </a:effectRef>
+          <a:fontRef idx="minor">
+            <a:schemeClr val="lt1"/>
+          </a:fontRef>
+        </p:style>
+        <p:txBody>
+          <a:bodyPr rtlCol="0" anchor="ctr"/>
+          <a:lstStyle/>
+          <a:p>
+            <a:pPr algn="ctr"/>
+          </a:p>
+        </p:txBody>
+      </p:sp>
+      <p:sp>
+        <p:nvSpPr>
+          <p:cNvPr id="23" name="Rectangle 22"/>
+          <p:cNvSpPr/>
+          <p:nvPr/>
+        </p:nvSpPr>
+        <p:spPr>
+          <a:xfrm>
+            <a:off x="4283354" y="4119372"/>
+            <a:ext cx="3624986" cy="27432"/>
+          </a:xfrm>
+          <a:prstGeom prst="rect">
+            <a:avLst/>
+          </a:prstGeom>
+          <a:solidFill>
+            <a:srgbClr val="FFD000"/>
+          </a:solidFill>
+          <a:ln>
+            <a:noFill/>
+          </a:ln>
+        </p:spPr>
+        <p:style>
+          <a:lnRef idx="1">
+            <a:schemeClr val="accent1"/>
+          </a:lnRef>
+          <a:fillRef idx="3">
+            <a:schemeClr val="accent1"/>
+          </a:fillRef>
+          <a:effectRef idx="2">
+            <a:schemeClr val="accent1"/>
+          </a:effectRef>
+          <a:fontRef idx="minor">
+            <a:schemeClr val="lt1"/>
+          </a:fontRef>
+        </p:style>
+        <p:txBody>
+          <a:bodyPr rtlCol="0" anchor="ctr"/>
+          <a:lstStyle/>
+          <a:p>
+            <a:pPr algn="ctr"/>
+          </a:p>
+        </p:txBody>
+      </p:sp>
+      <p:pic>
+        <p:nvPicPr>
+          <p:cNvPr id="24" name="Picture 23" descr="examlab.png"/>
+          <p:cNvPicPr>
+            <a:picLocks noChangeAspect="1"/>
+          </p:cNvPicPr>
+          <p:nvPr/>
+        </p:nvPicPr>
+        <p:blipFill>
+          <a:blip r:embed="rId5"/>
+          <a:stretch>
+            <a:fillRect/>
+          </a:stretch>
+        </p:blipFill>
+        <p:spPr>
+          <a:xfrm>
+            <a:off x="5485485" y="4311396"/>
+            <a:ext cx="1220724" cy="1220724"/>
+          </a:xfrm>
+          <a:prstGeom prst="rect">
+            <a:avLst/>
+          </a:prstGeom>
+        </p:spPr>
+      </p:pic>
+      <p:sp>
+        <p:nvSpPr>
+          <p:cNvPr id="25" name="TextBox 24"/>
+          <p:cNvSpPr txBox="1"/>
+          <p:nvPr/>
+        </p:nvSpPr>
+        <p:spPr>
+          <a:xfrm>
+            <a:off x="4356506" y="5623560"/>
+            <a:ext cx="3478682" cy="621792"/>
+          </a:xfrm>
+          <a:prstGeom prst="rect">
+            <a:avLst/>
+          </a:prstGeom>
+          <a:noFill/>
+        </p:spPr>
+        <p:txBody>
+          <a:bodyPr wrap="square" anchor="t"/>
+          <a:lstStyle/>
+          <a:p>
+            <a:pPr algn="ctr"/>
+            <a:r>
+              <a:rPr sz="1300" b="1" i="0">
+                <a:solidFill>
+                  <a:srgbClr val="095292"/>
+                </a:solidFill>
+                <a:latin typeface="Calibri"/>
+              </a:rPr>
+              <a:t>ExamLab</a:t>
+            </a:r>
+          </a:p>
+          <a:p>
+            <a:pPr algn="ctr">
+              <a:spcBef>
+                <a:spcPts val="200"/>
+              </a:spcBef>
             </a:pPr>
             <a:r>
-              <a:rPr sz="1600" b="0" i="0">
-                <a:solidFill>
-                  <a:srgbClr val="333333"/>
-                </a:solidFill>
-                <a:latin typeface="Calibri"/>
-              </a:rPr>
-              <a:t>–   </a:t>
-            </a:r>
-            <a:r>
-              <a:rPr sz="1600" b="1" i="0">
-                <a:solidFill>
-                  <a:srgbClr val="333333"/>
-                </a:solidFill>
-                <a:latin typeface="Calibri"/>
-              </a:rPr>
-              <a:t>4.</a:t>
-            </a:r>
-            <a:r>
-              <a:rPr sz="1600" b="0" i="0">
-                <a:solidFill>
-                  <a:srgbClr val="333333"/>
-                </a:solidFill>
-                <a:latin typeface="Calibri"/>
-              </a:rPr>
-              <a:t> Paso 4: ensayen el pitch con cronometro ANTES de la sesion y registren la tabla de tiempos reales por seccion con quien hablo en cada una, verificando que el tiempo total quede entre 5 y 8 minutos; la sustentacion se hace EN VIVO en la sesion de clase, con preguntas del docente al cierre, no con un video grabado.</a:t>
-            </a:r>
-          </a:p>
-          <a:p>
-            <a:pPr>
-              <a:spcAft>
-                <a:spcPts val="800"/>
-              </a:spcAft>
-            </a:pPr>
-            <a:r>
-              <a:rPr sz="1600" b="0" i="0">
-                <a:solidFill>
-                  <a:srgbClr val="333333"/>
-                </a:solidFill>
-                <a:latin typeface="Calibri"/>
-              </a:rPr>
-              <a:t>–   </a:t>
-            </a:r>
-            <a:r>
-              <a:rPr sz="1600" b="1" i="0">
-                <a:solidFill>
-                  <a:srgbClr val="333333"/>
-                </a:solidFill>
-                <a:latin typeface="Calibri"/>
-              </a:rPr>
-              <a:t>5.</a:t>
-            </a:r>
-            <a:r>
-              <a:rPr sz="1600" b="0" i="0">
-                <a:solidFill>
-                  <a:srgbClr val="333333"/>
-                </a:solidFill>
-                <a:latin typeface="Calibri"/>
-              </a:rPr>
-              <a:t> Paso 5: escriban la reflexion de media pagina sobre el trade-off mas difícil y suban el paquete final completo mas las 5 preguntas a ExamLab (modulo Proyectos) ANTES de su turno de sustentacion, verificando que el informe, los diagramas, la evidencia del lab, el ci.yml y la presentacion esten los cinco dentro del mismo paquete.</a:t>
-            </a:r>
-          </a:p>
-        </p:txBody>
-      </p:sp>
-      <p:sp>
-        <p:nvSpPr>
-          <p:cNvPr id="6" name="TextBox 5"/>
+              <a:rPr sz="1000" b="0" i="0">
+                <a:solidFill>
+                  <a:srgbClr val="666666"/>
+                </a:solidFill>
+                <a:latin typeface="Calibri"/>
+              </a:rPr>
+              <a:t>Donde se entrega</a:t>
+            </a:r>
+          </a:p>
+        </p:txBody>
+      </p:sp>
+      <p:sp>
+        <p:nvSpPr>
+          <p:cNvPr id="26" name="TextBox 25"/>
           <p:cNvSpPr txBox="1"/>
           <p:nvPr/>
         </p:nvSpPr>

--- a/Arquitectura de Sistemas Computacionales/Clases/Clase 15 - Presentacion del proyecto y cierre/Presentacion.pptx
+++ b/Arquitectura de Sistemas Computacionales/Clases/Clase 15 - Presentacion del proyecto y cierre/Presentacion.pptx
@@ -4562,7 +4562,7 @@
               </a:spcAft>
             </a:pPr>
             <a:r>
-              <a:rPr sz="1600" b="1" i="0">
+              <a:rPr sz="1700" b="1" i="0">
                 <a:solidFill>
                   <a:srgbClr val="333333"/>
                 </a:solidFill>
@@ -4571,7 +4571,7 @@
               <a:t>1.</a:t>
             </a:r>
             <a:r>
-              <a:rPr sz="1600" b="0" i="0">
+              <a:rPr sz="1700" b="0" i="0">
                 <a:solidFill>
                   <a:srgbClr val="333333"/>
                 </a:solidFill>
@@ -4587,7 +4587,7 @@
               </a:spcAft>
             </a:pPr>
             <a:r>
-              <a:rPr sz="1600" b="0" i="0">
+              <a:rPr sz="1700" b="0" i="0">
                 <a:solidFill>
                   <a:srgbClr val="333333"/>
                 </a:solidFill>
@@ -4596,7 +4596,7 @@
               <a:t>–   </a:t>
             </a:r>
             <a:r>
-              <a:rPr sz="1600" b="1" i="0">
+              <a:rPr sz="1700" b="1" i="0">
                 <a:solidFill>
                   <a:srgbClr val="333333"/>
                 </a:solidFill>
@@ -4605,7 +4605,7 @@
               <a:t>2.</a:t>
             </a:r>
             <a:r>
-              <a:rPr sz="1600" b="0" i="0">
+              <a:rPr sz="1700" b="0" i="0">
                 <a:solidFill>
                   <a:srgbClr val="333333"/>
                 </a:solidFill>
@@ -4621,7 +4621,7 @@
               </a:spcAft>
             </a:pPr>
             <a:r>
-              <a:rPr sz="1600" b="0" i="0">
+              <a:rPr sz="1700" b="0" i="0">
                 <a:solidFill>
                   <a:srgbClr val="333333"/>
                 </a:solidFill>
@@ -4630,7 +4630,7 @@
               <a:t>–   </a:t>
             </a:r>
             <a:r>
-              <a:rPr sz="1600" b="1" i="0">
+              <a:rPr sz="1700" b="1" i="0">
                 <a:solidFill>
                   <a:srgbClr val="333333"/>
                 </a:solidFill>
@@ -4639,7 +4639,7 @@
               <a:t>3.</a:t>
             </a:r>
             <a:r>
-              <a:rPr sz="1600" b="0" i="0">
+              <a:rPr sz="1700" b="0" i="0">
                 <a:solidFill>
                   <a:srgbClr val="333333"/>
                 </a:solidFill>
@@ -4655,7 +4655,7 @@
               </a:spcAft>
             </a:pPr>
             <a:r>
-              <a:rPr sz="1600" b="0" i="0">
+              <a:rPr sz="1700" b="0" i="0">
                 <a:solidFill>
                   <a:srgbClr val="333333"/>
                 </a:solidFill>
@@ -4664,7 +4664,7 @@
               <a:t>–   </a:t>
             </a:r>
             <a:r>
-              <a:rPr sz="1600" b="1" i="0">
+              <a:rPr sz="1700" b="1" i="0">
                 <a:solidFill>
                   <a:srgbClr val="333333"/>
                 </a:solidFill>
@@ -4673,7 +4673,7 @@
               <a:t>4.</a:t>
             </a:r>
             <a:r>
-              <a:rPr sz="1600" b="0" i="0">
+              <a:rPr sz="1700" b="0" i="0">
                 <a:solidFill>
                   <a:srgbClr val="333333"/>
                 </a:solidFill>
@@ -4689,7 +4689,7 @@
               </a:spcAft>
             </a:pPr>
             <a:r>
-              <a:rPr sz="1600" b="0" i="0">
+              <a:rPr sz="1700" b="0" i="0">
                 <a:solidFill>
                   <a:srgbClr val="333333"/>
                 </a:solidFill>
@@ -4698,7 +4698,7 @@
               <a:t>–   </a:t>
             </a:r>
             <a:r>
-              <a:rPr sz="1600" b="1" i="0">
+              <a:rPr sz="1700" b="1" i="0">
                 <a:solidFill>
                   <a:srgbClr val="333333"/>
                 </a:solidFill>
@@ -4707,7 +4707,7 @@
               <a:t>5.</a:t>
             </a:r>
             <a:r>
-              <a:rPr sz="1600" b="0" i="0">
+              <a:rPr sz="1700" b="0" i="0">
                 <a:solidFill>
                   <a:srgbClr val="333333"/>
                 </a:solidFill>
@@ -5790,7 +5790,7 @@
               </a:spcAft>
             </a:pPr>
             <a:r>
-              <a:rPr sz="1600" b="0" i="0">
+              <a:rPr sz="2000" b="0" i="0">
                 <a:solidFill>
                   <a:srgbClr val="333333"/>
                 </a:solidFill>
@@ -5799,7 +5799,7 @@
               <a:t>–   </a:t>
             </a:r>
             <a:r>
-              <a:rPr sz="1600" b="1" i="0">
+              <a:rPr sz="2000" b="1" i="0">
                 <a:solidFill>
                   <a:srgbClr val="333333"/>
                 </a:solidFill>
@@ -5808,7 +5808,7 @@
               <a:t>0–10</a:t>
             </a:r>
             <a:r>
-              <a:rPr sz="1600" b="0" i="0">
+              <a:rPr sz="2000" b="0" i="0">
                 <a:solidFill>
                   <a:srgbClr val="333333"/>
                 </a:solidFill>
@@ -5824,7 +5824,7 @@
               </a:spcAft>
             </a:pPr>
             <a:r>
-              <a:rPr sz="1600" b="1" i="0">
+              <a:rPr sz="2000" b="1" i="0">
                 <a:solidFill>
                   <a:srgbClr val="333333"/>
                 </a:solidFill>
@@ -5833,7 +5833,7 @@
               <a:t>10–110</a:t>
             </a:r>
             <a:r>
-              <a:rPr sz="1600" b="0" i="0">
+              <a:rPr sz="2000" b="0" i="0">
                 <a:solidFill>
                   <a:srgbClr val="333333"/>
                 </a:solidFill>
@@ -5842,7 +5842,7 @@
               <a:t> Sustentaciones: </a:t>
             </a:r>
             <a:r>
-              <a:rPr sz="1600" b="1" i="0">
+              <a:rPr sz="2000" b="1" i="0">
                 <a:solidFill>
                   <a:srgbClr val="333333"/>
                 </a:solidFill>
@@ -5851,7 +5851,7 @@
               <a:t>6 min de pitch + 2–4 min de Q&amp;A</a:t>
             </a:r>
             <a:r>
-              <a:rPr sz="1600" b="0" i="0">
+              <a:rPr sz="2000" b="0" i="0">
                 <a:solidFill>
                   <a:srgbClr val="333333"/>
                 </a:solidFill>
@@ -5867,7 +5867,7 @@
               </a:spcAft>
             </a:pPr>
             <a:r>
-              <a:rPr sz="1600" b="1" i="0">
+              <a:rPr sz="2000" b="1" i="0">
                 <a:solidFill>
                   <a:srgbClr val="333333"/>
                 </a:solidFill>
@@ -5876,7 +5876,7 @@
               <a:t>110–120</a:t>
             </a:r>
             <a:r>
-              <a:rPr sz="1600" b="0" i="0">
+              <a:rPr sz="2000" b="0" i="0">
                 <a:solidFill>
                   <a:srgbClr val="333333"/>
                 </a:solidFill>
@@ -5892,7 +5892,7 @@
               </a:spcAft>
             </a:pPr>
             <a:r>
-              <a:rPr sz="1600" b="0" i="0">
+              <a:rPr sz="2000" b="0" i="0">
                 <a:solidFill>
                   <a:srgbClr val="333333"/>
                 </a:solidFill>
@@ -5901,7 +5901,7 @@
               <a:t>–   El paquete debe estar </a:t>
             </a:r>
             <a:r>
-              <a:rPr sz="1600" b="1" i="0">
+              <a:rPr sz="2000" b="1" i="0">
                 <a:solidFill>
                   <a:srgbClr val="333333"/>
                 </a:solidFill>
@@ -5910,7 +5910,7 @@
               <a:t>subido a ExamLab antes</a:t>
             </a:r>
             <a:r>
-              <a:rPr sz="1600" b="0" i="0">
+              <a:rPr sz="2000" b="0" i="0">
                 <a:solidFill>
                   <a:srgbClr val="333333"/>
                 </a:solidFill>
@@ -5926,7 +5926,7 @@
               </a:spcAft>
             </a:pPr>
             <a:r>
-              <a:rPr sz="1600" b="0" i="0">
+              <a:rPr sz="2000" b="0" i="0">
                 <a:solidFill>
                   <a:srgbClr val="333333"/>
                 </a:solidFill>
@@ -5935,7 +5935,7 @@
               <a:t>–   Sesión </a:t>
             </a:r>
             <a:r>
-              <a:rPr sz="1600" b="1" i="0">
+              <a:rPr sz="2000" b="1" i="0">
                 <a:solidFill>
                   <a:srgbClr val="333333"/>
                 </a:solidFill>
@@ -5944,7 +5944,7 @@
               <a:t>síncrona</a:t>
             </a:r>
             <a:r>
-              <a:rPr sz="1600" b="0" i="0">
+              <a:rPr sz="2000" b="0" i="0">
                 <a:solidFill>
                   <a:srgbClr val="333333"/>
                 </a:solidFill>
@@ -6164,7 +6164,7 @@
               </a:spcAft>
             </a:pPr>
             <a:r>
-              <a:rPr sz="1600" b="0" i="0">
+              <a:rPr sz="2000" b="0" i="0">
                 <a:solidFill>
                   <a:srgbClr val="333333"/>
                 </a:solidFill>
@@ -6173,7 +6173,7 @@
               <a:t>–   Sustentar </a:t>
             </a:r>
             <a:r>
-              <a:rPr sz="1600" b="1" i="0">
+              <a:rPr sz="2000" b="1" i="0">
                 <a:solidFill>
                   <a:srgbClr val="333333"/>
                 </a:solidFill>
@@ -6182,7 +6182,7 @@
               <a:t>en vivo</a:t>
             </a:r>
             <a:r>
-              <a:rPr sz="1600" b="0" i="0">
+              <a:rPr sz="2000" b="0" i="0">
                 <a:solidFill>
                   <a:srgbClr val="333333"/>
                 </a:solidFill>
@@ -6198,7 +6198,7 @@
               </a:spcAft>
             </a:pPr>
             <a:r>
-              <a:rPr sz="1600" b="0" i="0">
+              <a:rPr sz="2000" b="0" i="0">
                 <a:solidFill>
                   <a:srgbClr val="333333"/>
                 </a:solidFill>
@@ -6207,7 +6207,7 @@
               <a:t>–   Responder </a:t>
             </a:r>
             <a:r>
-              <a:rPr sz="1600" b="1" i="0">
+              <a:rPr sz="2000" b="1" i="0">
                 <a:solidFill>
                   <a:srgbClr val="333333"/>
                 </a:solidFill>
@@ -6216,7 +6216,7 @@
               <a:t>en vivo</a:t>
             </a:r>
             <a:r>
-              <a:rPr sz="1600" b="0" i="0">
+              <a:rPr sz="2000" b="0" i="0">
                 <a:solidFill>
                   <a:srgbClr val="333333"/>
                 </a:solidFill>
@@ -6232,7 +6232,7 @@
               </a:spcAft>
             </a:pPr>
             <a:r>
-              <a:rPr sz="1600" b="0" i="0">
+              <a:rPr sz="2000" b="0" i="0">
                 <a:solidFill>
                   <a:srgbClr val="333333"/>
                 </a:solidFill>
@@ -6452,7 +6452,7 @@
               </a:spcAft>
             </a:pPr>
             <a:r>
-              <a:rPr sz="1600" b="0" i="0">
+              <a:rPr sz="2000" b="0" i="0">
                 <a:solidFill>
                   <a:srgbClr val="333333"/>
                 </a:solidFill>
@@ -6461,7 +6461,7 @@
               <a:t>–   </a:t>
             </a:r>
             <a:r>
-              <a:rPr sz="1600" b="1" i="0">
+              <a:rPr sz="2000" b="1" i="0">
                 <a:solidFill>
                   <a:srgbClr val="333333"/>
                 </a:solidFill>
@@ -6470,7 +6470,7 @@
               <a:t>Entregable:</a:t>
             </a:r>
             <a:r>
-              <a:rPr sz="1600" b="0" i="0">
+              <a:rPr sz="2000" b="0" i="0">
                 <a:solidFill>
                   <a:srgbClr val="333333"/>
                 </a:solidFill>
@@ -6486,7 +6486,7 @@
               </a:spcAft>
             </a:pPr>
             <a:r>
-              <a:rPr sz="1600" b="0" i="0">
+              <a:rPr sz="2000" b="0" i="0">
                 <a:solidFill>
                   <a:srgbClr val="333333"/>
                 </a:solidFill>
@@ -6495,7 +6495,7 @@
               <a:t>–   Herramienta: </a:t>
             </a:r>
             <a:r>
-              <a:rPr sz="1600" b="1" i="0">
+              <a:rPr sz="2000" b="1" i="0">
                 <a:solidFill>
                   <a:srgbClr val="333333"/>
                 </a:solidFill>
@@ -6511,7 +6511,7 @@
               </a:spcAft>
             </a:pPr>
             <a:r>
-              <a:rPr sz="1600" b="0" i="0">
+              <a:rPr sz="2000" b="0" i="0">
                 <a:solidFill>
                   <a:srgbClr val="333333"/>
                 </a:solidFill>
@@ -6520,7 +6520,7 @@
               <a:t>–   Hoy no se construye: se </a:t>
             </a:r>
             <a:r>
-              <a:rPr sz="1600" b="1" i="0">
+              <a:rPr sz="2000" b="1" i="0">
                 <a:solidFill>
                   <a:srgbClr val="333333"/>
                 </a:solidFill>
@@ -6529,7 +6529,7 @@
               <a:t>defiende</a:t>
             </a:r>
             <a:r>
-              <a:rPr sz="1600" b="0" i="0">
+              <a:rPr sz="2000" b="0" i="0">
                 <a:solidFill>
                   <a:srgbClr val="333333"/>
                 </a:solidFill>
@@ -6545,7 +6545,7 @@
               </a:spcAft>
             </a:pPr>
             <a:r>
-              <a:rPr sz="1600" b="0" i="0">
+              <a:rPr sz="2000" b="0" i="0">
                 <a:solidFill>
                   <a:srgbClr val="333333"/>
                 </a:solidFill>
@@ -6765,7 +6765,7 @@
               </a:spcAft>
             </a:pPr>
             <a:r>
-              <a:rPr sz="1600" b="0" i="0">
+              <a:rPr sz="2000" b="0" i="0">
                 <a:solidFill>
                   <a:srgbClr val="333333"/>
                 </a:solidFill>
@@ -6774,7 +6774,7 @@
               <a:t>–   Sustentación </a:t>
             </a:r>
             <a:r>
-              <a:rPr sz="1600" b="1" i="0">
+              <a:rPr sz="2000" b="1" i="0">
                 <a:solidFill>
                   <a:srgbClr val="333333"/>
                 </a:solidFill>
@@ -6783,7 +6783,7 @@
               <a:t>en vivo</a:t>
             </a:r>
             <a:r>
-              <a:rPr sz="1600" b="0" i="0">
+              <a:rPr sz="2000" b="0" i="0">
                 <a:solidFill>
                   <a:srgbClr val="333333"/>
                 </a:solidFill>
@@ -6799,7 +6799,7 @@
               </a:spcAft>
             </a:pPr>
             <a:r>
-              <a:rPr sz="1600" b="0" i="0">
+              <a:rPr sz="2000" b="0" i="0">
                 <a:solidFill>
                   <a:srgbClr val="333333"/>
                 </a:solidFill>
@@ -6808,7 +6808,7 @@
               <a:t>–   Turnos de </a:t>
             </a:r>
             <a:r>
-              <a:rPr sz="1600" b="1" i="0">
+              <a:rPr sz="2000" b="1" i="0">
                 <a:solidFill>
                   <a:srgbClr val="333333"/>
                 </a:solidFill>
@@ -6817,7 +6817,7 @@
               <a:t>6 min de pitch + 2–4 min de Q&amp;A</a:t>
             </a:r>
             <a:r>
-              <a:rPr sz="1600" b="0" i="0">
+              <a:rPr sz="2000" b="0" i="0">
                 <a:solidFill>
                   <a:srgbClr val="333333"/>
                 </a:solidFill>
@@ -6833,7 +6833,7 @@
               </a:spcAft>
             </a:pPr>
             <a:r>
-              <a:rPr sz="1600" b="0" i="0">
+              <a:rPr sz="2000" b="0" i="0">
                 <a:solidFill>
                   <a:srgbClr val="333333"/>
                 </a:solidFill>
@@ -6842,7 +6842,7 @@
               <a:t>–   Ten el paquete ya subido a ExamLab </a:t>
             </a:r>
             <a:r>
-              <a:rPr sz="1600" b="1" i="0">
+              <a:rPr sz="2000" b="1" i="0">
                 <a:solidFill>
                   <a:srgbClr val="333333"/>
                 </a:solidFill>
@@ -6851,7 +6851,7 @@
               <a:t>antes</a:t>
             </a:r>
             <a:r>
-              <a:rPr sz="1600" b="0" i="0">
+              <a:rPr sz="2000" b="0" i="0">
                 <a:solidFill>
                   <a:srgbClr val="333333"/>
                 </a:solidFill>
@@ -6867,7 +6867,7 @@
               </a:spcAft>
             </a:pPr>
             <a:r>
-              <a:rPr sz="1600" b="0" i="0">
+              <a:rPr sz="2000" b="0" i="0">
                 <a:solidFill>
                   <a:srgbClr val="333333"/>
                 </a:solidFill>
@@ -7087,7 +7087,7 @@
               </a:spcAft>
             </a:pPr>
             <a:r>
-              <a:rPr sz="1600" b="0" i="0">
+              <a:rPr sz="2000" b="0" i="0">
                 <a:solidFill>
                   <a:srgbClr val="333333"/>
                 </a:solidFill>
@@ -7103,7 +7103,7 @@
               </a:spcAft>
             </a:pPr>
             <a:r>
-              <a:rPr sz="1600" b="0" i="0">
+              <a:rPr sz="2000" b="0" i="0">
                 <a:solidFill>
                   <a:srgbClr val="333333"/>
                 </a:solidFill>
@@ -7323,7 +7323,7 @@
               </a:spcAft>
             </a:pPr>
             <a:r>
-              <a:rPr sz="1600" b="0" i="0">
+              <a:rPr sz="2000" b="0" i="0">
                 <a:solidFill>
                   <a:srgbClr val="333333"/>
                 </a:solidFill>
@@ -7339,7 +7339,7 @@
               </a:spcAft>
             </a:pPr>
             <a:r>
-              <a:rPr sz="1600" b="0" i="0">
+              <a:rPr sz="2000" b="0" i="0">
                 <a:solidFill>
                   <a:srgbClr val="333333"/>
                 </a:solidFill>
@@ -7559,7 +7559,7 @@
               </a:spcAft>
             </a:pPr>
             <a:r>
-              <a:rPr sz="1600" b="0" i="0">
+              <a:rPr sz="2000" b="0" i="0">
                 <a:solidFill>
                   <a:srgbClr val="333333"/>
                 </a:solidFill>
@@ -7575,7 +7575,7 @@
               </a:spcAft>
             </a:pPr>
             <a:r>
-              <a:rPr sz="1600" b="0" i="0">
+              <a:rPr sz="2000" b="0" i="0">
                 <a:solidFill>
                   <a:srgbClr val="333333"/>
                 </a:solidFill>

--- a/Arquitectura de Sistemas Computacionales/Clases/Clase 15 - Presentacion del proyecto y cierre/Presentacion.pptx
+++ b/Arquitectura de Sistemas Computacionales/Clases/Clase 15 - Presentacion del proyecto y cierre/Presentacion.pptx
@@ -3413,7 +3413,7 @@
                 </a:solidFill>
                 <a:latin typeface="Calibri"/>
               </a:rPr>
-              <a:t>Paquete subido a ExamLab </a:t>
+              <a:t>Paquete subido a la plataforma del curso </a:t>
             </a:r>
             <a:r>
               <a:rPr sz="1500" b="1" i="0">
@@ -3630,7 +3630,7 @@
                 </a:solidFill>
                 <a:latin typeface="Calibri"/>
               </a:rPr>
-              <a:t>Del boceto a ExamLab (diagrama)</a:t>
+              <a:t>Del boceto a la plataforma del curso (diagrama)</a:t>
             </a:r>
           </a:p>
         </p:txBody>
@@ -3664,7 +3664,7 @@
                 </a:solidFill>
                 <a:latin typeface="Calibri"/>
               </a:rPr>
-              <a:t>El diagrama se entrega como código Mermaid dentro de ExamLab, no como imagen</a:t>
+              <a:t>El diagrama se entrega como código Mermaid dentro de la plataforma del curso, no como imagen</a:t>
             </a:r>
           </a:p>
         </p:txBody>
@@ -4161,7 +4161,7 @@
                 </a:solidFill>
                 <a:latin typeface="Calibri"/>
               </a:rPr>
-              <a:t>Pega y renderiza en ExamLab</a:t>
+              <a:t>Pega y renderiza en la plataforma del curso</a:t>
             </a:r>
           </a:p>
           <a:p>
@@ -4177,7 +4177,7 @@
                 </a:solidFill>
                 <a:latin typeface="Calibri"/>
               </a:rPr>
-              <a:t>Pega ese codigo en la caja de texto de la pregunta y mira como lo dibuja la plataforma. Si no renderiza, corrige ahi mismo: lo que se califica es el diagrama renderizado dentro de ExamLab.</a:t>
+              <a:t>Pega ese codigo en la caja de texto de la pregunta y mira como lo dibuja la plataforma. Si no renderiza, corrige ahi mismo: lo que se califica es el diagrama renderizado dentro de la plataforma del curso.</a:t>
             </a:r>
           </a:p>
         </p:txBody>
@@ -4611,7 +4611,7 @@
                 </a:solidFill>
                 <a:latin typeface="Calibri"/>
               </a:rPr>
-              <a:t> Paso 2: escriban en ExamLab la lamina unica de arquitectura en Mermaid con las 3 zonas, los 5 contenedores, el edge, la cadena de entrega y los sistemas externos, verificando al renderizar que sea legible en una sola pantalla sin desplazamiento y que use los mismos nombres canonicos del paquete, porque esta es la lamina que van a proyectar en la sustentacion.</a:t>
+              <a:t> Paso 2: escriban en la plataforma del curso la lamina unica de arquitectura en Mermaid con las 3 zonas, los 5 contenedores, el edge, la cadena de entrega y los sistemas externos, verificando al renderizar que sea legible en una sola pantalla sin desplazamiento y que use los mismos nombres canonicos del paquete, porque esta es la lamina que van a proyectar en la sustentacion.</a:t>
             </a:r>
           </a:p>
           <a:p>
@@ -4713,7 +4713,7 @@
                 </a:solidFill>
                 <a:latin typeface="Calibri"/>
               </a:rPr>
-              <a:t> Paso 5: escriban la reflexion de media pagina sobre el trade-off mas difícil y suban el paquete final completo mas las 5 preguntas a ExamLab (modulo Proyectos) ANTES de su turno de sustentacion, verificando que el informe, los diagramas, la evidencia del lab, el ci.yml y la presentacion esten los cinco dentro del mismo paquete.</a:t>
+              <a:t> Paso 5: escriban la reflexion de media pagina sobre el trade-off mas difícil y suban el paquete final completo mas las 5 preguntas a la plataforma del curso (modulo Proyectos) ANTES de su turno de sustentacion, verificando que el informe, los diagramas, la evidencia del lab, el ci.yml y la presentacion esten los cinco dentro del mismo paquete.</a:t>
             </a:r>
           </a:p>
         </p:txBody>
@@ -5032,7 +5032,7 @@
                 </a:solidFill>
                 <a:latin typeface="Calibri"/>
               </a:rPr>
-              <a:t>Entregable: Paquete final en ExamLab (módulo Proyectos) + pitch de 5–8 min sustentado hoy en clase + Q&amp;A</a:t>
+              <a:t>Entregable: Paquete final en la plataforma del curso (módulo Proyectos) + pitch de 5–8 min sustentado hoy en clase + Q&amp;A</a:t>
             </a:r>
           </a:p>
         </p:txBody>
@@ -5170,7 +5170,7 @@
                 </a:solidFill>
                 <a:latin typeface="Calibri"/>
               </a:rPr>
-              <a:t>El paquete se sube a ExamLab (https://uniaj.examlab.workers.dev/ · módulo Proyectos) </a:t>
+              <a:t>El paquete se sube a la plataforma del curso </a:t>
             </a:r>
             <a:r>
               <a:rPr sz="1400" b="1" i="0">
@@ -5560,7 +5560,7 @@
                 </a:solidFill>
                 <a:latin typeface="Calibri"/>
               </a:rPr>
-              <a:t>Evidencia: Paquete final en ExamLab (módulo Proyectos) + pitch de 5–8 min sustentado hoy en clase + Q&amp;A</a:t>
+              <a:t>Evidencia: Paquete final en la plataforma del curso (módulo Proyectos) + pitch de 5–8 min sustentado hoy en clase + Q&amp;A</a:t>
             </a:r>
           </a:p>
           <a:p>
@@ -5907,7 +5907,7 @@
                 </a:solidFill>
                 <a:latin typeface="Calibri"/>
               </a:rPr>
-              <a:t>subido a ExamLab antes</a:t>
+              <a:t>subido a la plataforma del curso antes</a:t>
             </a:r>
             <a:r>
               <a:rPr sz="2000" b="0" i="0">
@@ -6476,7 +6476,7 @@
                 </a:solidFill>
                 <a:latin typeface="Calibri"/>
               </a:rPr>
-              <a:t> Paquete final en ExamLab (módulo Proyectos) + pitch de 5–8 min sustentado hoy en clase + Q&amp;A</a:t>
+              <a:t> Paquete final en la plataforma del curso (módulo Proyectos) + pitch de 5–8 min sustentado hoy en clase + Q&amp;A</a:t>
             </a:r>
           </a:p>
           <a:p>
@@ -6551,7 +6551,7 @@
                 </a:solidFill>
                 <a:latin typeface="Calibri"/>
               </a:rPr>
-              <a:t>–   Individual por defecto · el docente puede autorizar equipos de 2–3; la entrega en ExamLab siempre es individual.</a:t>
+              <a:t>–   Individual por defecto · el docente puede autorizar equipos de 2–3; la entrega en la plataforma del curso siempre es individual.</a:t>
             </a:r>
           </a:p>
         </p:txBody>
@@ -6839,7 +6839,7 @@
                 </a:solidFill>
                 <a:latin typeface="Calibri"/>
               </a:rPr>
-              <a:t>–   Ten el paquete ya subido a ExamLab </a:t>
+              <a:t>–   Ten el paquete ya subido a la plataforma del curso </a:t>
             </a:r>
             <a:r>
               <a:rPr sz="2000" b="1" i="0">
@@ -8596,7 +8596,7 @@
                 </a:solidFill>
                 <a:latin typeface="Calibri"/>
               </a:rPr>
-              <a:t>ExamLab</a:t>
+              <a:t>la plataforma del curso</a:t>
             </a:r>
           </a:p>
           <a:p>

--- a/Arquitectura de Sistemas Computacionales/Clases/Clase 15 - Presentacion del proyecto y cierre/Presentacion.pptx
+++ b/Arquitectura de Sistemas Computacionales/Clases/Clase 15 - Presentacion del proyecto y cierre/Presentacion.pptx
@@ -3524,7 +3524,7 @@
         <p:spPr>
           <a:xfrm>
             <a:off x="0" y="0"/>
-            <a:ext cx="12191695" cy="1170432"/>
+            <a:ext cx="12191695" cy="960120"/>
           </a:xfrm>
           <a:prstGeom prst="rect">
             <a:avLst/>
@@ -3566,7 +3566,7 @@
         </p:nvSpPr>
         <p:spPr>
           <a:xfrm>
-            <a:off x="0" y="1170432"/>
+            <a:off x="0" y="960120"/>
             <a:ext cx="12191695" cy="41148"/>
           </a:xfrm>
           <a:prstGeom prst="rect">
@@ -3610,7 +3610,7 @@
         <p:spPr>
           <a:xfrm>
             <a:off x="457200" y="164592"/>
-            <a:ext cx="11277295" cy="384048"/>
+            <a:ext cx="11277295" cy="502920"/>
           </a:xfrm>
           <a:prstGeom prst="rect">
             <a:avLst/>
@@ -3630,7 +3630,7 @@
                 </a:solidFill>
                 <a:latin typeface="Calibri"/>
               </a:rPr>
-              <a:t>Del boceto a la plataforma del curso (diagrama)</a:t>
+              <a:t>PI CloudLite — entregable de hoy</a:t>
             </a:r>
           </a:p>
         </p:txBody>
@@ -3643,8 +3643,8 @@
         </p:nvSpPr>
         <p:spPr>
           <a:xfrm>
-            <a:off x="457200" y="566928"/>
-            <a:ext cx="11277295" cy="411480"/>
+            <a:off x="457200" y="1170432"/>
+            <a:ext cx="11277295" cy="5230368"/>
           </a:xfrm>
           <a:prstGeom prst="rect">
             <a:avLst/>
@@ -3657,705 +3657,119 @@
           </a:bodyPr>
           <a:lstStyle/>
           <a:p>
-            <a:r>
-              <a:rPr sz="1400" b="0" i="0">
-                <a:solidFill>
-                  <a:srgbClr val="B8D8EE"/>
-                </a:solidFill>
-                <a:latin typeface="Calibri"/>
-              </a:rPr>
-              <a:t>El diagrama se entrega como código Mermaid dentro de la plataforma del curso, no como imagen</a:t>
-            </a:r>
-          </a:p>
-        </p:txBody>
-      </p:sp>
-      <p:sp>
-        <p:nvSpPr>
-          <p:cNvPr id="6" name="Rounded Rectangle 5"/>
-          <p:cNvSpPr/>
-          <p:nvPr/>
-        </p:nvSpPr>
-        <p:spPr>
-          <a:xfrm>
-            <a:off x="457200" y="1659636"/>
-            <a:ext cx="11277295" cy="1051560"/>
-          </a:xfrm>
-          <a:prstGeom prst="roundRect">
-            <a:avLst>
-              <a:gd name="adj" fmla="val 12000"/>
-            </a:avLst>
-          </a:prstGeom>
-          <a:solidFill>
-            <a:srgbClr val="F2F2F2"/>
-          </a:solidFill>
-          <a:ln>
-            <a:noFill/>
-          </a:ln>
-        </p:spPr>
-        <p:style>
-          <a:lnRef idx="1">
-            <a:schemeClr val="accent1"/>
-          </a:lnRef>
-          <a:fillRef idx="3">
-            <a:schemeClr val="accent1"/>
-          </a:fillRef>
-          <a:effectRef idx="2">
-            <a:schemeClr val="accent1"/>
-          </a:effectRef>
-          <a:fontRef idx="minor">
-            <a:schemeClr val="lt1"/>
-          </a:fontRef>
-        </p:style>
-        <p:txBody>
-          <a:bodyPr rtlCol="0" anchor="ctr"/>
-          <a:lstStyle/>
-          <a:p>
-            <a:pPr algn="ctr"/>
-          </a:p>
-        </p:txBody>
-      </p:sp>
-      <p:sp>
-        <p:nvSpPr>
-          <p:cNvPr id="7" name="Rounded Rectangle 6"/>
-          <p:cNvSpPr/>
-          <p:nvPr/>
-        </p:nvSpPr>
-        <p:spPr>
-          <a:xfrm>
-            <a:off x="594360" y="1965960"/>
-            <a:ext cx="438912" cy="438912"/>
-          </a:xfrm>
-          <a:prstGeom prst="roundRect">
-            <a:avLst>
-              <a:gd name="adj" fmla="val 12000"/>
-            </a:avLst>
-          </a:prstGeom>
-          <a:solidFill>
-            <a:srgbClr val="095292"/>
-          </a:solidFill>
-          <a:ln>
-            <a:noFill/>
-          </a:ln>
-        </p:spPr>
-        <p:style>
-          <a:lnRef idx="1">
-            <a:schemeClr val="accent1"/>
-          </a:lnRef>
-          <a:fillRef idx="3">
-            <a:schemeClr val="accent1"/>
-          </a:fillRef>
-          <a:effectRef idx="2">
-            <a:schemeClr val="accent1"/>
-          </a:effectRef>
-          <a:fontRef idx="minor">
-            <a:schemeClr val="lt1"/>
-          </a:fontRef>
-        </p:style>
-        <p:txBody>
-          <a:bodyPr rtlCol="0" anchor="ctr"/>
-          <a:lstStyle/>
-          <a:p>
-            <a:pPr algn="ctr"/>
-          </a:p>
-        </p:txBody>
-      </p:sp>
-      <p:sp>
-        <p:nvSpPr>
-          <p:cNvPr id="8" name="TextBox 7"/>
-          <p:cNvSpPr txBox="1"/>
-          <p:nvPr/>
-        </p:nvSpPr>
-        <p:spPr>
-          <a:xfrm>
-            <a:off x="594360" y="1965960"/>
-            <a:ext cx="438912" cy="438912"/>
-          </a:xfrm>
-          <a:prstGeom prst="rect">
-            <a:avLst/>
-          </a:prstGeom>
-          <a:noFill/>
-        </p:spPr>
-        <p:txBody>
-          <a:bodyPr wrap="square" anchor="ctr"/>
-          <a:lstStyle/>
-          <a:p>
-            <a:pPr algn="ctr"/>
-            <a:r>
-              <a:rPr sz="1600" b="1" i="0">
-                <a:solidFill>
-                  <a:srgbClr val="FFFFFF"/>
-                </a:solidFill>
-                <a:latin typeface="Calibri"/>
-              </a:rPr>
-              <a:t>1</a:t>
-            </a:r>
-          </a:p>
-        </p:txBody>
-      </p:sp>
-      <p:sp>
-        <p:nvSpPr>
-          <p:cNvPr id="9" name="TextBox 8"/>
-          <p:cNvSpPr txBox="1"/>
-          <p:nvPr/>
-        </p:nvSpPr>
-        <p:spPr>
-          <a:xfrm>
-            <a:off x="1188720" y="1751076"/>
-            <a:ext cx="10271455" cy="886968"/>
-          </a:xfrm>
-          <a:prstGeom prst="rect">
-            <a:avLst/>
-          </a:prstGeom>
-          <a:noFill/>
-        </p:spPr>
-        <p:txBody>
-          <a:bodyPr wrap="square" anchor="ctr"/>
-          <a:lstStyle/>
-          <a:p>
-            <a:r>
-              <a:rPr sz="1500" b="1" i="0">
-                <a:solidFill>
-                  <a:srgbClr val="095292"/>
-                </a:solidFill>
-                <a:latin typeface="Calibri"/>
-              </a:rPr>
-              <a:t>Disena visual</a:t>
-            </a:r>
-          </a:p>
-          <a:p>
             <a:pPr>
-              <a:spcBef>
-                <a:spcPts val="200"/>
-              </a:spcBef>
+              <a:spcAft>
+                <a:spcPts val="800"/>
+              </a:spcAft>
             </a:pPr>
             <a:r>
-              <a:rPr sz="1300" b="0" i="0">
+              <a:rPr sz="2000" b="0" i="0">
                 <a:solidFill>
                   <a:srgbClr val="333333"/>
                 </a:solidFill>
                 <a:latin typeface="Calibri"/>
               </a:rPr>
-              <a:t>Dibuja el diagrama como quieras en Excalidraw o draw.io: es mas rapido arrastrar cajas que escribir codigo, y ahi es donde piensas el modelo.</a:t>
-            </a:r>
-          </a:p>
-        </p:txBody>
-      </p:sp>
-      <p:sp>
-        <p:nvSpPr>
-          <p:cNvPr id="10" name="Rounded Rectangle 9"/>
-          <p:cNvSpPr/>
-          <p:nvPr/>
-        </p:nvSpPr>
-        <p:spPr>
-          <a:xfrm>
-            <a:off x="457200" y="2802636"/>
-            <a:ext cx="11277295" cy="1051560"/>
-          </a:xfrm>
-          <a:prstGeom prst="roundRect">
-            <a:avLst>
-              <a:gd name="adj" fmla="val 12000"/>
-            </a:avLst>
-          </a:prstGeom>
-          <a:solidFill>
-            <a:srgbClr val="E8F4FA"/>
-          </a:solidFill>
-          <a:ln>
-            <a:noFill/>
-          </a:ln>
-        </p:spPr>
-        <p:style>
-          <a:lnRef idx="1">
-            <a:schemeClr val="accent1"/>
-          </a:lnRef>
-          <a:fillRef idx="3">
-            <a:schemeClr val="accent1"/>
-          </a:fillRef>
-          <a:effectRef idx="2">
-            <a:schemeClr val="accent1"/>
-          </a:effectRef>
-          <a:fontRef idx="minor">
-            <a:schemeClr val="lt1"/>
-          </a:fontRef>
-        </p:style>
-        <p:txBody>
-          <a:bodyPr rtlCol="0" anchor="ctr"/>
-          <a:lstStyle/>
-          <a:p>
-            <a:pPr algn="ctr"/>
-          </a:p>
-        </p:txBody>
-      </p:sp>
-      <p:sp>
-        <p:nvSpPr>
-          <p:cNvPr id="11" name="Rounded Rectangle 10"/>
-          <p:cNvSpPr/>
-          <p:nvPr/>
-        </p:nvSpPr>
-        <p:spPr>
-          <a:xfrm>
-            <a:off x="594360" y="3108960"/>
-            <a:ext cx="438912" cy="438912"/>
-          </a:xfrm>
-          <a:prstGeom prst="roundRect">
-            <a:avLst>
-              <a:gd name="adj" fmla="val 12000"/>
-            </a:avLst>
-          </a:prstGeom>
-          <a:solidFill>
-            <a:srgbClr val="095292"/>
-          </a:solidFill>
-          <a:ln>
-            <a:noFill/>
-          </a:ln>
-        </p:spPr>
-        <p:style>
-          <a:lnRef idx="1">
-            <a:schemeClr val="accent1"/>
-          </a:lnRef>
-          <a:fillRef idx="3">
-            <a:schemeClr val="accent1"/>
-          </a:fillRef>
-          <a:effectRef idx="2">
-            <a:schemeClr val="accent1"/>
-          </a:effectRef>
-          <a:fontRef idx="minor">
-            <a:schemeClr val="lt1"/>
-          </a:fontRef>
-        </p:style>
-        <p:txBody>
-          <a:bodyPr rtlCol="0" anchor="ctr"/>
-          <a:lstStyle/>
-          <a:p>
-            <a:pPr algn="ctr"/>
-          </a:p>
-        </p:txBody>
-      </p:sp>
-      <p:sp>
-        <p:nvSpPr>
-          <p:cNvPr id="12" name="TextBox 11"/>
-          <p:cNvSpPr txBox="1"/>
-          <p:nvPr/>
-        </p:nvSpPr>
-        <p:spPr>
-          <a:xfrm>
-            <a:off x="594360" y="3108960"/>
-            <a:ext cx="438912" cy="438912"/>
-          </a:xfrm>
-          <a:prstGeom prst="rect">
-            <a:avLst/>
-          </a:prstGeom>
-          <a:noFill/>
-        </p:spPr>
-        <p:txBody>
-          <a:bodyPr wrap="square" anchor="ctr"/>
-          <a:lstStyle/>
-          <a:p>
-            <a:pPr algn="ctr"/>
-            <a:r>
-              <a:rPr sz="1600" b="1" i="0">
-                <a:solidFill>
-                  <a:srgbClr val="FFFFFF"/>
-                </a:solidFill>
-                <a:latin typeface="Calibri"/>
-              </a:rPr>
-              <a:t>2</a:t>
-            </a:r>
-          </a:p>
-        </p:txBody>
-      </p:sp>
-      <p:sp>
-        <p:nvSpPr>
-          <p:cNvPr id="13" name="TextBox 12"/>
-          <p:cNvSpPr txBox="1"/>
-          <p:nvPr/>
-        </p:nvSpPr>
-        <p:spPr>
-          <a:xfrm>
-            <a:off x="1188720" y="2894076"/>
-            <a:ext cx="10271455" cy="886968"/>
-          </a:xfrm>
-          <a:prstGeom prst="rect">
-            <a:avLst/>
-          </a:prstGeom>
-          <a:noFill/>
-        </p:spPr>
-        <p:txBody>
-          <a:bodyPr wrap="square" anchor="ctr"/>
-          <a:lstStyle/>
-          <a:p>
-            <a:r>
-              <a:rPr sz="1500" b="1" i="0">
-                <a:solidFill>
-                  <a:srgbClr val="095292"/>
-                </a:solidFill>
-                <a:latin typeface="Calibri"/>
-              </a:rPr>
-              <a:t>Traduce con IA</a:t>
+              <a:t>–   </a:t>
+            </a:r>
+            <a:r>
+              <a:rPr sz="2000" b="1" i="0">
+                <a:solidFill>
+                  <a:srgbClr val="333333"/>
+                </a:solidFill>
+                <a:latin typeface="Calibri"/>
+              </a:rPr>
+              <a:t>Entregable:</a:t>
+            </a:r>
+            <a:r>
+              <a:rPr sz="2000" b="0" i="0">
+                <a:solidFill>
+                  <a:srgbClr val="333333"/>
+                </a:solidFill>
+                <a:latin typeface="Calibri"/>
+              </a:rPr>
+              <a:t> Paquete final en la plataforma del curso (módulo Proyectos) + pitch de 5–8 min sustentado hoy en clase + Q&amp;A</a:t>
             </a:r>
           </a:p>
           <a:p>
             <a:pPr>
-              <a:spcBef>
-                <a:spcPts val="200"/>
-              </a:spcBef>
+              <a:spcAft>
+                <a:spcPts val="800"/>
+              </a:spcAft>
             </a:pPr>
             <a:r>
-              <a:rPr sz="1300" b="0" i="0">
+              <a:rPr sz="2000" b="0" i="0">
                 <a:solidFill>
                   <a:srgbClr val="333333"/>
                 </a:solidFill>
                 <a:latin typeface="Calibri"/>
               </a:rPr>
-              <a:t>Copia o describe tu boceto a una IA y pidele el codigo Mermaid: «convierte este diagrama a Mermaid usando flowchart». Revisa el resultado: la IA acierta la sintaxis, no tu modelo.</a:t>
-            </a:r>
-          </a:p>
-        </p:txBody>
-      </p:sp>
-      <p:sp>
-        <p:nvSpPr>
-          <p:cNvPr id="14" name="Rounded Rectangle 13"/>
-          <p:cNvSpPr/>
-          <p:nvPr/>
-        </p:nvSpPr>
-        <p:spPr>
-          <a:xfrm>
-            <a:off x="457200" y="3945636"/>
-            <a:ext cx="11277295" cy="1051560"/>
-          </a:xfrm>
-          <a:prstGeom prst="roundRect">
-            <a:avLst>
-              <a:gd name="adj" fmla="val 12000"/>
-            </a:avLst>
-          </a:prstGeom>
-          <a:solidFill>
-            <a:srgbClr val="F2F2F2"/>
-          </a:solidFill>
-          <a:ln>
-            <a:noFill/>
-          </a:ln>
-        </p:spPr>
-        <p:style>
-          <a:lnRef idx="1">
-            <a:schemeClr val="accent1"/>
-          </a:lnRef>
-          <a:fillRef idx="3">
-            <a:schemeClr val="accent1"/>
-          </a:fillRef>
-          <a:effectRef idx="2">
-            <a:schemeClr val="accent1"/>
-          </a:effectRef>
-          <a:fontRef idx="minor">
-            <a:schemeClr val="lt1"/>
-          </a:fontRef>
-        </p:style>
-        <p:txBody>
-          <a:bodyPr rtlCol="0" anchor="ctr"/>
-          <a:lstStyle/>
-          <a:p>
-            <a:pPr algn="ctr"/>
-          </a:p>
-        </p:txBody>
-      </p:sp>
-      <p:sp>
-        <p:nvSpPr>
-          <p:cNvPr id="15" name="Rounded Rectangle 14"/>
-          <p:cNvSpPr/>
-          <p:nvPr/>
-        </p:nvSpPr>
-        <p:spPr>
-          <a:xfrm>
-            <a:off x="594360" y="4251960"/>
-            <a:ext cx="438912" cy="438912"/>
-          </a:xfrm>
-          <a:prstGeom prst="roundRect">
-            <a:avLst>
-              <a:gd name="adj" fmla="val 12000"/>
-            </a:avLst>
-          </a:prstGeom>
-          <a:solidFill>
-            <a:srgbClr val="095292"/>
-          </a:solidFill>
-          <a:ln>
-            <a:noFill/>
-          </a:ln>
-        </p:spPr>
-        <p:style>
-          <a:lnRef idx="1">
-            <a:schemeClr val="accent1"/>
-          </a:lnRef>
-          <a:fillRef idx="3">
-            <a:schemeClr val="accent1"/>
-          </a:fillRef>
-          <a:effectRef idx="2">
-            <a:schemeClr val="accent1"/>
-          </a:effectRef>
-          <a:fontRef idx="minor">
-            <a:schemeClr val="lt1"/>
-          </a:fontRef>
-        </p:style>
-        <p:txBody>
-          <a:bodyPr rtlCol="0" anchor="ctr"/>
-          <a:lstStyle/>
-          <a:p>
-            <a:pPr algn="ctr"/>
-          </a:p>
-        </p:txBody>
-      </p:sp>
-      <p:sp>
-        <p:nvSpPr>
-          <p:cNvPr id="16" name="TextBox 15"/>
-          <p:cNvSpPr txBox="1"/>
-          <p:nvPr/>
-        </p:nvSpPr>
-        <p:spPr>
-          <a:xfrm>
-            <a:off x="594360" y="4251960"/>
-            <a:ext cx="438912" cy="438912"/>
-          </a:xfrm>
-          <a:prstGeom prst="rect">
-            <a:avLst/>
-          </a:prstGeom>
-          <a:noFill/>
-        </p:spPr>
-        <p:txBody>
-          <a:bodyPr wrap="square" anchor="ctr"/>
-          <a:lstStyle/>
-          <a:p>
-            <a:pPr algn="ctr"/>
-            <a:r>
-              <a:rPr sz="1600" b="1" i="0">
-                <a:solidFill>
-                  <a:srgbClr val="FFFFFF"/>
-                </a:solidFill>
-                <a:latin typeface="Calibri"/>
-              </a:rPr>
-              <a:t>3</a:t>
-            </a:r>
-          </a:p>
-        </p:txBody>
-      </p:sp>
-      <p:sp>
-        <p:nvSpPr>
-          <p:cNvPr id="17" name="TextBox 16"/>
-          <p:cNvSpPr txBox="1"/>
-          <p:nvPr/>
-        </p:nvSpPr>
-        <p:spPr>
-          <a:xfrm>
-            <a:off x="1188720" y="4037076"/>
-            <a:ext cx="10271455" cy="886968"/>
-          </a:xfrm>
-          <a:prstGeom prst="rect">
-            <a:avLst/>
-          </a:prstGeom>
-          <a:noFill/>
-        </p:spPr>
-        <p:txBody>
-          <a:bodyPr wrap="square" anchor="ctr"/>
-          <a:lstStyle/>
-          <a:p>
-            <a:r>
-              <a:rPr sz="1500" b="1" i="0">
-                <a:solidFill>
-                  <a:srgbClr val="095292"/>
-                </a:solidFill>
-                <a:latin typeface="Calibri"/>
-              </a:rPr>
-              <a:t>Pega y renderiza en la plataforma del curso</a:t>
+              <a:t>–   Herramienta: </a:t>
+            </a:r>
+            <a:r>
+              <a:rPr sz="2000" b="1" i="0">
+                <a:solidFill>
+                  <a:srgbClr val="333333"/>
+                </a:solidFill>
+                <a:latin typeface="Calibri"/>
+              </a:rPr>
+              <a:t>Google Docs/Slides · diagramas · capturas lab</a:t>
             </a:r>
           </a:p>
           <a:p>
             <a:pPr>
-              <a:spcBef>
-                <a:spcPts val="200"/>
-              </a:spcBef>
+              <a:spcAft>
+                <a:spcPts val="800"/>
+              </a:spcAft>
             </a:pPr>
             <a:r>
-              <a:rPr sz="1300" b="0" i="0">
+              <a:rPr sz="2000" b="0" i="0">
                 <a:solidFill>
                   <a:srgbClr val="333333"/>
                 </a:solidFill>
                 <a:latin typeface="Calibri"/>
               </a:rPr>
-              <a:t>Pega ese codigo en la caja de texto de la pregunta y mira como lo dibuja la plataforma. Si no renderiza, corrige ahi mismo: lo que se califica es el diagrama renderizado dentro de la plataforma del curso.</a:t>
-            </a:r>
-          </a:p>
-        </p:txBody>
-      </p:sp>
-      <p:sp>
-        <p:nvSpPr>
-          <p:cNvPr id="18" name="Rounded Rectangle 17"/>
-          <p:cNvSpPr/>
-          <p:nvPr/>
-        </p:nvSpPr>
-        <p:spPr>
-          <a:xfrm>
-            <a:off x="457200" y="5088636"/>
-            <a:ext cx="11277295" cy="1051560"/>
-          </a:xfrm>
-          <a:prstGeom prst="roundRect">
-            <a:avLst>
-              <a:gd name="adj" fmla="val 12000"/>
-            </a:avLst>
-          </a:prstGeom>
-          <a:solidFill>
-            <a:srgbClr val="E8F4FA"/>
-          </a:solidFill>
-          <a:ln>
-            <a:noFill/>
-          </a:ln>
-        </p:spPr>
-        <p:style>
-          <a:lnRef idx="1">
-            <a:schemeClr val="accent1"/>
-          </a:lnRef>
-          <a:fillRef idx="3">
-            <a:schemeClr val="accent1"/>
-          </a:fillRef>
-          <a:effectRef idx="2">
-            <a:schemeClr val="accent1"/>
-          </a:effectRef>
-          <a:fontRef idx="minor">
-            <a:schemeClr val="lt1"/>
-          </a:fontRef>
-        </p:style>
-        <p:txBody>
-          <a:bodyPr rtlCol="0" anchor="ctr"/>
-          <a:lstStyle/>
-          <a:p>
-            <a:pPr algn="ctr"/>
-          </a:p>
-        </p:txBody>
-      </p:sp>
-      <p:sp>
-        <p:nvSpPr>
-          <p:cNvPr id="19" name="Rounded Rectangle 18"/>
-          <p:cNvSpPr/>
-          <p:nvPr/>
-        </p:nvSpPr>
-        <p:spPr>
-          <a:xfrm>
-            <a:off x="594360" y="5394960"/>
-            <a:ext cx="438912" cy="438912"/>
-          </a:xfrm>
-          <a:prstGeom prst="roundRect">
-            <a:avLst>
-              <a:gd name="adj" fmla="val 12000"/>
-            </a:avLst>
-          </a:prstGeom>
-          <a:solidFill>
-            <a:srgbClr val="095292"/>
-          </a:solidFill>
-          <a:ln>
-            <a:noFill/>
-          </a:ln>
-        </p:spPr>
-        <p:style>
-          <a:lnRef idx="1">
-            <a:schemeClr val="accent1"/>
-          </a:lnRef>
-          <a:fillRef idx="3">
-            <a:schemeClr val="accent1"/>
-          </a:fillRef>
-          <a:effectRef idx="2">
-            <a:schemeClr val="accent1"/>
-          </a:effectRef>
-          <a:fontRef idx="minor">
-            <a:schemeClr val="lt1"/>
-          </a:fontRef>
-        </p:style>
-        <p:txBody>
-          <a:bodyPr rtlCol="0" anchor="ctr"/>
-          <a:lstStyle/>
-          <a:p>
-            <a:pPr algn="ctr"/>
-          </a:p>
-        </p:txBody>
-      </p:sp>
-      <p:sp>
-        <p:nvSpPr>
-          <p:cNvPr id="20" name="TextBox 19"/>
-          <p:cNvSpPr txBox="1"/>
-          <p:nvPr/>
-        </p:nvSpPr>
-        <p:spPr>
-          <a:xfrm>
-            <a:off x="594360" y="5394960"/>
-            <a:ext cx="438912" cy="438912"/>
-          </a:xfrm>
-          <a:prstGeom prst="rect">
-            <a:avLst/>
-          </a:prstGeom>
-          <a:noFill/>
-        </p:spPr>
-        <p:txBody>
-          <a:bodyPr wrap="square" anchor="ctr"/>
-          <a:lstStyle/>
-          <a:p>
-            <a:pPr algn="ctr"/>
-            <a:r>
-              <a:rPr sz="1600" b="1" i="0">
-                <a:solidFill>
-                  <a:srgbClr val="FFFFFF"/>
-                </a:solidFill>
-                <a:latin typeface="Calibri"/>
-              </a:rPr>
-              <a:t>4</a:t>
-            </a:r>
-          </a:p>
-        </p:txBody>
-      </p:sp>
-      <p:sp>
-        <p:nvSpPr>
-          <p:cNvPr id="21" name="TextBox 20"/>
-          <p:cNvSpPr txBox="1"/>
-          <p:nvPr/>
-        </p:nvSpPr>
-        <p:spPr>
-          <a:xfrm>
-            <a:off x="1188720" y="5180076"/>
-            <a:ext cx="10271455" cy="886968"/>
-          </a:xfrm>
-          <a:prstGeom prst="rect">
-            <a:avLst/>
-          </a:prstGeom>
-          <a:noFill/>
-        </p:spPr>
-        <p:txBody>
-          <a:bodyPr wrap="square" anchor="ctr"/>
-          <a:lstStyle/>
-          <a:p>
-            <a:r>
-              <a:rPr sz="1500" b="1" i="0">
-                <a:solidFill>
-                  <a:srgbClr val="095292"/>
-                </a:solidFill>
-                <a:latin typeface="Calibri"/>
-              </a:rPr>
-              <a:t>Guarda el PNG para tu PI</a:t>
+              <a:t>–   Hoy no se construye: se </a:t>
+            </a:r>
+            <a:r>
+              <a:rPr sz="2000" b="1" i="0">
+                <a:solidFill>
+                  <a:srgbClr val="333333"/>
+                </a:solidFill>
+                <a:latin typeface="Calibri"/>
+              </a:rPr>
+              <a:t>defiende</a:t>
+            </a:r>
+            <a:r>
+              <a:rPr sz="2000" b="0" i="0">
+                <a:solidFill>
+                  <a:srgbClr val="333333"/>
+                </a:solidFill>
+                <a:latin typeface="Calibri"/>
+              </a:rPr>
+              <a:t> lo que ya está en el paquete del PI.</a:t>
             </a:r>
           </a:p>
           <a:p>
             <a:pPr>
-              <a:spcBef>
-                <a:spcPts val="200"/>
-              </a:spcBef>
+              <a:spcAft>
+                <a:spcPts val="800"/>
+              </a:spcAft>
             </a:pPr>
             <a:r>
-              <a:rPr sz="1300" b="0" i="0">
+              <a:rPr sz="2000" b="0" i="0">
                 <a:solidFill>
                   <a:srgbClr val="333333"/>
                 </a:solidFill>
                 <a:latin typeface="Calibri"/>
               </a:rPr>
-              <a:t>Exporta tambien la imagen a la carpeta de tu Proyecto Integrador. Esa copia es para tu informe; no reemplaza la respuesta en la plataforma.</a:t>
-            </a:r>
-          </a:p>
-        </p:txBody>
-      </p:sp>
-      <p:sp>
-        <p:nvSpPr>
-          <p:cNvPr id="22" name="TextBox 21"/>
+              <a:t>–   Individual por defecto · el docente puede autorizar equipos de 2–3; la entrega en la plataforma del curso siempre es individual.</a:t>
+            </a:r>
+          </a:p>
+        </p:txBody>
+      </p:sp>
+      <p:sp>
+        <p:nvSpPr>
+          <p:cNvPr id="6" name="TextBox 5"/>
           <p:cNvSpPr txBox="1"/>
           <p:nvPr/>
         </p:nvSpPr>
@@ -6419,7 +5833,7 @@
                 </a:solidFill>
                 <a:latin typeface="Calibri"/>
               </a:rPr>
-              <a:t>PI CloudLite — entregable de hoy</a:t>
+              <a:t>Cómo se ordena la sesión de hoy</a:t>
             </a:r>
           </a:p>
         </p:txBody>
@@ -6458,7 +5872,7 @@
                 </a:solidFill>
                 <a:latin typeface="Calibri"/>
               </a:rPr>
-              <a:t>–   </a:t>
+              <a:t>–   Sustentación </a:t>
             </a:r>
             <a:r>
               <a:rPr sz="2000" b="1" i="0">
@@ -6467,7 +5881,7 @@
                 </a:solidFill>
                 <a:latin typeface="Calibri"/>
               </a:rPr>
-              <a:t>Entregable:</a:t>
+              <a:t>en vivo</a:t>
             </a:r>
             <a:r>
               <a:rPr sz="2000" b="0" i="0">
@@ -6476,7 +5890,7 @@
                 </a:solidFill>
                 <a:latin typeface="Calibri"/>
               </a:rPr>
-              <a:t> Paquete final en la plataforma del curso (módulo Proyectos) + pitch de 5–8 min sustentado hoy en clase + Q&amp;A</a:t>
+              <a:t>, en este bloque: no se reemplaza por video grabado.</a:t>
             </a:r>
           </a:p>
           <a:p>
@@ -6492,7 +5906,7 @@
                 </a:solidFill>
                 <a:latin typeface="Calibri"/>
               </a:rPr>
-              <a:t>–   Herramienta: </a:t>
+              <a:t>–   Turnos de </a:t>
             </a:r>
             <a:r>
               <a:rPr sz="2000" b="1" i="0">
@@ -6501,7 +5915,16 @@
                 </a:solidFill>
                 <a:latin typeface="Calibri"/>
               </a:rPr>
-              <a:t>Google Docs/Slides · diagramas · capturas lab</a:t>
+              <a:t>6 min de pitch + 2–4 min de Q&amp;A</a:t>
+            </a:r>
+            <a:r>
+              <a:rPr sz="2000" b="0" i="0">
+                <a:solidFill>
+                  <a:srgbClr val="333333"/>
+                </a:solidFill>
+                <a:latin typeface="Calibri"/>
+              </a:rPr>
+              <a:t>; el orden se sortea al empezar.</a:t>
             </a:r>
           </a:p>
           <a:p>
@@ -6517,7 +5940,7 @@
                 </a:solidFill>
                 <a:latin typeface="Calibri"/>
               </a:rPr>
-              <a:t>–   Hoy no se construye: se </a:t>
+              <a:t>–   Ten el paquete ya subido a la plataforma del curso </a:t>
             </a:r>
             <a:r>
               <a:rPr sz="2000" b="1" i="0">
@@ -6526,7 +5949,7 @@
                 </a:solidFill>
                 <a:latin typeface="Calibri"/>
               </a:rPr>
-              <a:t>defiende</a:t>
+              <a:t>antes</a:t>
             </a:r>
             <a:r>
               <a:rPr sz="2000" b="0" i="0">
@@ -6535,7 +5958,7 @@
                 </a:solidFill>
                 <a:latin typeface="Calibri"/>
               </a:rPr>
-              <a:t> lo que ya está en el paquete del PI.</a:t>
+              <a:t> de tu turno (no se sube presentando).</a:t>
             </a:r>
           </a:p>
           <a:p>
@@ -6551,7 +5974,7 @@
                 </a:solidFill>
                 <a:latin typeface="Calibri"/>
               </a:rPr>
-              <a:t>–   Individual por defecto · el docente puede autorizar equipos de 2–3; la entrega en la plataforma del curso siempre es individual.</a:t>
+              <a:t>–   Mientras otros presentan, escuchas: el cierre del curso se hace con todo el grupo.</a:t>
             </a:r>
           </a:p>
         </p:txBody>
@@ -6732,7 +6155,7 @@
                 </a:solidFill>
                 <a:latin typeface="Calibri"/>
               </a:rPr>
-              <a:t>Cómo se ordena la sesión de hoy</a:t>
+              <a:t>Rúbrica de sustentación (recordatorio)</a:t>
             </a:r>
           </a:p>
         </p:txBody>
@@ -6771,25 +6194,7 @@
                 </a:solidFill>
                 <a:latin typeface="Calibri"/>
               </a:rPr>
-              <a:t>–   Sustentación </a:t>
-            </a:r>
-            <a:r>
-              <a:rPr sz="2000" b="1" i="0">
-                <a:solidFill>
-                  <a:srgbClr val="333333"/>
-                </a:solidFill>
-                <a:latin typeface="Calibri"/>
-              </a:rPr>
-              <a:t>en vivo</a:t>
-            </a:r>
-            <a:r>
-              <a:rPr sz="2000" b="0" i="0">
-                <a:solidFill>
-                  <a:srgbClr val="333333"/>
-                </a:solidFill>
-                <a:latin typeface="Calibri"/>
-              </a:rPr>
-              <a:t>, en este bloque: no se reemplaza por video grabado.</a:t>
+              <a:t>–   Claridad del problema · calidad de diagramas · demo lab/CI · respuestas.</a:t>
             </a:r>
           </a:p>
           <a:p>
@@ -6805,75 +6210,7 @@
                 </a:solidFill>
                 <a:latin typeface="Calibri"/>
               </a:rPr>
-              <a:t>–   Turnos de </a:t>
-            </a:r>
-            <a:r>
-              <a:rPr sz="2000" b="1" i="0">
-                <a:solidFill>
-                  <a:srgbClr val="333333"/>
-                </a:solidFill>
-                <a:latin typeface="Calibri"/>
-              </a:rPr>
-              <a:t>6 min de pitch + 2–4 min de Q&amp;A</a:t>
-            </a:r>
-            <a:r>
-              <a:rPr sz="2000" b="0" i="0">
-                <a:solidFill>
-                  <a:srgbClr val="333333"/>
-                </a:solidFill>
-                <a:latin typeface="Calibri"/>
-              </a:rPr>
-              <a:t>; el orden se sortea al empezar.</a:t>
-            </a:r>
-          </a:p>
-          <a:p>
-            <a:pPr>
-              <a:spcAft>
-                <a:spcPts val="800"/>
-              </a:spcAft>
-            </a:pPr>
-            <a:r>
-              <a:rPr sz="2000" b="0" i="0">
-                <a:solidFill>
-                  <a:srgbClr val="333333"/>
-                </a:solidFill>
-                <a:latin typeface="Calibri"/>
-              </a:rPr>
-              <a:t>–   Ten el paquete ya subido a la plataforma del curso </a:t>
-            </a:r>
-            <a:r>
-              <a:rPr sz="2000" b="1" i="0">
-                <a:solidFill>
-                  <a:srgbClr val="333333"/>
-                </a:solidFill>
-                <a:latin typeface="Calibri"/>
-              </a:rPr>
-              <a:t>antes</a:t>
-            </a:r>
-            <a:r>
-              <a:rPr sz="2000" b="0" i="0">
-                <a:solidFill>
-                  <a:srgbClr val="333333"/>
-                </a:solidFill>
-                <a:latin typeface="Calibri"/>
-              </a:rPr>
-              <a:t> de tu turno (no se sube presentando).</a:t>
-            </a:r>
-          </a:p>
-          <a:p>
-            <a:pPr>
-              <a:spcAft>
-                <a:spcPts val="800"/>
-              </a:spcAft>
-            </a:pPr>
-            <a:r>
-              <a:rPr sz="2000" b="0" i="0">
-                <a:solidFill>
-                  <a:srgbClr val="333333"/>
-                </a:solidFill>
-                <a:latin typeface="Calibri"/>
-              </a:rPr>
-              <a:t>–   Mientras otros presentan, escuchas: el cierre del curso se hace con todo el grupo.</a:t>
+              <a:t>–   Cubres los 5 bloques del guion; en equipo autorizado hablan todos (penalización si solo uno presenta).</a:t>
             </a:r>
           </a:p>
         </p:txBody>
@@ -7054,7 +6391,7 @@
                 </a:solidFill>
                 <a:latin typeface="Calibri"/>
               </a:rPr>
-              <a:t>Rúbrica de sustentación (recordatorio)</a:t>
+              <a:t>Checklist final</a:t>
             </a:r>
           </a:p>
         </p:txBody>
@@ -7093,7 +6430,7 @@
                 </a:solidFill>
                 <a:latin typeface="Calibri"/>
               </a:rPr>
-              <a:t>–   Claridad del problema · calidad de diagramas · demo lab/CI · respuestas.</a:t>
+              <a:t>–   Informe completo · 3 diagramas · Dockerfile+captura · Actions · pitch.</a:t>
             </a:r>
           </a:p>
           <a:p>
@@ -7109,7 +6446,7 @@
                 </a:solidFill>
                 <a:latin typeface="Calibri"/>
               </a:rPr>
-              <a:t>–   Cubres los 5 bloques del guion; en equipo autorizado hablan todos (penalización si solo uno presenta).</a:t>
+              <a:t>–   Sin cuentas cloud de pago · sin instalar hipervisores como requisito.</a:t>
             </a:r>
           </a:p>
         </p:txBody>
@@ -7290,7 +6627,7 @@
                 </a:solidFill>
                 <a:latin typeface="Calibri"/>
               </a:rPr>
-              <a:t>Checklist final</a:t>
+              <a:t>Cierre del curso</a:t>
             </a:r>
           </a:p>
         </p:txBody>
@@ -7329,7 +6666,7 @@
                 </a:solidFill>
                 <a:latin typeface="Calibri"/>
               </a:rPr>
-              <a:t>–   Informe completo · 3 diagramas · Dockerfile+captura · Actions · pitch.</a:t>
+              <a:t>–   RAA1–3 aplicados al PI. Conserven el repo como portafolio.</a:t>
             </a:r>
           </a:p>
           <a:p>
@@ -7345,7 +6682,7 @@
                 </a:solidFill>
                 <a:latin typeface="Calibri"/>
               </a:rPr>
-              <a:t>–   Sin cuentas cloud de pago · sin instalar hipervisores como requisito.</a:t>
+              <a:t>–   Gracias — arquitectura es trade-offs documentados, no logos de proveedores.</a:t>
             </a:r>
           </a:p>
         </p:txBody>
@@ -7420,7 +6757,7 @@
         <p:spPr>
           <a:xfrm>
             <a:off x="0" y="0"/>
-            <a:ext cx="12191695" cy="960120"/>
+            <a:ext cx="12191695" cy="1170432"/>
           </a:xfrm>
           <a:prstGeom prst="rect">
             <a:avLst/>
@@ -7462,7 +6799,7 @@
         </p:nvSpPr>
         <p:spPr>
           <a:xfrm>
-            <a:off x="0" y="960120"/>
+            <a:off x="0" y="1170432"/>
             <a:ext cx="12191695" cy="41148"/>
           </a:xfrm>
           <a:prstGeom prst="rect">
@@ -7506,7 +6843,7 @@
         <p:spPr>
           <a:xfrm>
             <a:off x="457200" y="164592"/>
-            <a:ext cx="11277295" cy="502920"/>
+            <a:ext cx="11277295" cy="384048"/>
           </a:xfrm>
           <a:prstGeom prst="rect">
             <a:avLst/>
@@ -7526,7 +6863,7 @@
                 </a:solidFill>
                 <a:latin typeface="Calibri"/>
               </a:rPr>
-              <a:t>Cierre del curso</a:t>
+              <a:t>Herramientas de hoy</a:t>
             </a:r>
           </a:p>
         </p:txBody>
@@ -7539,8 +6876,8 @@
         </p:nvSpPr>
         <p:spPr>
           <a:xfrm>
-            <a:off x="457200" y="1170432"/>
-            <a:ext cx="11277295" cy="5230368"/>
+            <a:off x="457200" y="566928"/>
+            <a:ext cx="11277295" cy="411480"/>
           </a:xfrm>
           <a:prstGeom prst="rect">
             <a:avLst/>
@@ -7553,42 +6890,837 @@
           </a:bodyPr>
           <a:lstStyle/>
           <a:p>
-            <a:pPr>
-              <a:spcAft>
-                <a:spcPts val="800"/>
-              </a:spcAft>
+            <a:r>
+              <a:rPr sz="1400" b="0" i="0">
+                <a:solidFill>
+                  <a:srgbClr val="B8D8EE"/>
+                </a:solidFill>
+                <a:latin typeface="Calibri"/>
+              </a:rPr>
+              <a:t>Gratis · navegador o free tier · sin cuenta de pago</a:t>
+            </a:r>
+          </a:p>
+        </p:txBody>
+      </p:sp>
+      <p:sp>
+        <p:nvSpPr>
+          <p:cNvPr id="6" name="Rounded Rectangle 5"/>
+          <p:cNvSpPr/>
+          <p:nvPr/>
+        </p:nvSpPr>
+        <p:spPr>
+          <a:xfrm>
+            <a:off x="457200" y="1591056"/>
+            <a:ext cx="3624986" cy="2299716"/>
+          </a:xfrm>
+          <a:prstGeom prst="roundRect">
+            <a:avLst>
+              <a:gd name="adj" fmla="val 12000"/>
+            </a:avLst>
+          </a:prstGeom>
+          <a:solidFill>
+            <a:srgbClr val="F2F2F2"/>
+          </a:solidFill>
+          <a:ln>
+            <a:noFill/>
+          </a:ln>
+        </p:spPr>
+        <p:style>
+          <a:lnRef idx="1">
+            <a:schemeClr val="accent1"/>
+          </a:lnRef>
+          <a:fillRef idx="3">
+            <a:schemeClr val="accent1"/>
+          </a:fillRef>
+          <a:effectRef idx="2">
+            <a:schemeClr val="accent1"/>
+          </a:effectRef>
+          <a:fontRef idx="minor">
+            <a:schemeClr val="lt1"/>
+          </a:fontRef>
+        </p:style>
+        <p:txBody>
+          <a:bodyPr rtlCol="0" anchor="ctr"/>
+          <a:lstStyle/>
+          <a:p>
+            <a:pPr algn="ctr"/>
+          </a:p>
+        </p:txBody>
+      </p:sp>
+      <p:sp>
+        <p:nvSpPr>
+          <p:cNvPr id="7" name="Rectangle 6"/>
+          <p:cNvSpPr/>
+          <p:nvPr/>
+        </p:nvSpPr>
+        <p:spPr>
+          <a:xfrm>
+            <a:off x="457200" y="1591056"/>
+            <a:ext cx="3624986" cy="64008"/>
+          </a:xfrm>
+          <a:prstGeom prst="rect">
+            <a:avLst/>
+          </a:prstGeom>
+          <a:solidFill>
+            <a:srgbClr val="095292"/>
+          </a:solidFill>
+          <a:ln>
+            <a:noFill/>
+          </a:ln>
+        </p:spPr>
+        <p:style>
+          <a:lnRef idx="1">
+            <a:schemeClr val="accent1"/>
+          </a:lnRef>
+          <a:fillRef idx="3">
+            <a:schemeClr val="accent1"/>
+          </a:fillRef>
+          <a:effectRef idx="2">
+            <a:schemeClr val="accent1"/>
+          </a:effectRef>
+          <a:fontRef idx="minor">
+            <a:schemeClr val="lt1"/>
+          </a:fontRef>
+        </p:style>
+        <p:txBody>
+          <a:bodyPr rtlCol="0" anchor="ctr"/>
+          <a:lstStyle/>
+          <a:p>
+            <a:pPr algn="ctr"/>
+          </a:p>
+        </p:txBody>
+      </p:sp>
+      <p:sp>
+        <p:nvSpPr>
+          <p:cNvPr id="8" name="Rectangle 7"/>
+          <p:cNvSpPr/>
+          <p:nvPr/>
+        </p:nvSpPr>
+        <p:spPr>
+          <a:xfrm>
+            <a:off x="457200" y="1655064"/>
+            <a:ext cx="3624986" cy="27432"/>
+          </a:xfrm>
+          <a:prstGeom prst="rect">
+            <a:avLst/>
+          </a:prstGeom>
+          <a:solidFill>
+            <a:srgbClr val="FFD000"/>
+          </a:solidFill>
+          <a:ln>
+            <a:noFill/>
+          </a:ln>
+        </p:spPr>
+        <p:style>
+          <a:lnRef idx="1">
+            <a:schemeClr val="accent1"/>
+          </a:lnRef>
+          <a:fillRef idx="3">
+            <a:schemeClr val="accent1"/>
+          </a:fillRef>
+          <a:effectRef idx="2">
+            <a:schemeClr val="accent1"/>
+          </a:effectRef>
+          <a:fontRef idx="minor">
+            <a:schemeClr val="lt1"/>
+          </a:fontRef>
+        </p:style>
+        <p:txBody>
+          <a:bodyPr rtlCol="0" anchor="ctr"/>
+          <a:lstStyle/>
+          <a:p>
+            <a:pPr algn="ctr"/>
+          </a:p>
+        </p:txBody>
+      </p:sp>
+      <p:pic>
+        <p:nvPicPr>
+          <p:cNvPr id="9" name="Picture 8" descr="google_docs.png"/>
+          <p:cNvPicPr>
+            <a:picLocks noChangeAspect="1"/>
+          </p:cNvPicPr>
+          <p:nvPr/>
+        </p:nvPicPr>
+        <p:blipFill>
+          <a:blip r:embed="rId2"/>
+          <a:stretch>
+            <a:fillRect/>
+          </a:stretch>
+        </p:blipFill>
+        <p:spPr>
+          <a:xfrm>
+            <a:off x="1659331" y="1847087"/>
+            <a:ext cx="1220724" cy="1220724"/>
+          </a:xfrm>
+          <a:prstGeom prst="rect">
+            <a:avLst/>
+          </a:prstGeom>
+        </p:spPr>
+      </p:pic>
+      <p:sp>
+        <p:nvSpPr>
+          <p:cNvPr id="10" name="TextBox 9"/>
+          <p:cNvSpPr txBox="1"/>
+          <p:nvPr/>
+        </p:nvSpPr>
+        <p:spPr>
+          <a:xfrm>
+            <a:off x="530352" y="3159251"/>
+            <a:ext cx="3478682" cy="621792"/>
+          </a:xfrm>
+          <a:prstGeom prst="rect">
+            <a:avLst/>
+          </a:prstGeom>
+          <a:noFill/>
+        </p:spPr>
+        <p:txBody>
+          <a:bodyPr wrap="square" anchor="t"/>
+          <a:lstStyle/>
+          <a:p>
+            <a:pPr algn="ctr"/>
+            <a:r>
+              <a:rPr sz="1300" b="1" i="0">
+                <a:solidFill>
+                  <a:srgbClr val="095292"/>
+                </a:solidFill>
+                <a:latin typeface="Calibri"/>
+              </a:rPr>
+              <a:t>Google Docs</a:t>
+            </a:r>
+          </a:p>
+          <a:p>
+            <a:pPr algn="ctr">
+              <a:spcBef>
+                <a:spcPts val="200"/>
+              </a:spcBef>
             </a:pPr>
             <a:r>
-              <a:rPr sz="2000" b="0" i="0">
-                <a:solidFill>
-                  <a:srgbClr val="333333"/>
-                </a:solidFill>
-                <a:latin typeface="Calibri"/>
-              </a:rPr>
-              <a:t>–   RAA1–3 aplicados al PI. Conserven el repo como portafolio.</a:t>
-            </a:r>
-          </a:p>
-          <a:p>
-            <a:pPr>
-              <a:spcAft>
-                <a:spcPts val="800"/>
-              </a:spcAft>
+              <a:rPr sz="1000" b="0" i="0">
+                <a:solidFill>
+                  <a:srgbClr val="666666"/>
+                </a:solidFill>
+                <a:latin typeface="Calibri"/>
+              </a:rPr>
+              <a:t>Pitch y portafolio</a:t>
+            </a:r>
+          </a:p>
+        </p:txBody>
+      </p:sp>
+      <p:sp>
+        <p:nvSpPr>
+          <p:cNvPr id="11" name="Rounded Rectangle 10"/>
+          <p:cNvSpPr/>
+          <p:nvPr/>
+        </p:nvSpPr>
+        <p:spPr>
+          <a:xfrm>
+            <a:off x="4283354" y="1591056"/>
+            <a:ext cx="3624986" cy="2299716"/>
+          </a:xfrm>
+          <a:prstGeom prst="roundRect">
+            <a:avLst>
+              <a:gd name="adj" fmla="val 12000"/>
+            </a:avLst>
+          </a:prstGeom>
+          <a:solidFill>
+            <a:srgbClr val="F2F2F2"/>
+          </a:solidFill>
+          <a:ln>
+            <a:noFill/>
+          </a:ln>
+        </p:spPr>
+        <p:style>
+          <a:lnRef idx="1">
+            <a:schemeClr val="accent1"/>
+          </a:lnRef>
+          <a:fillRef idx="3">
+            <a:schemeClr val="accent1"/>
+          </a:fillRef>
+          <a:effectRef idx="2">
+            <a:schemeClr val="accent1"/>
+          </a:effectRef>
+          <a:fontRef idx="minor">
+            <a:schemeClr val="lt1"/>
+          </a:fontRef>
+        </p:style>
+        <p:txBody>
+          <a:bodyPr rtlCol="0" anchor="ctr"/>
+          <a:lstStyle/>
+          <a:p>
+            <a:pPr algn="ctr"/>
+          </a:p>
+        </p:txBody>
+      </p:sp>
+      <p:sp>
+        <p:nvSpPr>
+          <p:cNvPr id="12" name="Rectangle 11"/>
+          <p:cNvSpPr/>
+          <p:nvPr/>
+        </p:nvSpPr>
+        <p:spPr>
+          <a:xfrm>
+            <a:off x="4283354" y="1591056"/>
+            <a:ext cx="3624986" cy="64008"/>
+          </a:xfrm>
+          <a:prstGeom prst="rect">
+            <a:avLst/>
+          </a:prstGeom>
+          <a:solidFill>
+            <a:srgbClr val="095292"/>
+          </a:solidFill>
+          <a:ln>
+            <a:noFill/>
+          </a:ln>
+        </p:spPr>
+        <p:style>
+          <a:lnRef idx="1">
+            <a:schemeClr val="accent1"/>
+          </a:lnRef>
+          <a:fillRef idx="3">
+            <a:schemeClr val="accent1"/>
+          </a:fillRef>
+          <a:effectRef idx="2">
+            <a:schemeClr val="accent1"/>
+          </a:effectRef>
+          <a:fontRef idx="minor">
+            <a:schemeClr val="lt1"/>
+          </a:fontRef>
+        </p:style>
+        <p:txBody>
+          <a:bodyPr rtlCol="0" anchor="ctr"/>
+          <a:lstStyle/>
+          <a:p>
+            <a:pPr algn="ctr"/>
+          </a:p>
+        </p:txBody>
+      </p:sp>
+      <p:sp>
+        <p:nvSpPr>
+          <p:cNvPr id="13" name="Rectangle 12"/>
+          <p:cNvSpPr/>
+          <p:nvPr/>
+        </p:nvSpPr>
+        <p:spPr>
+          <a:xfrm>
+            <a:off x="4283354" y="1655064"/>
+            <a:ext cx="3624986" cy="27432"/>
+          </a:xfrm>
+          <a:prstGeom prst="rect">
+            <a:avLst/>
+          </a:prstGeom>
+          <a:solidFill>
+            <a:srgbClr val="FFD000"/>
+          </a:solidFill>
+          <a:ln>
+            <a:noFill/>
+          </a:ln>
+        </p:spPr>
+        <p:style>
+          <a:lnRef idx="1">
+            <a:schemeClr val="accent1"/>
+          </a:lnRef>
+          <a:fillRef idx="3">
+            <a:schemeClr val="accent1"/>
+          </a:fillRef>
+          <a:effectRef idx="2">
+            <a:schemeClr val="accent1"/>
+          </a:effectRef>
+          <a:fontRef idx="minor">
+            <a:schemeClr val="lt1"/>
+          </a:fontRef>
+        </p:style>
+        <p:txBody>
+          <a:bodyPr rtlCol="0" anchor="ctr"/>
+          <a:lstStyle/>
+          <a:p>
+            <a:pPr algn="ctr"/>
+          </a:p>
+        </p:txBody>
+      </p:sp>
+      <p:pic>
+        <p:nvPicPr>
+          <p:cNvPr id="14" name="Picture 13" descr="drawio.png"/>
+          <p:cNvPicPr>
+            <a:picLocks noChangeAspect="1"/>
+          </p:cNvPicPr>
+          <p:nvPr/>
+        </p:nvPicPr>
+        <p:blipFill>
+          <a:blip r:embed="rId3"/>
+          <a:stretch>
+            <a:fillRect/>
+          </a:stretch>
+        </p:blipFill>
+        <p:spPr>
+          <a:xfrm>
+            <a:off x="5485485" y="1847087"/>
+            <a:ext cx="1220724" cy="1220724"/>
+          </a:xfrm>
+          <a:prstGeom prst="rect">
+            <a:avLst/>
+          </a:prstGeom>
+        </p:spPr>
+      </p:pic>
+      <p:sp>
+        <p:nvSpPr>
+          <p:cNvPr id="15" name="TextBox 14"/>
+          <p:cNvSpPr txBox="1"/>
+          <p:nvPr/>
+        </p:nvSpPr>
+        <p:spPr>
+          <a:xfrm>
+            <a:off x="4356506" y="3159251"/>
+            <a:ext cx="3478682" cy="621792"/>
+          </a:xfrm>
+          <a:prstGeom prst="rect">
+            <a:avLst/>
+          </a:prstGeom>
+          <a:noFill/>
+        </p:spPr>
+        <p:txBody>
+          <a:bodyPr wrap="square" anchor="t"/>
+          <a:lstStyle/>
+          <a:p>
+            <a:pPr algn="ctr"/>
+            <a:r>
+              <a:rPr sz="1300" b="1" i="0">
+                <a:solidFill>
+                  <a:srgbClr val="095292"/>
+                </a:solidFill>
+                <a:latin typeface="Calibri"/>
+              </a:rPr>
+              <a:t>draw.io</a:t>
+            </a:r>
+          </a:p>
+          <a:p>
+            <a:pPr algn="ctr">
+              <a:spcBef>
+                <a:spcPts val="200"/>
+              </a:spcBef>
             </a:pPr>
             <a:r>
-              <a:rPr sz="2000" b="0" i="0">
-                <a:solidFill>
-                  <a:srgbClr val="333333"/>
-                </a:solidFill>
-                <a:latin typeface="Calibri"/>
-              </a:rPr>
-              <a:t>–   Gracias — arquitectura es trade-offs documentados, no logos de proveedores.</a:t>
-            </a:r>
-          </a:p>
-        </p:txBody>
-      </p:sp>
-      <p:sp>
-        <p:nvSpPr>
-          <p:cNvPr id="6" name="TextBox 5"/>
+              <a:rPr sz="1000" b="0" i="0">
+                <a:solidFill>
+                  <a:srgbClr val="666666"/>
+                </a:solidFill>
+                <a:latin typeface="Calibri"/>
+              </a:rPr>
+              <a:t>Diagramas del paquete</a:t>
+            </a:r>
+          </a:p>
+        </p:txBody>
+      </p:sp>
+      <p:sp>
+        <p:nvSpPr>
+          <p:cNvPr id="16" name="Rounded Rectangle 15"/>
+          <p:cNvSpPr/>
+          <p:nvPr/>
+        </p:nvSpPr>
+        <p:spPr>
+          <a:xfrm>
+            <a:off x="8109508" y="1591056"/>
+            <a:ext cx="3624986" cy="2299716"/>
+          </a:xfrm>
+          <a:prstGeom prst="roundRect">
+            <a:avLst>
+              <a:gd name="adj" fmla="val 12000"/>
+            </a:avLst>
+          </a:prstGeom>
+          <a:solidFill>
+            <a:srgbClr val="F2F2F2"/>
+          </a:solidFill>
+          <a:ln>
+            <a:noFill/>
+          </a:ln>
+        </p:spPr>
+        <p:style>
+          <a:lnRef idx="1">
+            <a:schemeClr val="accent1"/>
+          </a:lnRef>
+          <a:fillRef idx="3">
+            <a:schemeClr val="accent1"/>
+          </a:fillRef>
+          <a:effectRef idx="2">
+            <a:schemeClr val="accent1"/>
+          </a:effectRef>
+          <a:fontRef idx="minor">
+            <a:schemeClr val="lt1"/>
+          </a:fontRef>
+        </p:style>
+        <p:txBody>
+          <a:bodyPr rtlCol="0" anchor="ctr"/>
+          <a:lstStyle/>
+          <a:p>
+            <a:pPr algn="ctr"/>
+          </a:p>
+        </p:txBody>
+      </p:sp>
+      <p:sp>
+        <p:nvSpPr>
+          <p:cNvPr id="17" name="Rectangle 16"/>
+          <p:cNvSpPr/>
+          <p:nvPr/>
+        </p:nvSpPr>
+        <p:spPr>
+          <a:xfrm>
+            <a:off x="8109508" y="1591056"/>
+            <a:ext cx="3624986" cy="64008"/>
+          </a:xfrm>
+          <a:prstGeom prst="rect">
+            <a:avLst/>
+          </a:prstGeom>
+          <a:solidFill>
+            <a:srgbClr val="095292"/>
+          </a:solidFill>
+          <a:ln>
+            <a:noFill/>
+          </a:ln>
+        </p:spPr>
+        <p:style>
+          <a:lnRef idx="1">
+            <a:schemeClr val="accent1"/>
+          </a:lnRef>
+          <a:fillRef idx="3">
+            <a:schemeClr val="accent1"/>
+          </a:fillRef>
+          <a:effectRef idx="2">
+            <a:schemeClr val="accent1"/>
+          </a:effectRef>
+          <a:fontRef idx="minor">
+            <a:schemeClr val="lt1"/>
+          </a:fontRef>
+        </p:style>
+        <p:txBody>
+          <a:bodyPr rtlCol="0" anchor="ctr"/>
+          <a:lstStyle/>
+          <a:p>
+            <a:pPr algn="ctr"/>
+          </a:p>
+        </p:txBody>
+      </p:sp>
+      <p:sp>
+        <p:nvSpPr>
+          <p:cNvPr id="18" name="Rectangle 17"/>
+          <p:cNvSpPr/>
+          <p:nvPr/>
+        </p:nvSpPr>
+        <p:spPr>
+          <a:xfrm>
+            <a:off x="8109508" y="1655064"/>
+            <a:ext cx="3624986" cy="27432"/>
+          </a:xfrm>
+          <a:prstGeom prst="rect">
+            <a:avLst/>
+          </a:prstGeom>
+          <a:solidFill>
+            <a:srgbClr val="FFD000"/>
+          </a:solidFill>
+          <a:ln>
+            <a:noFill/>
+          </a:ln>
+        </p:spPr>
+        <p:style>
+          <a:lnRef idx="1">
+            <a:schemeClr val="accent1"/>
+          </a:lnRef>
+          <a:fillRef idx="3">
+            <a:schemeClr val="accent1"/>
+          </a:fillRef>
+          <a:effectRef idx="2">
+            <a:schemeClr val="accent1"/>
+          </a:effectRef>
+          <a:fontRef idx="minor">
+            <a:schemeClr val="lt1"/>
+          </a:fontRef>
+        </p:style>
+        <p:txBody>
+          <a:bodyPr rtlCol="0" anchor="ctr"/>
+          <a:lstStyle/>
+          <a:p>
+            <a:pPr algn="ctr"/>
+          </a:p>
+        </p:txBody>
+      </p:sp>
+      <p:pic>
+        <p:nvPicPr>
+          <p:cNvPr id="19" name="Picture 18" descr="mermaid.png"/>
+          <p:cNvPicPr>
+            <a:picLocks noChangeAspect="1"/>
+          </p:cNvPicPr>
+          <p:nvPr/>
+        </p:nvPicPr>
+        <p:blipFill>
+          <a:blip r:embed="rId4"/>
+          <a:stretch>
+            <a:fillRect/>
+          </a:stretch>
+        </p:blipFill>
+        <p:spPr>
+          <a:xfrm>
+            <a:off x="9311640" y="1847087"/>
+            <a:ext cx="1220724" cy="1220724"/>
+          </a:xfrm>
+          <a:prstGeom prst="rect">
+            <a:avLst/>
+          </a:prstGeom>
+        </p:spPr>
+      </p:pic>
+      <p:sp>
+        <p:nvSpPr>
+          <p:cNvPr id="20" name="TextBox 19"/>
+          <p:cNvSpPr txBox="1"/>
+          <p:nvPr/>
+        </p:nvSpPr>
+        <p:spPr>
+          <a:xfrm>
+            <a:off x="8182660" y="3159251"/>
+            <a:ext cx="3478682" cy="621792"/>
+          </a:xfrm>
+          <a:prstGeom prst="rect">
+            <a:avLst/>
+          </a:prstGeom>
+          <a:noFill/>
+        </p:spPr>
+        <p:txBody>
+          <a:bodyPr wrap="square" anchor="t"/>
+          <a:lstStyle/>
+          <a:p>
+            <a:pPr algn="ctr"/>
+            <a:r>
+              <a:rPr sz="1300" b="1" i="0">
+                <a:solidFill>
+                  <a:srgbClr val="095292"/>
+                </a:solidFill>
+                <a:latin typeface="Calibri"/>
+              </a:rPr>
+              <a:t>Mermaid</a:t>
+            </a:r>
+          </a:p>
+          <a:p>
+            <a:pPr algn="ctr">
+              <a:spcBef>
+                <a:spcPts val="200"/>
+              </a:spcBef>
+            </a:pPr>
+            <a:r>
+              <a:rPr sz="1000" b="0" i="0">
+                <a:solidFill>
+                  <a:srgbClr val="666666"/>
+                </a:solidFill>
+                <a:latin typeface="Calibri"/>
+              </a:rPr>
+              <a:t>Codigo del diagrama</a:t>
+            </a:r>
+          </a:p>
+        </p:txBody>
+      </p:sp>
+      <p:sp>
+        <p:nvSpPr>
+          <p:cNvPr id="21" name="Rounded Rectangle 20"/>
+          <p:cNvSpPr/>
+          <p:nvPr/>
+        </p:nvSpPr>
+        <p:spPr>
+          <a:xfrm>
+            <a:off x="4283354" y="4055364"/>
+            <a:ext cx="3624986" cy="2299716"/>
+          </a:xfrm>
+          <a:prstGeom prst="roundRect">
+            <a:avLst>
+              <a:gd name="adj" fmla="val 12000"/>
+            </a:avLst>
+          </a:prstGeom>
+          <a:solidFill>
+            <a:srgbClr val="F2F2F2"/>
+          </a:solidFill>
+          <a:ln>
+            <a:noFill/>
+          </a:ln>
+        </p:spPr>
+        <p:style>
+          <a:lnRef idx="1">
+            <a:schemeClr val="accent1"/>
+          </a:lnRef>
+          <a:fillRef idx="3">
+            <a:schemeClr val="accent1"/>
+          </a:fillRef>
+          <a:effectRef idx="2">
+            <a:schemeClr val="accent1"/>
+          </a:effectRef>
+          <a:fontRef idx="minor">
+            <a:schemeClr val="lt1"/>
+          </a:fontRef>
+        </p:style>
+        <p:txBody>
+          <a:bodyPr rtlCol="0" anchor="ctr"/>
+          <a:lstStyle/>
+          <a:p>
+            <a:pPr algn="ctr"/>
+          </a:p>
+        </p:txBody>
+      </p:sp>
+      <p:sp>
+        <p:nvSpPr>
+          <p:cNvPr id="22" name="Rectangle 21"/>
+          <p:cNvSpPr/>
+          <p:nvPr/>
+        </p:nvSpPr>
+        <p:spPr>
+          <a:xfrm>
+            <a:off x="4283354" y="4055364"/>
+            <a:ext cx="3624986" cy="64008"/>
+          </a:xfrm>
+          <a:prstGeom prst="rect">
+            <a:avLst/>
+          </a:prstGeom>
+          <a:solidFill>
+            <a:srgbClr val="095292"/>
+          </a:solidFill>
+          <a:ln>
+            <a:noFill/>
+          </a:ln>
+        </p:spPr>
+        <p:style>
+          <a:lnRef idx="1">
+            <a:schemeClr val="accent1"/>
+          </a:lnRef>
+          <a:fillRef idx="3">
+            <a:schemeClr val="accent1"/>
+          </a:fillRef>
+          <a:effectRef idx="2">
+            <a:schemeClr val="accent1"/>
+          </a:effectRef>
+          <a:fontRef idx="minor">
+            <a:schemeClr val="lt1"/>
+          </a:fontRef>
+        </p:style>
+        <p:txBody>
+          <a:bodyPr rtlCol="0" anchor="ctr"/>
+          <a:lstStyle/>
+          <a:p>
+            <a:pPr algn="ctr"/>
+          </a:p>
+        </p:txBody>
+      </p:sp>
+      <p:sp>
+        <p:nvSpPr>
+          <p:cNvPr id="23" name="Rectangle 22"/>
+          <p:cNvSpPr/>
+          <p:nvPr/>
+        </p:nvSpPr>
+        <p:spPr>
+          <a:xfrm>
+            <a:off x="4283354" y="4119372"/>
+            <a:ext cx="3624986" cy="27432"/>
+          </a:xfrm>
+          <a:prstGeom prst="rect">
+            <a:avLst/>
+          </a:prstGeom>
+          <a:solidFill>
+            <a:srgbClr val="FFD000"/>
+          </a:solidFill>
+          <a:ln>
+            <a:noFill/>
+          </a:ln>
+        </p:spPr>
+        <p:style>
+          <a:lnRef idx="1">
+            <a:schemeClr val="accent1"/>
+          </a:lnRef>
+          <a:fillRef idx="3">
+            <a:schemeClr val="accent1"/>
+          </a:fillRef>
+          <a:effectRef idx="2">
+            <a:schemeClr val="accent1"/>
+          </a:effectRef>
+          <a:fontRef idx="minor">
+            <a:schemeClr val="lt1"/>
+          </a:fontRef>
+        </p:style>
+        <p:txBody>
+          <a:bodyPr rtlCol="0" anchor="ctr"/>
+          <a:lstStyle/>
+          <a:p>
+            <a:pPr algn="ctr"/>
+          </a:p>
+        </p:txBody>
+      </p:sp>
+      <p:pic>
+        <p:nvPicPr>
+          <p:cNvPr id="24" name="Picture 23" descr="examlab.png"/>
+          <p:cNvPicPr>
+            <a:picLocks noChangeAspect="1"/>
+          </p:cNvPicPr>
+          <p:nvPr/>
+        </p:nvPicPr>
+        <p:blipFill>
+          <a:blip r:embed="rId5"/>
+          <a:stretch>
+            <a:fillRect/>
+          </a:stretch>
+        </p:blipFill>
+        <p:spPr>
+          <a:xfrm>
+            <a:off x="5485485" y="4311396"/>
+            <a:ext cx="1220724" cy="1220724"/>
+          </a:xfrm>
+          <a:prstGeom prst="rect">
+            <a:avLst/>
+          </a:prstGeom>
+        </p:spPr>
+      </p:pic>
+      <p:sp>
+        <p:nvSpPr>
+          <p:cNvPr id="25" name="TextBox 24"/>
+          <p:cNvSpPr txBox="1"/>
+          <p:nvPr/>
+        </p:nvSpPr>
+        <p:spPr>
+          <a:xfrm>
+            <a:off x="4356506" y="5623560"/>
+            <a:ext cx="3478682" cy="621792"/>
+          </a:xfrm>
+          <a:prstGeom prst="rect">
+            <a:avLst/>
+          </a:prstGeom>
+          <a:noFill/>
+        </p:spPr>
+        <p:txBody>
+          <a:bodyPr wrap="square" anchor="t"/>
+          <a:lstStyle/>
+          <a:p>
+            <a:pPr algn="ctr"/>
+            <a:r>
+              <a:rPr sz="1300" b="1" i="0">
+                <a:solidFill>
+                  <a:srgbClr val="095292"/>
+                </a:solidFill>
+                <a:latin typeface="Calibri"/>
+              </a:rPr>
+              <a:t>la plataforma del curso</a:t>
+            </a:r>
+          </a:p>
+          <a:p>
+            <a:pPr algn="ctr">
+              <a:spcBef>
+                <a:spcPts val="200"/>
+              </a:spcBef>
+            </a:pPr>
+            <a:r>
+              <a:rPr sz="1000" b="0" i="0">
+                <a:solidFill>
+                  <a:srgbClr val="666666"/>
+                </a:solidFill>
+                <a:latin typeface="Calibri"/>
+              </a:rPr>
+              <a:t>Donde se entrega</a:t>
+            </a:r>
+          </a:p>
+        </p:txBody>
+      </p:sp>
+      <p:sp>
+        <p:nvSpPr>
+          <p:cNvPr id="26" name="TextBox 25"/>
           <p:cNvSpPr txBox="1"/>
           <p:nvPr/>
         </p:nvSpPr>
@@ -7762,7 +7894,7 @@
                 </a:solidFill>
                 <a:latin typeface="Calibri"/>
               </a:rPr>
-              <a:t>Herramientas de hoy</a:t>
+              <a:t>Del boceto a la plataforma del curso (diagrama)</a:t>
             </a:r>
           </a:p>
         </p:txBody>
@@ -7796,7 +7928,7 @@
                 </a:solidFill>
                 <a:latin typeface="Calibri"/>
               </a:rPr>
-              <a:t>Gratis · navegador o free tier · sin cuenta de pago</a:t>
+              <a:t>El diagrama se entrega como código Mermaid dentro de la plataforma del curso, no como imagen</a:t>
             </a:r>
           </a:p>
         </p:txBody>
@@ -7809,8 +7941,8 @@
         </p:nvSpPr>
         <p:spPr>
           <a:xfrm>
-            <a:off x="457200" y="1591056"/>
-            <a:ext cx="3624986" cy="2299716"/>
+            <a:off x="457200" y="1659636"/>
+            <a:ext cx="11277295" cy="1051560"/>
           </a:xfrm>
           <a:prstGeom prst="roundRect">
             <a:avLst>
@@ -7848,17 +7980,19 @@
       </p:sp>
       <p:sp>
         <p:nvSpPr>
-          <p:cNvPr id="7" name="Rectangle 6"/>
+          <p:cNvPr id="7" name="Rounded Rectangle 6"/>
           <p:cNvSpPr/>
           <p:nvPr/>
         </p:nvSpPr>
         <p:spPr>
           <a:xfrm>
-            <a:off x="457200" y="1591056"/>
-            <a:ext cx="3624986" cy="64008"/>
-          </a:xfrm>
-          <a:prstGeom prst="rect">
-            <a:avLst/>
+            <a:off x="594360" y="1965960"/>
+            <a:ext cx="438912" cy="438912"/>
+          </a:xfrm>
+          <a:prstGeom prst="roundRect">
+            <a:avLst>
+              <a:gd name="adj" fmla="val 12000"/>
+            </a:avLst>
           </a:prstGeom>
           <a:solidFill>
             <a:srgbClr val="095292"/>
@@ -7891,20 +8025,103 @@
       </p:sp>
       <p:sp>
         <p:nvSpPr>
-          <p:cNvPr id="8" name="Rectangle 7"/>
+          <p:cNvPr id="8" name="TextBox 7"/>
+          <p:cNvSpPr txBox="1"/>
+          <p:nvPr/>
+        </p:nvSpPr>
+        <p:spPr>
+          <a:xfrm>
+            <a:off x="594360" y="1965960"/>
+            <a:ext cx="438912" cy="438912"/>
+          </a:xfrm>
+          <a:prstGeom prst="rect">
+            <a:avLst/>
+          </a:prstGeom>
+          <a:noFill/>
+        </p:spPr>
+        <p:txBody>
+          <a:bodyPr wrap="square" anchor="ctr"/>
+          <a:lstStyle/>
+          <a:p>
+            <a:pPr algn="ctr"/>
+            <a:r>
+              <a:rPr sz="1600" b="1" i="0">
+                <a:solidFill>
+                  <a:srgbClr val="FFFFFF"/>
+                </a:solidFill>
+                <a:latin typeface="Calibri"/>
+              </a:rPr>
+              <a:t>1</a:t>
+            </a:r>
+          </a:p>
+        </p:txBody>
+      </p:sp>
+      <p:sp>
+        <p:nvSpPr>
+          <p:cNvPr id="9" name="TextBox 8"/>
+          <p:cNvSpPr txBox="1"/>
+          <p:nvPr/>
+        </p:nvSpPr>
+        <p:spPr>
+          <a:xfrm>
+            <a:off x="1188720" y="1751076"/>
+            <a:ext cx="10271455" cy="886968"/>
+          </a:xfrm>
+          <a:prstGeom prst="rect">
+            <a:avLst/>
+          </a:prstGeom>
+          <a:noFill/>
+        </p:spPr>
+        <p:txBody>
+          <a:bodyPr wrap="square" anchor="ctr"/>
+          <a:lstStyle/>
+          <a:p>
+            <a:r>
+              <a:rPr sz="1500" b="1" i="0">
+                <a:solidFill>
+                  <a:srgbClr val="095292"/>
+                </a:solidFill>
+                <a:latin typeface="Calibri"/>
+              </a:rPr>
+              <a:t>Disena visual</a:t>
+            </a:r>
+          </a:p>
+          <a:p>
+            <a:pPr>
+              <a:spcBef>
+                <a:spcPts val="200"/>
+              </a:spcBef>
+            </a:pPr>
+            <a:r>
+              <a:rPr sz="1300" b="0" i="0">
+                <a:solidFill>
+                  <a:srgbClr val="333333"/>
+                </a:solidFill>
+                <a:latin typeface="Calibri"/>
+              </a:rPr>
+              <a:t>Dibuja el diagrama como quieras en Excalidraw o draw.io: es mas rapido arrastrar cajas que escribir codigo, y ahi es donde piensas el modelo.</a:t>
+            </a:r>
+          </a:p>
+        </p:txBody>
+      </p:sp>
+      <p:sp>
+        <p:nvSpPr>
+          <p:cNvPr id="10" name="Rounded Rectangle 9"/>
           <p:cNvSpPr/>
           <p:nvPr/>
         </p:nvSpPr>
         <p:spPr>
           <a:xfrm>
-            <a:off x="457200" y="1655064"/>
-            <a:ext cx="3624986" cy="27432"/>
-          </a:xfrm>
-          <a:prstGeom prst="rect">
-            <a:avLst/>
+            <a:off x="457200" y="2802636"/>
+            <a:ext cx="11277295" cy="1051560"/>
+          </a:xfrm>
+          <a:prstGeom prst="roundRect">
+            <a:avLst>
+              <a:gd name="adj" fmla="val 12000"/>
+            </a:avLst>
           </a:prstGeom>
           <a:solidFill>
-            <a:srgbClr val="FFD000"/>
+            <a:srgbClr val="E8F4FA"/>
           </a:solidFill>
           <a:ln>
             <a:noFill/>
@@ -7932,40 +8149,61 @@
           </a:p>
         </p:txBody>
       </p:sp>
-      <p:pic>
-        <p:nvPicPr>
-          <p:cNvPr id="9" name="Picture 8" descr="google_docs.png"/>
-          <p:cNvPicPr>
-            <a:picLocks noChangeAspect="1"/>
-          </p:cNvPicPr>
-          <p:nvPr/>
-        </p:nvPicPr>
-        <p:blipFill>
-          <a:blip r:embed="rId2"/>
-          <a:stretch>
-            <a:fillRect/>
-          </a:stretch>
-        </p:blipFill>
-        <p:spPr>
-          <a:xfrm>
-            <a:off x="1659331" y="1847087"/>
-            <a:ext cx="1220724" cy="1220724"/>
-          </a:xfrm>
-          <a:prstGeom prst="rect">
-            <a:avLst/>
-          </a:prstGeom>
-        </p:spPr>
-      </p:pic>
-      <p:sp>
-        <p:nvSpPr>
-          <p:cNvPr id="10" name="TextBox 9"/>
+      <p:sp>
+        <p:nvSpPr>
+          <p:cNvPr id="11" name="Rounded Rectangle 10"/>
+          <p:cNvSpPr/>
+          <p:nvPr/>
+        </p:nvSpPr>
+        <p:spPr>
+          <a:xfrm>
+            <a:off x="594360" y="3108960"/>
+            <a:ext cx="438912" cy="438912"/>
+          </a:xfrm>
+          <a:prstGeom prst="roundRect">
+            <a:avLst>
+              <a:gd name="adj" fmla="val 12000"/>
+            </a:avLst>
+          </a:prstGeom>
+          <a:solidFill>
+            <a:srgbClr val="095292"/>
+          </a:solidFill>
+          <a:ln>
+            <a:noFill/>
+          </a:ln>
+        </p:spPr>
+        <p:style>
+          <a:lnRef idx="1">
+            <a:schemeClr val="accent1"/>
+          </a:lnRef>
+          <a:fillRef idx="3">
+            <a:schemeClr val="accent1"/>
+          </a:fillRef>
+          <a:effectRef idx="2">
+            <a:schemeClr val="accent1"/>
+          </a:effectRef>
+          <a:fontRef idx="minor">
+            <a:schemeClr val="lt1"/>
+          </a:fontRef>
+        </p:style>
+        <p:txBody>
+          <a:bodyPr rtlCol="0" anchor="ctr"/>
+          <a:lstStyle/>
+          <a:p>
+            <a:pPr algn="ctr"/>
+          </a:p>
+        </p:txBody>
+      </p:sp>
+      <p:sp>
+        <p:nvSpPr>
+          <p:cNvPr id="12" name="TextBox 11"/>
           <p:cNvSpPr txBox="1"/>
           <p:nvPr/>
         </p:nvSpPr>
         <p:spPr>
           <a:xfrm>
-            <a:off x="530352" y="3159251"/>
-            <a:ext cx="3478682" cy="621792"/>
+            <a:off x="594360" y="3108960"/>
+            <a:ext cx="438912" cy="438912"/>
           </a:xfrm>
           <a:prstGeom prst="rect">
             <a:avLst/>
@@ -7973,48 +8211,80 @@
           <a:noFill/>
         </p:spPr>
         <p:txBody>
-          <a:bodyPr wrap="square" anchor="t"/>
+          <a:bodyPr wrap="square" anchor="ctr"/>
           <a:lstStyle/>
           <a:p>
             <a:pPr algn="ctr"/>
             <a:r>
-              <a:rPr sz="1300" b="1" i="0">
+              <a:rPr sz="1600" b="1" i="0">
+                <a:solidFill>
+                  <a:srgbClr val="FFFFFF"/>
+                </a:solidFill>
+                <a:latin typeface="Calibri"/>
+              </a:rPr>
+              <a:t>2</a:t>
+            </a:r>
+          </a:p>
+        </p:txBody>
+      </p:sp>
+      <p:sp>
+        <p:nvSpPr>
+          <p:cNvPr id="13" name="TextBox 12"/>
+          <p:cNvSpPr txBox="1"/>
+          <p:nvPr/>
+        </p:nvSpPr>
+        <p:spPr>
+          <a:xfrm>
+            <a:off x="1188720" y="2894076"/>
+            <a:ext cx="10271455" cy="886968"/>
+          </a:xfrm>
+          <a:prstGeom prst="rect">
+            <a:avLst/>
+          </a:prstGeom>
+          <a:noFill/>
+        </p:spPr>
+        <p:txBody>
+          <a:bodyPr wrap="square" anchor="ctr"/>
+          <a:lstStyle/>
+          <a:p>
+            <a:r>
+              <a:rPr sz="1500" b="1" i="0">
                 <a:solidFill>
                   <a:srgbClr val="095292"/>
                 </a:solidFill>
                 <a:latin typeface="Calibri"/>
               </a:rPr>
-              <a:t>Google Docs</a:t>
-            </a:r>
-          </a:p>
-          <a:p>
-            <a:pPr algn="ctr">
+              <a:t>Traduce con IA</a:t>
+            </a:r>
+          </a:p>
+          <a:p>
+            <a:pPr>
               <a:spcBef>
                 <a:spcPts val="200"/>
               </a:spcBef>
             </a:pPr>
             <a:r>
-              <a:rPr sz="1000" b="0" i="0">
-                <a:solidFill>
-                  <a:srgbClr val="666666"/>
-                </a:solidFill>
-                <a:latin typeface="Calibri"/>
-              </a:rPr>
-              <a:t>Pitch y portafolio</a:t>
-            </a:r>
-          </a:p>
-        </p:txBody>
-      </p:sp>
-      <p:sp>
-        <p:nvSpPr>
-          <p:cNvPr id="11" name="Rounded Rectangle 10"/>
+              <a:rPr sz="1300" b="0" i="0">
+                <a:solidFill>
+                  <a:srgbClr val="333333"/>
+                </a:solidFill>
+                <a:latin typeface="Calibri"/>
+              </a:rPr>
+              <a:t>Copia o describe tu boceto a una IA y pidele el codigo Mermaid: «convierte este diagrama a Mermaid usando flowchart». Revisa el resultado: la IA acierta la sintaxis, no tu modelo.</a:t>
+            </a:r>
+          </a:p>
+        </p:txBody>
+      </p:sp>
+      <p:sp>
+        <p:nvSpPr>
+          <p:cNvPr id="14" name="Rounded Rectangle 13"/>
           <p:cNvSpPr/>
           <p:nvPr/>
         </p:nvSpPr>
         <p:spPr>
           <a:xfrm>
-            <a:off x="4283354" y="1591056"/>
-            <a:ext cx="3624986" cy="2299716"/>
+            <a:off x="457200" y="3945636"/>
+            <a:ext cx="11277295" cy="1051560"/>
           </a:xfrm>
           <a:prstGeom prst="roundRect">
             <a:avLst>
@@ -8052,17 +8322,19 @@
       </p:sp>
       <p:sp>
         <p:nvSpPr>
-          <p:cNvPr id="12" name="Rectangle 11"/>
+          <p:cNvPr id="15" name="Rounded Rectangle 14"/>
           <p:cNvSpPr/>
           <p:nvPr/>
         </p:nvSpPr>
         <p:spPr>
           <a:xfrm>
-            <a:off x="4283354" y="1591056"/>
-            <a:ext cx="3624986" cy="64008"/>
-          </a:xfrm>
-          <a:prstGeom prst="rect">
-            <a:avLst/>
+            <a:off x="594360" y="4251960"/>
+            <a:ext cx="438912" cy="438912"/>
+          </a:xfrm>
+          <a:prstGeom prst="roundRect">
+            <a:avLst>
+              <a:gd name="adj" fmla="val 12000"/>
+            </a:avLst>
           </a:prstGeom>
           <a:solidFill>
             <a:srgbClr val="095292"/>
@@ -8095,20 +8367,103 @@
       </p:sp>
       <p:sp>
         <p:nvSpPr>
-          <p:cNvPr id="13" name="Rectangle 12"/>
+          <p:cNvPr id="16" name="TextBox 15"/>
+          <p:cNvSpPr txBox="1"/>
+          <p:nvPr/>
+        </p:nvSpPr>
+        <p:spPr>
+          <a:xfrm>
+            <a:off x="594360" y="4251960"/>
+            <a:ext cx="438912" cy="438912"/>
+          </a:xfrm>
+          <a:prstGeom prst="rect">
+            <a:avLst/>
+          </a:prstGeom>
+          <a:noFill/>
+        </p:spPr>
+        <p:txBody>
+          <a:bodyPr wrap="square" anchor="ctr"/>
+          <a:lstStyle/>
+          <a:p>
+            <a:pPr algn="ctr"/>
+            <a:r>
+              <a:rPr sz="1600" b="1" i="0">
+                <a:solidFill>
+                  <a:srgbClr val="FFFFFF"/>
+                </a:solidFill>
+                <a:latin typeface="Calibri"/>
+              </a:rPr>
+              <a:t>3</a:t>
+            </a:r>
+          </a:p>
+        </p:txBody>
+      </p:sp>
+      <p:sp>
+        <p:nvSpPr>
+          <p:cNvPr id="17" name="TextBox 16"/>
+          <p:cNvSpPr txBox="1"/>
+          <p:nvPr/>
+        </p:nvSpPr>
+        <p:spPr>
+          <a:xfrm>
+            <a:off x="1188720" y="4037076"/>
+            <a:ext cx="10271455" cy="886968"/>
+          </a:xfrm>
+          <a:prstGeom prst="rect">
+            <a:avLst/>
+          </a:prstGeom>
+          <a:noFill/>
+        </p:spPr>
+        <p:txBody>
+          <a:bodyPr wrap="square" anchor="ctr"/>
+          <a:lstStyle/>
+          <a:p>
+            <a:r>
+              <a:rPr sz="1500" b="1" i="0">
+                <a:solidFill>
+                  <a:srgbClr val="095292"/>
+                </a:solidFill>
+                <a:latin typeface="Calibri"/>
+              </a:rPr>
+              <a:t>Pega y renderiza en la plataforma del curso</a:t>
+            </a:r>
+          </a:p>
+          <a:p>
+            <a:pPr>
+              <a:spcBef>
+                <a:spcPts val="200"/>
+              </a:spcBef>
+            </a:pPr>
+            <a:r>
+              <a:rPr sz="1300" b="0" i="0">
+                <a:solidFill>
+                  <a:srgbClr val="333333"/>
+                </a:solidFill>
+                <a:latin typeface="Calibri"/>
+              </a:rPr>
+              <a:t>Pega ese codigo en la caja de texto de la pregunta y mira como lo dibuja la plataforma. Si no renderiza, corrige ahi mismo: lo que se califica es el diagrama renderizado dentro de la plataforma del curso.</a:t>
+            </a:r>
+          </a:p>
+        </p:txBody>
+      </p:sp>
+      <p:sp>
+        <p:nvSpPr>
+          <p:cNvPr id="18" name="Rounded Rectangle 17"/>
           <p:cNvSpPr/>
           <p:nvPr/>
         </p:nvSpPr>
         <p:spPr>
           <a:xfrm>
-            <a:off x="4283354" y="1655064"/>
-            <a:ext cx="3624986" cy="27432"/>
-          </a:xfrm>
-          <a:prstGeom prst="rect">
-            <a:avLst/>
+            <a:off x="457200" y="5088636"/>
+            <a:ext cx="11277295" cy="1051560"/>
+          </a:xfrm>
+          <a:prstGeom prst="roundRect">
+            <a:avLst>
+              <a:gd name="adj" fmla="val 12000"/>
+            </a:avLst>
           </a:prstGeom>
           <a:solidFill>
-            <a:srgbClr val="FFD000"/>
+            <a:srgbClr val="E8F4FA"/>
           </a:solidFill>
           <a:ln>
             <a:noFill/>
@@ -8136,137 +8491,21 @@
           </a:p>
         </p:txBody>
       </p:sp>
-      <p:pic>
-        <p:nvPicPr>
-          <p:cNvPr id="14" name="Picture 13" descr="drawio.png"/>
-          <p:cNvPicPr>
-            <a:picLocks noChangeAspect="1"/>
-          </p:cNvPicPr>
-          <p:nvPr/>
-        </p:nvPicPr>
-        <p:blipFill>
-          <a:blip r:embed="rId3"/>
-          <a:stretch>
-            <a:fillRect/>
-          </a:stretch>
-        </p:blipFill>
-        <p:spPr>
-          <a:xfrm>
-            <a:off x="5485485" y="1847087"/>
-            <a:ext cx="1220724" cy="1220724"/>
-          </a:xfrm>
-          <a:prstGeom prst="rect">
-            <a:avLst/>
-          </a:prstGeom>
-        </p:spPr>
-      </p:pic>
-      <p:sp>
-        <p:nvSpPr>
-          <p:cNvPr id="15" name="TextBox 14"/>
-          <p:cNvSpPr txBox="1"/>
-          <p:nvPr/>
-        </p:nvSpPr>
-        <p:spPr>
-          <a:xfrm>
-            <a:off x="4356506" y="3159251"/>
-            <a:ext cx="3478682" cy="621792"/>
-          </a:xfrm>
-          <a:prstGeom prst="rect">
-            <a:avLst/>
-          </a:prstGeom>
-          <a:noFill/>
-        </p:spPr>
-        <p:txBody>
-          <a:bodyPr wrap="square" anchor="t"/>
-          <a:lstStyle/>
-          <a:p>
-            <a:pPr algn="ctr"/>
-            <a:r>
-              <a:rPr sz="1300" b="1" i="0">
-                <a:solidFill>
-                  <a:srgbClr val="095292"/>
-                </a:solidFill>
-                <a:latin typeface="Calibri"/>
-              </a:rPr>
-              <a:t>draw.io</a:t>
-            </a:r>
-          </a:p>
-          <a:p>
-            <a:pPr algn="ctr">
-              <a:spcBef>
-                <a:spcPts val="200"/>
-              </a:spcBef>
-            </a:pPr>
-            <a:r>
-              <a:rPr sz="1000" b="0" i="0">
-                <a:solidFill>
-                  <a:srgbClr val="666666"/>
-                </a:solidFill>
-                <a:latin typeface="Calibri"/>
-              </a:rPr>
-              <a:t>Diagramas del paquete</a:t>
-            </a:r>
-          </a:p>
-        </p:txBody>
-      </p:sp>
-      <p:sp>
-        <p:nvSpPr>
-          <p:cNvPr id="16" name="Rounded Rectangle 15"/>
+      <p:sp>
+        <p:nvSpPr>
+          <p:cNvPr id="19" name="Rounded Rectangle 18"/>
           <p:cNvSpPr/>
           <p:nvPr/>
         </p:nvSpPr>
         <p:spPr>
           <a:xfrm>
-            <a:off x="8109508" y="1591056"/>
-            <a:ext cx="3624986" cy="2299716"/>
+            <a:off x="594360" y="5394960"/>
+            <a:ext cx="438912" cy="438912"/>
           </a:xfrm>
           <a:prstGeom prst="roundRect">
             <a:avLst>
               <a:gd name="adj" fmla="val 12000"/>
             </a:avLst>
-          </a:prstGeom>
-          <a:solidFill>
-            <a:srgbClr val="F2F2F2"/>
-          </a:solidFill>
-          <a:ln>
-            <a:noFill/>
-          </a:ln>
-        </p:spPr>
-        <p:style>
-          <a:lnRef idx="1">
-            <a:schemeClr val="accent1"/>
-          </a:lnRef>
-          <a:fillRef idx="3">
-            <a:schemeClr val="accent1"/>
-          </a:fillRef>
-          <a:effectRef idx="2">
-            <a:schemeClr val="accent1"/>
-          </a:effectRef>
-          <a:fontRef idx="minor">
-            <a:schemeClr val="lt1"/>
-          </a:fontRef>
-        </p:style>
-        <p:txBody>
-          <a:bodyPr rtlCol="0" anchor="ctr"/>
-          <a:lstStyle/>
-          <a:p>
-            <a:pPr algn="ctr"/>
-          </a:p>
-        </p:txBody>
-      </p:sp>
-      <p:sp>
-        <p:nvSpPr>
-          <p:cNvPr id="17" name="Rectangle 16"/>
-          <p:cNvSpPr/>
-          <p:nvPr/>
-        </p:nvSpPr>
-        <p:spPr>
-          <a:xfrm>
-            <a:off x="8109508" y="1591056"/>
-            <a:ext cx="3624986" cy="64008"/>
-          </a:xfrm>
-          <a:prstGeom prst="rect">
-            <a:avLst/>
           </a:prstGeom>
           <a:solidFill>
             <a:srgbClr val="095292"/>
@@ -8299,81 +8538,14 @@
       </p:sp>
       <p:sp>
         <p:nvSpPr>
-          <p:cNvPr id="18" name="Rectangle 17"/>
-          <p:cNvSpPr/>
-          <p:nvPr/>
-        </p:nvSpPr>
-        <p:spPr>
-          <a:xfrm>
-            <a:off x="8109508" y="1655064"/>
-            <a:ext cx="3624986" cy="27432"/>
-          </a:xfrm>
-          <a:prstGeom prst="rect">
-            <a:avLst/>
-          </a:prstGeom>
-          <a:solidFill>
-            <a:srgbClr val="FFD000"/>
-          </a:solidFill>
-          <a:ln>
-            <a:noFill/>
-          </a:ln>
-        </p:spPr>
-        <p:style>
-          <a:lnRef idx="1">
-            <a:schemeClr val="accent1"/>
-          </a:lnRef>
-          <a:fillRef idx="3">
-            <a:schemeClr val="accent1"/>
-          </a:fillRef>
-          <a:effectRef idx="2">
-            <a:schemeClr val="accent1"/>
-          </a:effectRef>
-          <a:fontRef idx="minor">
-            <a:schemeClr val="lt1"/>
-          </a:fontRef>
-        </p:style>
-        <p:txBody>
-          <a:bodyPr rtlCol="0" anchor="ctr"/>
-          <a:lstStyle/>
-          <a:p>
-            <a:pPr algn="ctr"/>
-          </a:p>
-        </p:txBody>
-      </p:sp>
-      <p:pic>
-        <p:nvPicPr>
-          <p:cNvPr id="19" name="Picture 18" descr="mermaid.png"/>
-          <p:cNvPicPr>
-            <a:picLocks noChangeAspect="1"/>
-          </p:cNvPicPr>
-          <p:nvPr/>
-        </p:nvPicPr>
-        <p:blipFill>
-          <a:blip r:embed="rId4"/>
-          <a:stretch>
-            <a:fillRect/>
-          </a:stretch>
-        </p:blipFill>
-        <p:spPr>
-          <a:xfrm>
-            <a:off x="9311640" y="1847087"/>
-            <a:ext cx="1220724" cy="1220724"/>
-          </a:xfrm>
-          <a:prstGeom prst="rect">
-            <a:avLst/>
-          </a:prstGeom>
-        </p:spPr>
-      </p:pic>
-      <p:sp>
-        <p:nvSpPr>
           <p:cNvPr id="20" name="TextBox 19"/>
           <p:cNvSpPr txBox="1"/>
           <p:nvPr/>
         </p:nvSpPr>
         <p:spPr>
           <a:xfrm>
-            <a:off x="8182660" y="3159251"/>
-            <a:ext cx="3478682" cy="621792"/>
+            <a:off x="594360" y="5394960"/>
+            <a:ext cx="438912" cy="438912"/>
           </a:xfrm>
           <a:prstGeom prst="rect">
             <a:avLst/>
@@ -8381,245 +8553,73 @@
           <a:noFill/>
         </p:spPr>
         <p:txBody>
-          <a:bodyPr wrap="square" anchor="t"/>
+          <a:bodyPr wrap="square" anchor="ctr"/>
           <a:lstStyle/>
           <a:p>
             <a:pPr algn="ctr"/>
             <a:r>
-              <a:rPr sz="1300" b="1" i="0">
+              <a:rPr sz="1600" b="1" i="0">
+                <a:solidFill>
+                  <a:srgbClr val="FFFFFF"/>
+                </a:solidFill>
+                <a:latin typeface="Calibri"/>
+              </a:rPr>
+              <a:t>4</a:t>
+            </a:r>
+          </a:p>
+        </p:txBody>
+      </p:sp>
+      <p:sp>
+        <p:nvSpPr>
+          <p:cNvPr id="21" name="TextBox 20"/>
+          <p:cNvSpPr txBox="1"/>
+          <p:nvPr/>
+        </p:nvSpPr>
+        <p:spPr>
+          <a:xfrm>
+            <a:off x="1188720" y="5180076"/>
+            <a:ext cx="10271455" cy="886968"/>
+          </a:xfrm>
+          <a:prstGeom prst="rect">
+            <a:avLst/>
+          </a:prstGeom>
+          <a:noFill/>
+        </p:spPr>
+        <p:txBody>
+          <a:bodyPr wrap="square" anchor="ctr"/>
+          <a:lstStyle/>
+          <a:p>
+            <a:r>
+              <a:rPr sz="1500" b="1" i="0">
                 <a:solidFill>
                   <a:srgbClr val="095292"/>
                 </a:solidFill>
                 <a:latin typeface="Calibri"/>
               </a:rPr>
-              <a:t>Mermaid</a:t>
-            </a:r>
-          </a:p>
-          <a:p>
-            <a:pPr algn="ctr">
+              <a:t>Guarda el PNG para tu PI</a:t>
+            </a:r>
+          </a:p>
+          <a:p>
+            <a:pPr>
               <a:spcBef>
                 <a:spcPts val="200"/>
               </a:spcBef>
             </a:pPr>
             <a:r>
-              <a:rPr sz="1000" b="0" i="0">
-                <a:solidFill>
-                  <a:srgbClr val="666666"/>
-                </a:solidFill>
-                <a:latin typeface="Calibri"/>
-              </a:rPr>
-              <a:t>Codigo del diagrama</a:t>
-            </a:r>
-          </a:p>
-        </p:txBody>
-      </p:sp>
-      <p:sp>
-        <p:nvSpPr>
-          <p:cNvPr id="21" name="Rounded Rectangle 20"/>
-          <p:cNvSpPr/>
-          <p:nvPr/>
-        </p:nvSpPr>
-        <p:spPr>
-          <a:xfrm>
-            <a:off x="4283354" y="4055364"/>
-            <a:ext cx="3624986" cy="2299716"/>
-          </a:xfrm>
-          <a:prstGeom prst="roundRect">
-            <a:avLst>
-              <a:gd name="adj" fmla="val 12000"/>
-            </a:avLst>
-          </a:prstGeom>
-          <a:solidFill>
-            <a:srgbClr val="F2F2F2"/>
-          </a:solidFill>
-          <a:ln>
-            <a:noFill/>
-          </a:ln>
-        </p:spPr>
-        <p:style>
-          <a:lnRef idx="1">
-            <a:schemeClr val="accent1"/>
-          </a:lnRef>
-          <a:fillRef idx="3">
-            <a:schemeClr val="accent1"/>
-          </a:fillRef>
-          <a:effectRef idx="2">
-            <a:schemeClr val="accent1"/>
-          </a:effectRef>
-          <a:fontRef idx="minor">
-            <a:schemeClr val="lt1"/>
-          </a:fontRef>
-        </p:style>
-        <p:txBody>
-          <a:bodyPr rtlCol="0" anchor="ctr"/>
-          <a:lstStyle/>
-          <a:p>
-            <a:pPr algn="ctr"/>
-          </a:p>
-        </p:txBody>
-      </p:sp>
-      <p:sp>
-        <p:nvSpPr>
-          <p:cNvPr id="22" name="Rectangle 21"/>
-          <p:cNvSpPr/>
-          <p:nvPr/>
-        </p:nvSpPr>
-        <p:spPr>
-          <a:xfrm>
-            <a:off x="4283354" y="4055364"/>
-            <a:ext cx="3624986" cy="64008"/>
-          </a:xfrm>
-          <a:prstGeom prst="rect">
-            <a:avLst/>
-          </a:prstGeom>
-          <a:solidFill>
-            <a:srgbClr val="095292"/>
-          </a:solidFill>
-          <a:ln>
-            <a:noFill/>
-          </a:ln>
-        </p:spPr>
-        <p:style>
-          <a:lnRef idx="1">
-            <a:schemeClr val="accent1"/>
-          </a:lnRef>
-          <a:fillRef idx="3">
-            <a:schemeClr val="accent1"/>
-          </a:fillRef>
-          <a:effectRef idx="2">
-            <a:schemeClr val="accent1"/>
-          </a:effectRef>
-          <a:fontRef idx="minor">
-            <a:schemeClr val="lt1"/>
-          </a:fontRef>
-        </p:style>
-        <p:txBody>
-          <a:bodyPr rtlCol="0" anchor="ctr"/>
-          <a:lstStyle/>
-          <a:p>
-            <a:pPr algn="ctr"/>
-          </a:p>
-        </p:txBody>
-      </p:sp>
-      <p:sp>
-        <p:nvSpPr>
-          <p:cNvPr id="23" name="Rectangle 22"/>
-          <p:cNvSpPr/>
-          <p:nvPr/>
-        </p:nvSpPr>
-        <p:spPr>
-          <a:xfrm>
-            <a:off x="4283354" y="4119372"/>
-            <a:ext cx="3624986" cy="27432"/>
-          </a:xfrm>
-          <a:prstGeom prst="rect">
-            <a:avLst/>
-          </a:prstGeom>
-          <a:solidFill>
-            <a:srgbClr val="FFD000"/>
-          </a:solidFill>
-          <a:ln>
-            <a:noFill/>
-          </a:ln>
-        </p:spPr>
-        <p:style>
-          <a:lnRef idx="1">
-            <a:schemeClr val="accent1"/>
-          </a:lnRef>
-          <a:fillRef idx="3">
-            <a:schemeClr val="accent1"/>
-          </a:fillRef>
-          <a:effectRef idx="2">
-            <a:schemeClr val="accent1"/>
-          </a:effectRef>
-          <a:fontRef idx="minor">
-            <a:schemeClr val="lt1"/>
-          </a:fontRef>
-        </p:style>
-        <p:txBody>
-          <a:bodyPr rtlCol="0" anchor="ctr"/>
-          <a:lstStyle/>
-          <a:p>
-            <a:pPr algn="ctr"/>
-          </a:p>
-        </p:txBody>
-      </p:sp>
-      <p:pic>
-        <p:nvPicPr>
-          <p:cNvPr id="24" name="Picture 23" descr="examlab.png"/>
-          <p:cNvPicPr>
-            <a:picLocks noChangeAspect="1"/>
-          </p:cNvPicPr>
-          <p:nvPr/>
-        </p:nvPicPr>
-        <p:blipFill>
-          <a:blip r:embed="rId5"/>
-          <a:stretch>
-            <a:fillRect/>
-          </a:stretch>
-        </p:blipFill>
-        <p:spPr>
-          <a:xfrm>
-            <a:off x="5485485" y="4311396"/>
-            <a:ext cx="1220724" cy="1220724"/>
-          </a:xfrm>
-          <a:prstGeom prst="rect">
-            <a:avLst/>
-          </a:prstGeom>
-        </p:spPr>
-      </p:pic>
-      <p:sp>
-        <p:nvSpPr>
-          <p:cNvPr id="25" name="TextBox 24"/>
-          <p:cNvSpPr txBox="1"/>
-          <p:nvPr/>
-        </p:nvSpPr>
-        <p:spPr>
-          <a:xfrm>
-            <a:off x="4356506" y="5623560"/>
-            <a:ext cx="3478682" cy="621792"/>
-          </a:xfrm>
-          <a:prstGeom prst="rect">
-            <a:avLst/>
-          </a:prstGeom>
-          <a:noFill/>
-        </p:spPr>
-        <p:txBody>
-          <a:bodyPr wrap="square" anchor="t"/>
-          <a:lstStyle/>
-          <a:p>
-            <a:pPr algn="ctr"/>
-            <a:r>
-              <a:rPr sz="1300" b="1" i="0">
-                <a:solidFill>
-                  <a:srgbClr val="095292"/>
-                </a:solidFill>
-                <a:latin typeface="Calibri"/>
-              </a:rPr>
-              <a:t>la plataforma del curso</a:t>
-            </a:r>
-          </a:p>
-          <a:p>
-            <a:pPr algn="ctr">
-              <a:spcBef>
-                <a:spcPts val="200"/>
-              </a:spcBef>
-            </a:pPr>
-            <a:r>
-              <a:rPr sz="1000" b="0" i="0">
-                <a:solidFill>
-                  <a:srgbClr val="666666"/>
-                </a:solidFill>
-                <a:latin typeface="Calibri"/>
-              </a:rPr>
-              <a:t>Donde se entrega</a:t>
-            </a:r>
-          </a:p>
-        </p:txBody>
-      </p:sp>
-      <p:sp>
-        <p:nvSpPr>
-          <p:cNvPr id="26" name="TextBox 25"/>
+              <a:rPr sz="1300" b="0" i="0">
+                <a:solidFill>
+                  <a:srgbClr val="333333"/>
+                </a:solidFill>
+                <a:latin typeface="Calibri"/>
+              </a:rPr>
+              <a:t>Exporta tambien la imagen a la carpeta de tu Proyecto Integrador. Esa copia es para tu informe; no reemplaza la respuesta en la plataforma.</a:t>
+            </a:r>
+          </a:p>
+        </p:txBody>
+      </p:sp>
+      <p:sp>
+        <p:nvSpPr>
+          <p:cNvPr id="22" name="TextBox 21"/>
           <p:cNvSpPr txBox="1"/>
           <p:nvPr/>
         </p:nvSpPr>
